--- a/preview_v7/cn/l-cn-bs-u2-1.pptx
+++ b/preview_v7/cn/l-cn-bs-u2-1.pptx
@@ -3140,47 +3140,31 @@
           </a:p>
         </p:txBody>
       </p:sp>
-      <p:sp>
-        <p:nvSpPr>
-          <p:cNvPr id="3" name="TextBox 2"/>
-          <p:cNvSpPr txBox="1"/>
-          <p:nvPr/>
-        </p:nvSpPr>
-        <p:spPr>
-          <a:xfrm>
-            <a:off x="640080" y="640080"/>
-            <a:ext cx="10911535" cy="502920"/>
-          </a:xfrm>
-          <a:prstGeom prst="rect">
-            <a:avLst/>
-          </a:prstGeom>
-          <a:noFill/>
-        </p:spPr>
-        <p:txBody>
-          <a:bodyPr wrap="square" anchor="t" lIns="0" rIns="0" tIns="0" bIns="0">
-            <a:spAutoFit/>
-          </a:bodyPr>
-          <a:lstStyle/>
-          <a:p>
-            <a:pPr algn="l">
-              <a:spcAft>
-                <a:spcPts val="0"/>
-              </a:spcAft>
-            </a:pPr>
-            <a:r>
-              <a:rPr sz="1200" b="1">
-                <a:solidFill>
-                  <a:srgbClr val="B23A2A"/>
-                </a:solidFill>
-                <a:latin typeface="微软雅黑"/>
-                <a:ea typeface="微软雅黑"/>
-                <a:cs typeface="微软雅黑"/>
-              </a:rPr>
-              <a:t>语文 · 必修上册 · 第2单元 劳动光荣</a:t>
-            </a:r>
-          </a:p>
-        </p:txBody>
-      </p:sp>
+      <p:pic>
+        <p:nvPicPr>
+          <p:cNvPr id="3" name="Picture 2" descr="harvest.jpg"/>
+          <p:cNvPicPr>
+            <a:picLocks noChangeAspect="1"/>
+          </p:cNvPicPr>
+          <p:nvPr/>
+        </p:nvPicPr>
+        <p:blipFill>
+          <a:blip r:embed="rId2"/>
+          <a:srcRect t="12499" b="12499"/>
+          <a:stretch>
+            <a:fillRect/>
+          </a:stretch>
+        </p:blipFill>
+        <p:spPr>
+          <a:xfrm>
+            <a:off x="0" y="0"/>
+            <a:ext cx="12191695" cy="6858000"/>
+          </a:xfrm>
+          <a:prstGeom prst="rect">
+            <a:avLst/>
+          </a:prstGeom>
+        </p:spPr>
+      </p:pic>
       <p:sp>
         <p:nvSpPr>
           <p:cNvPr id="4" name="Rectangle 3"/>
@@ -3189,14 +3173,16 @@
         </p:nvSpPr>
         <p:spPr>
           <a:xfrm>
-            <a:off x="640080" y="1207008"/>
-            <a:ext cx="822960" cy="30480"/>
+            <a:off x="0" y="0"/>
+            <a:ext cx="12191695" cy="6858000"/>
           </a:xfrm>
           <a:prstGeom prst="rect">
             <a:avLst/>
           </a:prstGeom>
           <a:solidFill>
-            <a:srgbClr val="B23A2A"/>
+            <a:srgbClr val="1C2A33">
+              <a:alpha val="55000"/>
+            </a:srgbClr>
           </a:solidFill>
           <a:ln>
             <a:noFill/>
@@ -3227,92 +3213,14 @@
       </p:sp>
       <p:sp>
         <p:nvSpPr>
-          <p:cNvPr id="5" name="TextBox 4"/>
-          <p:cNvSpPr txBox="1"/>
-          <p:nvPr/>
-        </p:nvSpPr>
-        <p:spPr>
-          <a:xfrm>
-            <a:off x="640080" y="1737360"/>
-            <a:ext cx="10911535" cy="2011680"/>
-          </a:xfrm>
-          <a:prstGeom prst="rect">
-            <a:avLst/>
-          </a:prstGeom>
-          <a:noFill/>
-        </p:spPr>
-        <p:txBody>
-          <a:bodyPr wrap="square" anchor="t" lIns="0" rIns="0" tIns="0" bIns="0">
-            <a:spAutoFit/>
-          </a:bodyPr>
-          <a:lstStyle/>
-          <a:p>
-            <a:pPr algn="l">
-              <a:lnSpc>
-                <a:spcPct val="115000"/>
-              </a:lnSpc>
-            </a:pPr>
-            <a:r>
-              <a:rPr sz="4000" b="1">
-                <a:solidFill>
-                  <a:srgbClr val="1C2A33"/>
-                </a:solidFill>
-                <a:latin typeface="楷体"/>
-                <a:ea typeface="楷体"/>
-                <a:cs typeface="楷体"/>
-              </a:rPr>
-              <a:t>实用文本阅读（上）——喜看稻菽千重浪：袁隆平的科学人生</a:t>
-            </a:r>
-          </a:p>
-        </p:txBody>
-      </p:sp>
-      <p:sp>
-        <p:nvSpPr>
-          <p:cNvPr id="6" name="TextBox 5"/>
-          <p:cNvSpPr txBox="1"/>
-          <p:nvPr/>
-        </p:nvSpPr>
-        <p:spPr>
-          <a:xfrm>
-            <a:off x="640080" y="3840480"/>
-            <a:ext cx="10911535" cy="457200"/>
-          </a:xfrm>
-          <a:prstGeom prst="rect">
-            <a:avLst/>
-          </a:prstGeom>
-          <a:noFill/>
-        </p:spPr>
-        <p:txBody>
-          <a:bodyPr wrap="square" anchor="t" lIns="0" rIns="0" tIns="0" bIns="0">
-            <a:spAutoFit/>
-          </a:bodyPr>
-          <a:lstStyle/>
-          <a:p>
-            <a:pPr algn="l"/>
-            <a:r>
-              <a:rPr sz="1700" b="1">
-                <a:solidFill>
-                  <a:srgbClr val="B23A2A"/>
-                </a:solidFill>
-                <a:latin typeface="微软雅黑"/>
-                <a:ea typeface="微软雅黑"/>
-                <a:cs typeface="微软雅黑"/>
-              </a:rPr>
-              <a:t>实用文本阅读  ·  第1课时  ·  45分钟</a:t>
-            </a:r>
-          </a:p>
-        </p:txBody>
-      </p:sp>
-      <p:sp>
-        <p:nvSpPr>
-          <p:cNvPr id="7" name="Rectangle 6"/>
+          <p:cNvPr id="5" name="Rectangle 4"/>
           <p:cNvSpPr/>
           <p:nvPr/>
         </p:nvSpPr>
         <p:spPr>
           <a:xfrm>
-            <a:off x="640080" y="5394960"/>
-            <a:ext cx="2011680" cy="33020"/>
+            <a:off x="640080" y="1005840"/>
+            <a:ext cx="822960" cy="38100"/>
           </a:xfrm>
           <a:prstGeom prst="rect">
             <a:avLst/>
@@ -3349,14 +3257,14 @@
       </p:sp>
       <p:sp>
         <p:nvSpPr>
-          <p:cNvPr id="8" name="TextBox 7"/>
+          <p:cNvPr id="6" name="TextBox 5"/>
           <p:cNvSpPr txBox="1"/>
           <p:nvPr/>
         </p:nvSpPr>
         <p:spPr>
           <a:xfrm>
-            <a:off x="640080" y="5623560"/>
-            <a:ext cx="10911535" cy="548640"/>
+            <a:off x="640080" y="1188720"/>
+            <a:ext cx="10058400" cy="457200"/>
           </a:xfrm>
           <a:prstGeom prst="rect">
             <a:avLst/>
@@ -3371,15 +3279,89 @@
           <a:p>
             <a:pPr algn="l"/>
             <a:r>
-              <a:rPr sz="1400" b="0">
-                <a:solidFill>
-                  <a:srgbClr val="6B6258"/>
+              <a:rPr sz="1500" b="1">
+                <a:solidFill>
+                  <a:srgbClr val="C8A86B"/>
                 </a:solidFill>
                 <a:latin typeface="微软雅黑"/>
                 <a:ea typeface="微软雅黑"/>
                 <a:cs typeface="微软雅黑"/>
               </a:rPr>
-              <a:t>学习任务群：实用性阅读与交流    |    年级：高一</a:t>
+              <a:t>必修上 第二单元 · 劳动光荣 · 第一课时</a:t>
+            </a:r>
+          </a:p>
+        </p:txBody>
+      </p:sp>
+      <p:sp>
+        <p:nvSpPr>
+          <p:cNvPr id="7" name="TextBox 6"/>
+          <p:cNvSpPr txBox="1"/>
+          <p:nvPr/>
+        </p:nvSpPr>
+        <p:spPr>
+          <a:xfrm>
+            <a:off x="640080" y="1783080"/>
+            <a:ext cx="11247120" cy="1371600"/>
+          </a:xfrm>
+          <a:prstGeom prst="rect">
+            <a:avLst/>
+          </a:prstGeom>
+          <a:noFill/>
+        </p:spPr>
+        <p:txBody>
+          <a:bodyPr wrap="square" anchor="t" lIns="0" rIns="0" tIns="0" bIns="0">
+            <a:spAutoFit/>
+          </a:bodyPr>
+          <a:lstStyle/>
+          <a:p>
+            <a:pPr algn="l"/>
+            <a:r>
+              <a:rPr sz="5000" b="1">
+                <a:solidFill>
+                  <a:srgbClr val="FFFFFF"/>
+                </a:solidFill>
+                <a:latin typeface="楷体"/>
+                <a:ea typeface="楷体"/>
+                <a:cs typeface="楷体"/>
+              </a:rPr>
+              <a:t>实用文本阅读（上）</a:t>
+            </a:r>
+          </a:p>
+        </p:txBody>
+      </p:sp>
+      <p:sp>
+        <p:nvSpPr>
+          <p:cNvPr id="8" name="TextBox 7"/>
+          <p:cNvSpPr txBox="1"/>
+          <p:nvPr/>
+        </p:nvSpPr>
+        <p:spPr>
+          <a:xfrm>
+            <a:off x="640080" y="2743200"/>
+            <a:ext cx="11247120" cy="1097280"/>
+          </a:xfrm>
+          <a:prstGeom prst="rect">
+            <a:avLst/>
+          </a:prstGeom>
+          <a:noFill/>
+        </p:spPr>
+        <p:txBody>
+          <a:bodyPr wrap="square" anchor="t" lIns="0" rIns="0" tIns="0" bIns="0">
+            <a:spAutoFit/>
+          </a:bodyPr>
+          <a:lstStyle/>
+          <a:p>
+            <a:pPr algn="l"/>
+            <a:r>
+              <a:rPr sz="3000" b="1">
+                <a:solidFill>
+                  <a:srgbClr val="C8A86B"/>
+                </a:solidFill>
+                <a:latin typeface="楷体"/>
+                <a:ea typeface="楷体"/>
+                <a:cs typeface="楷体"/>
+              </a:rPr>
+              <a:t>喜看稻菽千重浪 · 袁隆平的科学人生</a:t>
             </a:r>
           </a:p>
         </p:txBody>
@@ -3387,6 +3369,88 @@
       <p:sp>
         <p:nvSpPr>
           <p:cNvPr id="9" name="TextBox 8"/>
+          <p:cNvSpPr txBox="1"/>
+          <p:nvPr/>
+        </p:nvSpPr>
+        <p:spPr>
+          <a:xfrm>
+            <a:off x="640080" y="4114800"/>
+            <a:ext cx="10972800" cy="1005840"/>
+          </a:xfrm>
+          <a:prstGeom prst="rect">
+            <a:avLst/>
+          </a:prstGeom>
+          <a:noFill/>
+        </p:spPr>
+        <p:txBody>
+          <a:bodyPr wrap="square" anchor="t" lIns="0" rIns="0" tIns="0" bIns="0">
+            <a:spAutoFit/>
+          </a:bodyPr>
+          <a:lstStyle/>
+          <a:p>
+            <a:pPr algn="l">
+              <a:lnSpc>
+                <a:spcPct val="140000"/>
+              </a:lnSpc>
+            </a:pPr>
+            <a:r>
+              <a:rPr sz="1700" b="0">
+                <a:solidFill>
+                  <a:srgbClr val="E7DFD2"/>
+                </a:solidFill>
+                <a:latin typeface="楷体"/>
+                <a:ea typeface="楷体"/>
+                <a:cs typeface="楷体"/>
+              </a:rPr>
+              <a:t>一篇人物通讯，写一段把饭碗端在自己手里的科学人生。</a:t>
+            </a:r>
+          </a:p>
+        </p:txBody>
+      </p:sp>
+      <p:sp>
+        <p:nvSpPr>
+          <p:cNvPr id="10" name="TextBox 9"/>
+          <p:cNvSpPr txBox="1"/>
+          <p:nvPr/>
+        </p:nvSpPr>
+        <p:spPr>
+          <a:xfrm>
+            <a:off x="640080" y="4846320"/>
+            <a:ext cx="10972800" cy="914400"/>
+          </a:xfrm>
+          <a:prstGeom prst="rect">
+            <a:avLst/>
+          </a:prstGeom>
+          <a:noFill/>
+        </p:spPr>
+        <p:txBody>
+          <a:bodyPr wrap="square" anchor="t" lIns="0" rIns="0" tIns="0" bIns="0">
+            <a:spAutoFit/>
+          </a:bodyPr>
+          <a:lstStyle/>
+          <a:p>
+            <a:pPr algn="l">
+              <a:lnSpc>
+                <a:spcPct val="140000"/>
+              </a:lnSpc>
+            </a:pPr>
+            <a:r>
+              <a:rPr sz="1500" b="0">
+                <a:solidFill>
+                  <a:srgbClr val="FFFFFF"/>
+                </a:solidFill>
+                <a:latin typeface="楷体"/>
+                <a:ea typeface="楷体"/>
+                <a:cs typeface="楷体"/>
+              </a:rPr>
+              <a:t>从1960到1973：14万株稻穗里，长出一株改变世界的不育株。</a:t>
+            </a:r>
+          </a:p>
+        </p:txBody>
+      </p:sp>
+      <p:sp>
+        <p:nvSpPr>
+          <p:cNvPr id="11" name="TextBox 10"/>
           <p:cNvSpPr txBox="1"/>
           <p:nvPr/>
         </p:nvSpPr>
@@ -3519,7 +3583,7 @@
                 <a:ea typeface="微软雅黑"/>
                 <a:cs typeface="微软雅黑"/>
               </a:rPr>
-              <a:t>学习目标</a:t>
+              <a:t>本课目标</a:t>
             </a:r>
           </a:p>
         </p:txBody>
@@ -3570,14 +3634,51 @@
       </p:sp>
       <p:sp>
         <p:nvSpPr>
-          <p:cNvPr id="5" name="Rounded Rectangle 4"/>
+          <p:cNvPr id="5" name="TextBox 4"/>
+          <p:cNvSpPr txBox="1"/>
+          <p:nvPr/>
+        </p:nvSpPr>
+        <p:spPr>
+          <a:xfrm>
+            <a:off x="640080" y="1325880"/>
+            <a:ext cx="10058400" cy="640080"/>
+          </a:xfrm>
+          <a:prstGeom prst="rect">
+            <a:avLst/>
+          </a:prstGeom>
+          <a:noFill/>
+        </p:spPr>
+        <p:txBody>
+          <a:bodyPr wrap="square" anchor="t" lIns="0" rIns="0" tIns="0" bIns="0">
+            <a:spAutoFit/>
+          </a:bodyPr>
+          <a:lstStyle/>
+          <a:p>
+            <a:pPr algn="l"/>
+            <a:r>
+              <a:rPr sz="3200" b="1">
+                <a:solidFill>
+                  <a:srgbClr val="1C2A33"/>
+                </a:solidFill>
+                <a:latin typeface="楷体"/>
+                <a:ea typeface="楷体"/>
+                <a:cs typeface="楷体"/>
+              </a:rPr>
+              <a:t>本课学习目标</a:t>
+            </a:r>
+          </a:p>
+        </p:txBody>
+      </p:sp>
+      <p:sp>
+        <p:nvSpPr>
+          <p:cNvPr id="6" name="Rounded Rectangle 5"/>
           <p:cNvSpPr/>
           <p:nvPr/>
         </p:nvSpPr>
         <p:spPr>
           <a:xfrm>
-            <a:off x="640080" y="1417320"/>
-            <a:ext cx="5349240" cy="2057400"/>
+            <a:off x="640080" y="2377440"/>
+            <a:ext cx="2453563" cy="3383280"/>
           </a:xfrm>
           <a:prstGeom prst="roundRect">
             <a:avLst/>
@@ -3585,7 +3686,7 @@
           <a:solidFill>
             <a:srgbClr val="FFFFFF"/>
           </a:solidFill>
-          <a:ln w="22860">
+          <a:ln w="20320">
             <a:solidFill>
               <a:srgbClr val="B23A2A"/>
             </a:solidFill>
@@ -3616,14 +3717,14 @@
       </p:sp>
       <p:sp>
         <p:nvSpPr>
-          <p:cNvPr id="6" name="Oval 5"/>
+          <p:cNvPr id="7" name="Oval 6"/>
           <p:cNvSpPr/>
           <p:nvPr/>
         </p:nvSpPr>
         <p:spPr>
           <a:xfrm>
-            <a:off x="804672" y="1581912"/>
-            <a:ext cx="457200" cy="457200"/>
+            <a:off x="1455381" y="2697480"/>
+            <a:ext cx="822960" cy="822960"/>
           </a:xfrm>
           <a:prstGeom prst="ellipse">
             <a:avLst/>
@@ -3660,14 +3761,14 @@
       </p:sp>
       <p:sp>
         <p:nvSpPr>
-          <p:cNvPr id="7" name="TextBox 6"/>
+          <p:cNvPr id="8" name="TextBox 7"/>
           <p:cNvSpPr txBox="1"/>
           <p:nvPr/>
         </p:nvSpPr>
         <p:spPr>
           <a:xfrm>
-            <a:off x="804672" y="1636776"/>
-            <a:ext cx="457200" cy="384048"/>
+            <a:off x="1455381" y="2880360"/>
+            <a:ext cx="822960" cy="457200"/>
           </a:xfrm>
           <a:prstGeom prst="rect">
             <a:avLst/>
@@ -3682,29 +3783,66 @@
           <a:p>
             <a:pPr algn="ctr"/>
             <a:r>
-              <a:rPr sz="1600" b="1">
+              <a:rPr sz="2400" b="1">
                 <a:solidFill>
                   <a:srgbClr val="FFFFFF"/>
+                </a:solidFill>
+                <a:latin typeface="楷体"/>
+                <a:ea typeface="楷体"/>
+                <a:cs typeface="楷体"/>
+              </a:rPr>
+              <a:t>1</a:t>
+            </a:r>
+          </a:p>
+        </p:txBody>
+      </p:sp>
+      <p:sp>
+        <p:nvSpPr>
+          <p:cNvPr id="9" name="TextBox 8"/>
+          <p:cNvSpPr txBox="1"/>
+          <p:nvPr/>
+        </p:nvSpPr>
+        <p:spPr>
+          <a:xfrm>
+            <a:off x="822960" y="3749040"/>
+            <a:ext cx="2087803" cy="548640"/>
+          </a:xfrm>
+          <a:prstGeom prst="rect">
+            <a:avLst/>
+          </a:prstGeom>
+          <a:noFill/>
+        </p:spPr>
+        <p:txBody>
+          <a:bodyPr wrap="square" anchor="t" lIns="0" rIns="0" tIns="0" bIns="0">
+            <a:spAutoFit/>
+          </a:bodyPr>
+          <a:lstStyle/>
+          <a:p>
+            <a:pPr algn="ctr"/>
+            <a:r>
+              <a:rPr sz="1800" b="1">
+                <a:solidFill>
+                  <a:srgbClr val="B23A2A"/>
                 </a:solidFill>
                 <a:latin typeface="微软雅黑"/>
                 <a:ea typeface="微软雅黑"/>
                 <a:cs typeface="微软雅黑"/>
               </a:rPr>
-              <a:t>1</a:t>
-            </a:r>
-          </a:p>
-        </p:txBody>
-      </p:sp>
-      <p:sp>
-        <p:nvSpPr>
-          <p:cNvPr id="8" name="TextBox 7"/>
+              <a:t>语言能力</a:t>
+            </a:r>
+          </a:p>
+        </p:txBody>
+      </p:sp>
+      <p:sp>
+        <p:nvSpPr>
+          <p:cNvPr id="10" name="TextBox 9"/>
           <p:cNvSpPr txBox="1"/>
           <p:nvPr/>
         </p:nvSpPr>
         <p:spPr>
           <a:xfrm>
-            <a:off x="1371600" y="1527048"/>
-            <a:ext cx="4434840" cy="457200"/>
+            <a:off x="841248" y="4343400"/>
+            <a:ext cx="2051227" cy="1280160"/>
           </a:xfrm>
           <a:prstGeom prst="rect">
             <a:avLst/>
@@ -3717,54 +3855,13 @@
           </a:bodyPr>
           <a:lstStyle/>
           <a:p>
-            <a:pPr algn="l">
+            <a:pPr algn="ctr">
               <a:lnSpc>
-                <a:spcPct val="110000"/>
+                <a:spcPct val="145000"/>
               </a:lnSpc>
             </a:pPr>
             <a:r>
-              <a:rPr sz="1600" b="1">
-                <a:solidFill>
-                  <a:srgbClr val="1C2A33"/>
-                </a:solidFill>
-                <a:latin typeface="微软雅黑"/>
-                <a:ea typeface="微软雅黑"/>
-                <a:cs typeface="微软雅黑"/>
-              </a:rPr>
-              <a:t>目标</a:t>
-            </a:r>
-          </a:p>
-        </p:txBody>
-      </p:sp>
-      <p:sp>
-        <p:nvSpPr>
-          <p:cNvPr id="9" name="TextBox 8"/>
-          <p:cNvSpPr txBox="1"/>
-          <p:nvPr/>
-        </p:nvSpPr>
-        <p:spPr>
-          <a:xfrm>
-            <a:off x="1371600" y="1965960"/>
-            <a:ext cx="4434840" cy="1417320"/>
-          </a:xfrm>
-          <a:prstGeom prst="rect">
-            <a:avLst/>
-          </a:prstGeom>
-          <a:noFill/>
-        </p:spPr>
-        <p:txBody>
-          <a:bodyPr wrap="square" anchor="t" lIns="0" rIns="0" tIns="0" bIns="0">
-            <a:spAutoFit/>
-          </a:bodyPr>
-          <a:lstStyle/>
-          <a:p>
-            <a:pPr algn="l">
-              <a:lnSpc>
-                <a:spcPct val="128000"/>
-              </a:lnSpc>
-            </a:pPr>
-            <a:r>
-              <a:rPr sz="1200" b="0">
+              <a:rPr sz="1300" b="0">
                 <a:solidFill>
                   <a:srgbClr val="1C2A33"/>
                 </a:solidFill>
@@ -3772,21 +3869,21 @@
                 <a:ea typeface="楷体"/>
                 <a:cs typeface="楷体"/>
               </a:rPr>
-              <a:t>语言能力：能说出通讯的文体特征（真实·及时·典型），梳理袁隆平科研历程的三个关键节点。</a:t>
-            </a:r>
-          </a:p>
-        </p:txBody>
-      </p:sp>
-      <p:sp>
-        <p:nvSpPr>
-          <p:cNvPr id="10" name="Rounded Rectangle 9"/>
+              <a:t>说出通讯的文体特征（真实·及时·典型），梳理袁隆平科研历程的三个关键节点。</a:t>
+            </a:r>
+          </a:p>
+        </p:txBody>
+      </p:sp>
+      <p:sp>
+        <p:nvSpPr>
+          <p:cNvPr id="11" name="Rounded Rectangle 10"/>
           <p:cNvSpPr/>
           <p:nvPr/>
         </p:nvSpPr>
         <p:spPr>
           <a:xfrm>
-            <a:off x="6263640" y="1417320"/>
-            <a:ext cx="5349240" cy="2057400"/>
+            <a:off x="3459403" y="2377440"/>
+            <a:ext cx="2453563" cy="3383280"/>
           </a:xfrm>
           <a:prstGeom prst="roundRect">
             <a:avLst/>
@@ -3794,9 +3891,9 @@
           <a:solidFill>
             <a:srgbClr val="FFFFFF"/>
           </a:solidFill>
-          <a:ln w="22860">
+          <a:ln w="20320">
             <a:solidFill>
-              <a:srgbClr val="B23A2A"/>
+              <a:srgbClr val="2E7D6B"/>
             </a:solidFill>
           </a:ln>
           <a:effectLst/>
@@ -3825,20 +3922,20 @@
       </p:sp>
       <p:sp>
         <p:nvSpPr>
-          <p:cNvPr id="11" name="Oval 10"/>
+          <p:cNvPr id="12" name="Oval 11"/>
           <p:cNvSpPr/>
           <p:nvPr/>
         </p:nvSpPr>
         <p:spPr>
           <a:xfrm>
-            <a:off x="6428232" y="1581912"/>
-            <a:ext cx="457200" cy="457200"/>
+            <a:off x="4274705" y="2697480"/>
+            <a:ext cx="822960" cy="822960"/>
           </a:xfrm>
           <a:prstGeom prst="ellipse">
             <a:avLst/>
           </a:prstGeom>
           <a:solidFill>
-            <a:srgbClr val="B23A2A"/>
+            <a:srgbClr val="2E7D6B"/>
           </a:solidFill>
           <a:ln>
             <a:noFill/>
@@ -3869,14 +3966,14 @@
       </p:sp>
       <p:sp>
         <p:nvSpPr>
-          <p:cNvPr id="12" name="TextBox 11"/>
+          <p:cNvPr id="13" name="TextBox 12"/>
           <p:cNvSpPr txBox="1"/>
           <p:nvPr/>
         </p:nvSpPr>
         <p:spPr>
           <a:xfrm>
-            <a:off x="6428232" y="1636776"/>
-            <a:ext cx="457200" cy="384048"/>
+            <a:off x="4274705" y="2880360"/>
+            <a:ext cx="822960" cy="457200"/>
           </a:xfrm>
           <a:prstGeom prst="rect">
             <a:avLst/>
@@ -3891,29 +3988,66 @@
           <a:p>
             <a:pPr algn="ctr"/>
             <a:r>
-              <a:rPr sz="1600" b="1">
+              <a:rPr sz="2400" b="1">
                 <a:solidFill>
                   <a:srgbClr val="FFFFFF"/>
+                </a:solidFill>
+                <a:latin typeface="楷体"/>
+                <a:ea typeface="楷体"/>
+                <a:cs typeface="楷体"/>
+              </a:rPr>
+              <a:t>2</a:t>
+            </a:r>
+          </a:p>
+        </p:txBody>
+      </p:sp>
+      <p:sp>
+        <p:nvSpPr>
+          <p:cNvPr id="14" name="TextBox 13"/>
+          <p:cNvSpPr txBox="1"/>
+          <p:nvPr/>
+        </p:nvSpPr>
+        <p:spPr>
+          <a:xfrm>
+            <a:off x="3642283" y="3749040"/>
+            <a:ext cx="2087803" cy="548640"/>
+          </a:xfrm>
+          <a:prstGeom prst="rect">
+            <a:avLst/>
+          </a:prstGeom>
+          <a:noFill/>
+        </p:spPr>
+        <p:txBody>
+          <a:bodyPr wrap="square" anchor="t" lIns="0" rIns="0" tIns="0" bIns="0">
+            <a:spAutoFit/>
+          </a:bodyPr>
+          <a:lstStyle/>
+          <a:p>
+            <a:pPr algn="ctr"/>
+            <a:r>
+              <a:rPr sz="1800" b="1">
+                <a:solidFill>
+                  <a:srgbClr val="2E7D6B"/>
                 </a:solidFill>
                 <a:latin typeface="微软雅黑"/>
                 <a:ea typeface="微软雅黑"/>
                 <a:cs typeface="微软雅黑"/>
               </a:rPr>
-              <a:t>2</a:t>
-            </a:r>
-          </a:p>
-        </p:txBody>
-      </p:sp>
-      <p:sp>
-        <p:nvSpPr>
-          <p:cNvPr id="13" name="TextBox 12"/>
+              <a:t>文化意识</a:t>
+            </a:r>
+          </a:p>
+        </p:txBody>
+      </p:sp>
+      <p:sp>
+        <p:nvSpPr>
+          <p:cNvPr id="15" name="TextBox 14"/>
           <p:cNvSpPr txBox="1"/>
           <p:nvPr/>
         </p:nvSpPr>
         <p:spPr>
           <a:xfrm>
-            <a:off x="6995160" y="1527048"/>
-            <a:ext cx="4434840" cy="457200"/>
+            <a:off x="3660571" y="4343400"/>
+            <a:ext cx="2051227" cy="1280160"/>
           </a:xfrm>
           <a:prstGeom prst="rect">
             <a:avLst/>
@@ -3926,54 +4060,13 @@
           </a:bodyPr>
           <a:lstStyle/>
           <a:p>
-            <a:pPr algn="l">
+            <a:pPr algn="ctr">
               <a:lnSpc>
-                <a:spcPct val="110000"/>
+                <a:spcPct val="145000"/>
               </a:lnSpc>
             </a:pPr>
             <a:r>
-              <a:rPr sz="1600" b="1">
-                <a:solidFill>
-                  <a:srgbClr val="1C2A33"/>
-                </a:solidFill>
-                <a:latin typeface="微软雅黑"/>
-                <a:ea typeface="微软雅黑"/>
-                <a:cs typeface="微软雅黑"/>
-              </a:rPr>
-              <a:t>目标</a:t>
-            </a:r>
-          </a:p>
-        </p:txBody>
-      </p:sp>
-      <p:sp>
-        <p:nvSpPr>
-          <p:cNvPr id="14" name="TextBox 13"/>
-          <p:cNvSpPr txBox="1"/>
-          <p:nvPr/>
-        </p:nvSpPr>
-        <p:spPr>
-          <a:xfrm>
-            <a:off x="6995160" y="1965960"/>
-            <a:ext cx="4434840" cy="1417320"/>
-          </a:xfrm>
-          <a:prstGeom prst="rect">
-            <a:avLst/>
-          </a:prstGeom>
-          <a:noFill/>
-        </p:spPr>
-        <p:txBody>
-          <a:bodyPr wrap="square" anchor="t" lIns="0" rIns="0" tIns="0" bIns="0">
-            <a:spAutoFit/>
-          </a:bodyPr>
-          <a:lstStyle/>
-          <a:p>
-            <a:pPr algn="l">
-              <a:lnSpc>
-                <a:spcPct val="128000"/>
-              </a:lnSpc>
-            </a:pPr>
-            <a:r>
-              <a:rPr sz="1200" b="0">
+              <a:rPr sz="1300" b="0">
                 <a:solidFill>
                   <a:srgbClr val="1C2A33"/>
                 </a:solidFill>
@@ -3981,21 +4074,21 @@
                 <a:ea typeface="楷体"/>
                 <a:cs typeface="楷体"/>
               </a:rPr>
-              <a:t>文化意识：理解袁隆平「尊重事实、勇于创新、心系苍生」的科学精神，感受劳动者的时代担当。</a:t>
-            </a:r>
-          </a:p>
-        </p:txBody>
-      </p:sp>
-      <p:sp>
-        <p:nvSpPr>
-          <p:cNvPr id="15" name="Rounded Rectangle 14"/>
+              <a:t>理解袁隆平「尊重事实、勇于创新、心系苍生」的科学精神，感受劳动者的时代担当。</a:t>
+            </a:r>
+          </a:p>
+        </p:txBody>
+      </p:sp>
+      <p:sp>
+        <p:nvSpPr>
+          <p:cNvPr id="16" name="Rounded Rectangle 15"/>
           <p:cNvSpPr/>
           <p:nvPr/>
         </p:nvSpPr>
         <p:spPr>
           <a:xfrm>
-            <a:off x="640080" y="3703320"/>
-            <a:ext cx="5349240" cy="2057400"/>
+            <a:off x="6278727" y="2377440"/>
+            <a:ext cx="2453563" cy="3383280"/>
           </a:xfrm>
           <a:prstGeom prst="roundRect">
             <a:avLst/>
@@ -4003,9 +4096,9 @@
           <a:solidFill>
             <a:srgbClr val="FFFFFF"/>
           </a:solidFill>
-          <a:ln w="22860">
+          <a:ln w="20320">
             <a:solidFill>
-              <a:srgbClr val="B23A2A"/>
+              <a:srgbClr val="C8A86B"/>
             </a:solidFill>
           </a:ln>
           <a:effectLst/>
@@ -4034,20 +4127,20 @@
       </p:sp>
       <p:sp>
         <p:nvSpPr>
-          <p:cNvPr id="16" name="Oval 15"/>
+          <p:cNvPr id="17" name="Oval 16"/>
           <p:cNvSpPr/>
           <p:nvPr/>
         </p:nvSpPr>
         <p:spPr>
           <a:xfrm>
-            <a:off x="804672" y="3867912"/>
-            <a:ext cx="457200" cy="457200"/>
+            <a:off x="7094029" y="2697480"/>
+            <a:ext cx="822960" cy="822960"/>
           </a:xfrm>
           <a:prstGeom prst="ellipse">
             <a:avLst/>
           </a:prstGeom>
           <a:solidFill>
-            <a:srgbClr val="B23A2A"/>
+            <a:srgbClr val="C8A86B"/>
           </a:solidFill>
           <a:ln>
             <a:noFill/>
@@ -4078,14 +4171,14 @@
       </p:sp>
       <p:sp>
         <p:nvSpPr>
-          <p:cNvPr id="17" name="TextBox 16"/>
+          <p:cNvPr id="18" name="TextBox 17"/>
           <p:cNvSpPr txBox="1"/>
           <p:nvPr/>
         </p:nvSpPr>
         <p:spPr>
           <a:xfrm>
-            <a:off x="804672" y="3922776"/>
-            <a:ext cx="457200" cy="384048"/>
+            <a:off x="7094029" y="2880360"/>
+            <a:ext cx="822960" cy="457200"/>
           </a:xfrm>
           <a:prstGeom prst="rect">
             <a:avLst/>
@@ -4100,29 +4193,66 @@
           <a:p>
             <a:pPr algn="ctr"/>
             <a:r>
-              <a:rPr sz="1600" b="1">
+              <a:rPr sz="2400" b="1">
                 <a:solidFill>
                   <a:srgbClr val="FFFFFF"/>
+                </a:solidFill>
+                <a:latin typeface="楷体"/>
+                <a:ea typeface="楷体"/>
+                <a:cs typeface="楷体"/>
+              </a:rPr>
+              <a:t>3</a:t>
+            </a:r>
+          </a:p>
+        </p:txBody>
+      </p:sp>
+      <p:sp>
+        <p:nvSpPr>
+          <p:cNvPr id="19" name="TextBox 18"/>
+          <p:cNvSpPr txBox="1"/>
+          <p:nvPr/>
+        </p:nvSpPr>
+        <p:spPr>
+          <a:xfrm>
+            <a:off x="6461607" y="3749040"/>
+            <a:ext cx="2087803" cy="548640"/>
+          </a:xfrm>
+          <a:prstGeom prst="rect">
+            <a:avLst/>
+          </a:prstGeom>
+          <a:noFill/>
+        </p:spPr>
+        <p:txBody>
+          <a:bodyPr wrap="square" anchor="t" lIns="0" rIns="0" tIns="0" bIns="0">
+            <a:spAutoFit/>
+          </a:bodyPr>
+          <a:lstStyle/>
+          <a:p>
+            <a:pPr algn="ctr"/>
+            <a:r>
+              <a:rPr sz="1800" b="1">
+                <a:solidFill>
+                  <a:srgbClr val="C8A86B"/>
                 </a:solidFill>
                 <a:latin typeface="微软雅黑"/>
                 <a:ea typeface="微软雅黑"/>
                 <a:cs typeface="微软雅黑"/>
               </a:rPr>
-              <a:t>3</a:t>
-            </a:r>
-          </a:p>
-        </p:txBody>
-      </p:sp>
-      <p:sp>
-        <p:nvSpPr>
-          <p:cNvPr id="18" name="TextBox 17"/>
+              <a:t>思维品质</a:t>
+            </a:r>
+          </a:p>
+        </p:txBody>
+      </p:sp>
+      <p:sp>
+        <p:nvSpPr>
+          <p:cNvPr id="20" name="TextBox 19"/>
           <p:cNvSpPr txBox="1"/>
           <p:nvPr/>
         </p:nvSpPr>
         <p:spPr>
           <a:xfrm>
-            <a:off x="1371600" y="3813048"/>
-            <a:ext cx="4434840" cy="457200"/>
+            <a:off x="6479895" y="4343400"/>
+            <a:ext cx="2051227" cy="1280160"/>
           </a:xfrm>
           <a:prstGeom prst="rect">
             <a:avLst/>
@@ -4135,54 +4265,13 @@
           </a:bodyPr>
           <a:lstStyle/>
           <a:p>
-            <a:pPr algn="l">
+            <a:pPr algn="ctr">
               <a:lnSpc>
-                <a:spcPct val="110000"/>
+                <a:spcPct val="145000"/>
               </a:lnSpc>
             </a:pPr>
             <a:r>
-              <a:rPr sz="1600" b="1">
-                <a:solidFill>
-                  <a:srgbClr val="1C2A33"/>
-                </a:solidFill>
-                <a:latin typeface="微软雅黑"/>
-                <a:ea typeface="微软雅黑"/>
-                <a:cs typeface="微软雅黑"/>
-              </a:rPr>
-              <a:t>目标</a:t>
-            </a:r>
-          </a:p>
-        </p:txBody>
-      </p:sp>
-      <p:sp>
-        <p:nvSpPr>
-          <p:cNvPr id="19" name="TextBox 18"/>
-          <p:cNvSpPr txBox="1"/>
-          <p:nvPr/>
-        </p:nvSpPr>
-        <p:spPr>
-          <a:xfrm>
-            <a:off x="1371600" y="4251960"/>
-            <a:ext cx="4434840" cy="1417320"/>
-          </a:xfrm>
-          <a:prstGeom prst="rect">
-            <a:avLst/>
-          </a:prstGeom>
-          <a:noFill/>
-        </p:spPr>
-        <p:txBody>
-          <a:bodyPr wrap="square" anchor="t" lIns="0" rIns="0" tIns="0" bIns="0">
-            <a:spAutoFit/>
-          </a:bodyPr>
-          <a:lstStyle/>
-          <a:p>
-            <a:pPr algn="l">
-              <a:lnSpc>
-                <a:spcPct val="128000"/>
-              </a:lnSpc>
-            </a:pPr>
-            <a:r>
-              <a:rPr sz="1200" b="0">
+              <a:rPr sz="1300" b="0">
                 <a:solidFill>
                   <a:srgbClr val="1C2A33"/>
                 </a:solidFill>
@@ -4190,21 +4279,21 @@
                 <a:ea typeface="楷体"/>
                 <a:cs typeface="楷体"/>
               </a:rPr>
-              <a:t>思维品质：通过筛选关键信息、概括事件要点，培养信息提取与整合的实用文阅读思维能力。</a:t>
-            </a:r>
-          </a:p>
-        </p:txBody>
-      </p:sp>
-      <p:sp>
-        <p:nvSpPr>
-          <p:cNvPr id="20" name="Rounded Rectangle 19"/>
+              <a:t>通过筛选关键信息、概括事件要点，培养实用文阅读中的信息提取与整合能力。</a:t>
+            </a:r>
+          </a:p>
+        </p:txBody>
+      </p:sp>
+      <p:sp>
+        <p:nvSpPr>
+          <p:cNvPr id="21" name="Rounded Rectangle 20"/>
           <p:cNvSpPr/>
           <p:nvPr/>
         </p:nvSpPr>
         <p:spPr>
           <a:xfrm>
-            <a:off x="6263640" y="3703320"/>
-            <a:ext cx="5349240" cy="2057400"/>
+            <a:off x="9098051" y="2377440"/>
+            <a:ext cx="2453563" cy="3383280"/>
           </a:xfrm>
           <a:prstGeom prst="roundRect">
             <a:avLst/>
@@ -4212,9 +4301,9 @@
           <a:solidFill>
             <a:srgbClr val="FFFFFF"/>
           </a:solidFill>
-          <a:ln w="22860">
+          <a:ln w="20320">
             <a:solidFill>
-              <a:srgbClr val="B23A2A"/>
+              <a:srgbClr val="6B6258"/>
             </a:solidFill>
           </a:ln>
           <a:effectLst/>
@@ -4243,20 +4332,20 @@
       </p:sp>
       <p:sp>
         <p:nvSpPr>
-          <p:cNvPr id="21" name="Oval 20"/>
+          <p:cNvPr id="22" name="Oval 21"/>
           <p:cNvSpPr/>
           <p:nvPr/>
         </p:nvSpPr>
         <p:spPr>
           <a:xfrm>
-            <a:off x="6428232" y="3867912"/>
-            <a:ext cx="457200" cy="457200"/>
+            <a:off x="9913353" y="2697480"/>
+            <a:ext cx="822960" cy="822960"/>
           </a:xfrm>
           <a:prstGeom prst="ellipse">
             <a:avLst/>
           </a:prstGeom>
           <a:solidFill>
-            <a:srgbClr val="B23A2A"/>
+            <a:srgbClr val="6B6258"/>
           </a:solidFill>
           <a:ln>
             <a:noFill/>
@@ -4287,14 +4376,14 @@
       </p:sp>
       <p:sp>
         <p:nvSpPr>
-          <p:cNvPr id="22" name="TextBox 21"/>
+          <p:cNvPr id="23" name="TextBox 22"/>
           <p:cNvSpPr txBox="1"/>
           <p:nvPr/>
         </p:nvSpPr>
         <p:spPr>
           <a:xfrm>
-            <a:off x="6428232" y="3922776"/>
-            <a:ext cx="457200" cy="384048"/>
+            <a:off x="9913353" y="2880360"/>
+            <a:ext cx="822960" cy="457200"/>
           </a:xfrm>
           <a:prstGeom prst="rect">
             <a:avLst/>
@@ -4309,29 +4398,66 @@
           <a:p>
             <a:pPr algn="ctr"/>
             <a:r>
-              <a:rPr sz="1600" b="1">
+              <a:rPr sz="2400" b="1">
                 <a:solidFill>
                   <a:srgbClr val="FFFFFF"/>
+                </a:solidFill>
+                <a:latin typeface="楷体"/>
+                <a:ea typeface="楷体"/>
+                <a:cs typeface="楷体"/>
+              </a:rPr>
+              <a:t>4</a:t>
+            </a:r>
+          </a:p>
+        </p:txBody>
+      </p:sp>
+      <p:sp>
+        <p:nvSpPr>
+          <p:cNvPr id="24" name="TextBox 23"/>
+          <p:cNvSpPr txBox="1"/>
+          <p:nvPr/>
+        </p:nvSpPr>
+        <p:spPr>
+          <a:xfrm>
+            <a:off x="9280931" y="3749040"/>
+            <a:ext cx="2087803" cy="548640"/>
+          </a:xfrm>
+          <a:prstGeom prst="rect">
+            <a:avLst/>
+          </a:prstGeom>
+          <a:noFill/>
+        </p:spPr>
+        <p:txBody>
+          <a:bodyPr wrap="square" anchor="t" lIns="0" rIns="0" tIns="0" bIns="0">
+            <a:spAutoFit/>
+          </a:bodyPr>
+          <a:lstStyle/>
+          <a:p>
+            <a:pPr algn="ctr"/>
+            <a:r>
+              <a:rPr sz="1800" b="1">
+                <a:solidFill>
+                  <a:srgbClr val="6B6258"/>
                 </a:solidFill>
                 <a:latin typeface="微软雅黑"/>
                 <a:ea typeface="微软雅黑"/>
                 <a:cs typeface="微软雅黑"/>
               </a:rPr>
-              <a:t>4</a:t>
-            </a:r>
-          </a:p>
-        </p:txBody>
-      </p:sp>
-      <p:sp>
-        <p:nvSpPr>
-          <p:cNvPr id="23" name="TextBox 22"/>
+              <a:t>学习能力</a:t>
+            </a:r>
+          </a:p>
+        </p:txBody>
+      </p:sp>
+      <p:sp>
+        <p:nvSpPr>
+          <p:cNvPr id="25" name="TextBox 24"/>
           <p:cNvSpPr txBox="1"/>
           <p:nvPr/>
         </p:nvSpPr>
         <p:spPr>
           <a:xfrm>
-            <a:off x="6995160" y="3813048"/>
-            <a:ext cx="4434840" cy="457200"/>
+            <a:off x="9299219" y="4343400"/>
+            <a:ext cx="2051227" cy="1280160"/>
           </a:xfrm>
           <a:prstGeom prst="rect">
             <a:avLst/>
@@ -4344,54 +4470,13 @@
           </a:bodyPr>
           <a:lstStyle/>
           <a:p>
-            <a:pPr algn="l">
+            <a:pPr algn="ctr">
               <a:lnSpc>
-                <a:spcPct val="110000"/>
+                <a:spcPct val="145000"/>
               </a:lnSpc>
             </a:pPr>
             <a:r>
-              <a:rPr sz="1600" b="1">
-                <a:solidFill>
-                  <a:srgbClr val="1C2A33"/>
-                </a:solidFill>
-                <a:latin typeface="微软雅黑"/>
-                <a:ea typeface="微软雅黑"/>
-                <a:cs typeface="微软雅黑"/>
-              </a:rPr>
-              <a:t>目标</a:t>
-            </a:r>
-          </a:p>
-        </p:txBody>
-      </p:sp>
-      <p:sp>
-        <p:nvSpPr>
-          <p:cNvPr id="24" name="TextBox 23"/>
-          <p:cNvSpPr txBox="1"/>
-          <p:nvPr/>
-        </p:nvSpPr>
-        <p:spPr>
-          <a:xfrm>
-            <a:off x="6995160" y="4251960"/>
-            <a:ext cx="4434840" cy="1417320"/>
-          </a:xfrm>
-          <a:prstGeom prst="rect">
-            <a:avLst/>
-          </a:prstGeom>
-          <a:noFill/>
-        </p:spPr>
-        <p:txBody>
-          <a:bodyPr wrap="square" anchor="t" lIns="0" rIns="0" tIns="0" bIns="0">
-            <a:spAutoFit/>
-          </a:bodyPr>
-          <a:lstStyle/>
-          <a:p>
-            <a:pPr algn="l">
-              <a:lnSpc>
-                <a:spcPct val="128000"/>
-              </a:lnSpc>
-            </a:pPr>
-            <a:r>
-              <a:rPr sz="1200" b="0">
+              <a:rPr sz="1300" b="0">
                 <a:solidFill>
                   <a:srgbClr val="1C2A33"/>
                 </a:solidFill>
@@ -4399,14 +4484,14 @@
                 <a:ea typeface="楷体"/>
                 <a:cs typeface="楷体"/>
               </a:rPr>
-              <a:t>学习能力：掌握「圈关键信息→理事件脉络→析人物精神」的实用文阅读三步法，能迁移运用。</a:t>
-            </a:r>
-          </a:p>
-        </p:txBody>
-      </p:sp>
-      <p:sp>
-        <p:nvSpPr>
-          <p:cNvPr id="25" name="TextBox 24"/>
+              <a:t>掌握「圈关键信息→理事件脉络→析人物精神」的实用文阅读三步法，能迁移运用。</a:t>
+            </a:r>
+          </a:p>
+        </p:txBody>
+      </p:sp>
+      <p:sp>
+        <p:nvSpPr>
+          <p:cNvPr id="26" name="TextBox 25"/>
           <p:cNvSpPr txBox="1"/>
           <p:nvPr/>
         </p:nvSpPr>
@@ -4533,13 +4618,13 @@
             <a:r>
               <a:rPr sz="1300" b="1">
                 <a:solidFill>
-                  <a:srgbClr val="2E7D6B"/>
+                  <a:srgbClr val="B23A2A"/>
                 </a:solidFill>
                 <a:latin typeface="微软雅黑"/>
                 <a:ea typeface="微软雅黑"/>
                 <a:cs typeface="微软雅黑"/>
               </a:rPr>
-              <a:t>课文背景</a:t>
+              <a:t>背景 · 权威调研</a:t>
             </a:r>
           </a:p>
         </p:txBody>
@@ -4559,7 +4644,7 @@
             <a:avLst/>
           </a:prstGeom>
           <a:solidFill>
-            <a:srgbClr val="2E7D6B"/>
+            <a:srgbClr val="B23A2A"/>
           </a:solidFill>
           <a:ln>
             <a:noFill/>
@@ -4596,8 +4681,49 @@
         </p:nvSpPr>
         <p:spPr>
           <a:xfrm>
-            <a:off x="640080" y="1508760"/>
-            <a:ext cx="6766560" cy="4572000"/>
+            <a:off x="640080" y="1737360"/>
+            <a:ext cx="5227167" cy="548640"/>
+          </a:xfrm>
+          <a:prstGeom prst="rect">
+            <a:avLst/>
+          </a:prstGeom>
+          <a:noFill/>
+        </p:spPr>
+        <p:txBody>
+          <a:bodyPr wrap="square" anchor="t" lIns="0" rIns="0" tIns="0" bIns="0">
+            <a:spAutoFit/>
+          </a:bodyPr>
+          <a:lstStyle/>
+          <a:p>
+            <a:pPr algn="l">
+              <a:spcAft>
+                <a:spcPts val="600"/>
+              </a:spcAft>
+            </a:pPr>
+            <a:r>
+              <a:rPr sz="2000" b="1">
+                <a:solidFill>
+                  <a:srgbClr val="B23A2A"/>
+                </a:solidFill>
+                <a:latin typeface="楷体"/>
+                <a:ea typeface="楷体"/>
+                <a:cs typeface="楷体"/>
+              </a:rPr>
+              <a:t>读什么 · 为什么读</a:t>
+            </a:r>
+          </a:p>
+        </p:txBody>
+      </p:sp>
+      <p:sp>
+        <p:nvSpPr>
+          <p:cNvPr id="6" name="TextBox 5"/>
+          <p:cNvSpPr txBox="1"/>
+          <p:nvPr/>
+        </p:nvSpPr>
+        <p:spPr>
+          <a:xfrm>
+            <a:off x="640080" y="2377440"/>
+            <a:ext cx="5227167" cy="4297680"/>
           </a:xfrm>
           <a:prstGeom prst="rect">
             <a:avLst/>
@@ -4615,11 +4741,11 @@
                 <a:spcPct val="150000"/>
               </a:lnSpc>
               <a:spcAft>
-                <a:spcPts val="600"/>
+                <a:spcPts val="800"/>
               </a:spcAft>
             </a:pPr>
             <a:r>
-              <a:rPr sz="1600" b="0">
+              <a:rPr sz="1400" b="0">
                 <a:solidFill>
                   <a:srgbClr val="1C2A33"/>
                 </a:solidFill>
@@ -4627,14 +4753,74 @@
                 <a:ea typeface="楷体"/>
                 <a:cs typeface="楷体"/>
               </a:rPr>
-              <a:t>本课为必修上册第二单元第一课时，学习任务群为「实用性阅读与交流」。《喜看稻菽千重浪——记首届国家最高科技奖获得者袁隆平》是沈英甲撰写的通讯，记录袁隆平发现天然雄性不育株、培育三系杂交水稻的科学历程。通讯以「实践出真知」为小标题统领，选取袁隆平质疑权威学说、田间发现不育株、挑战「水稻等自花授粉作物没有杂交优势」定论等关键事件，展现科学家尊重事实、勇于创新的精神。文体上属人物通讯，兼具新闻真实性与文学感染力，是实用文阅读的典型范本。</a:t>
+              <a:t>本课属统编版必修上第二单元，学习任务群为「实用性阅读与交流」，人文主题「劳动光荣」。</a:t>
+            </a:r>
+          </a:p>
+          <a:p>
+            <a:pPr algn="l">
+              <a:lnSpc>
+                <a:spcPct val="150000"/>
+              </a:lnSpc>
+              <a:spcAft>
+                <a:spcPts val="800"/>
+              </a:spcAft>
+            </a:pPr>
+            <a:r>
+              <a:rPr sz="1400" b="0">
+                <a:solidFill>
+                  <a:srgbClr val="1C2A33"/>
+                </a:solidFill>
+                <a:latin typeface="楷体"/>
+                <a:ea typeface="楷体"/>
+                <a:cs typeface="楷体"/>
+              </a:rPr>
+              <a:t>课文是沈英甲撰写的人物通讯《喜看稻菽千重浪——记首届国家最高科技奖获得者袁隆平》，记录其发现天然雄性不育株、培育三系杂交水稻的科学历程。</a:t>
+            </a:r>
+          </a:p>
+          <a:p>
+            <a:pPr algn="l">
+              <a:lnSpc>
+                <a:spcPct val="150000"/>
+              </a:lnSpc>
+              <a:spcAft>
+                <a:spcPts val="800"/>
+              </a:spcAft>
+            </a:pPr>
+            <a:r>
+              <a:rPr sz="1350" b="0">
+                <a:solidFill>
+                  <a:srgbClr val="6B6258"/>
+                </a:solidFill>
+                <a:latin typeface="楷体"/>
+                <a:ea typeface="楷体"/>
+                <a:cs typeface="楷体"/>
+              </a:rPr>
+              <a:t>通讯以「实践出真知」统领，选取质疑权威学说、田间发现不育株、挑战「自花授粉作物无杂种优势」定论等关键事件，兼具新闻真实与文学感染。</a:t>
+            </a:r>
+          </a:p>
+          <a:p>
+            <a:pPr algn="l">
+              <a:lnSpc>
+                <a:spcPct val="140000"/>
+              </a:lnSpc>
+            </a:pPr>
+            <a:r>
+              <a:rPr sz="1400" b="1">
+                <a:solidFill>
+                  <a:srgbClr val="B23A2A"/>
+                </a:solidFill>
+                <a:latin typeface="楷体"/>
+                <a:ea typeface="楷体"/>
+                <a:cs typeface="楷体"/>
+              </a:rPr>
+              <a:t>它是实用文阅读的典型范本：既要抓故事情节，也要看文体特征与信息筛选的方法。</a:t>
             </a:r>
           </a:p>
         </p:txBody>
       </p:sp>
       <p:pic>
         <p:nvPicPr>
-          <p:cNvPr id="6" name="Picture 5" descr="typewriter.jpg"/>
+          <p:cNvPr id="7" name="Picture 6" descr="ricefield.jpg"/>
           <p:cNvPicPr>
             <a:picLocks noChangeAspect="1"/>
           </p:cNvPicPr>
@@ -4642,15 +4828,15 @@
         </p:nvPicPr>
         <p:blipFill>
           <a:blip r:embed="rId2"/>
-          <a:srcRect l="5860" r="5860"/>
+          <a:srcRect t="629" b="629"/>
           <a:stretch>
             <a:fillRect/>
           </a:stretch>
         </p:blipFill>
         <p:spPr>
           <a:xfrm>
-            <a:off x="8046720" y="1508760"/>
-            <a:ext cx="4114800" cy="3108960"/>
+            <a:off x="6324447" y="1737360"/>
+            <a:ext cx="5227167" cy="2103120"/>
           </a:xfrm>
           <a:prstGeom prst="rect">
             <a:avLst/>
@@ -4659,14 +4845,14 @@
       </p:pic>
       <p:sp>
         <p:nvSpPr>
-          <p:cNvPr id="7" name="TextBox 6"/>
+          <p:cNvPr id="8" name="TextBox 7"/>
           <p:cNvSpPr txBox="1"/>
           <p:nvPr/>
         </p:nvSpPr>
         <p:spPr>
           <a:xfrm>
-            <a:off x="8046720" y="4663440"/>
-            <a:ext cx="4114800" cy="365760"/>
+            <a:off x="6324447" y="3886200"/>
+            <a:ext cx="5227167" cy="365760"/>
           </a:xfrm>
           <a:prstGeom prst="rect">
             <a:avLst/>
@@ -4689,14 +4875,154 @@
                 <a:ea typeface="微软雅黑"/>
                 <a:cs typeface="微软雅黑"/>
               </a:rPr>
-              <a:t>资料图（自由授权，复用 typewriter.jpg）</a:t>
-            </a:r>
-          </a:p>
-        </p:txBody>
-      </p:sp>
-      <p:sp>
-        <p:nvSpPr>
-          <p:cNvPr id="8" name="TextBox 7"/>
+              <a:t>图：中国稻田（自由授权，Wikimedia Commons）</a:t>
+            </a:r>
+          </a:p>
+        </p:txBody>
+      </p:sp>
+      <p:sp>
+        <p:nvSpPr>
+          <p:cNvPr id="9" name="Rounded Rectangle 8"/>
+          <p:cNvSpPr/>
+          <p:nvPr/>
+        </p:nvSpPr>
+        <p:spPr>
+          <a:xfrm>
+            <a:off x="6324447" y="4343400"/>
+            <a:ext cx="5227167" cy="2331720"/>
+          </a:xfrm>
+          <a:prstGeom prst="roundRect">
+            <a:avLst/>
+          </a:prstGeom>
+          <a:solidFill>
+            <a:srgbClr val="1C2A33"/>
+          </a:solidFill>
+          <a:effectLst/>
+        </p:spPr>
+        <p:style>
+          <a:lnRef idx="1">
+            <a:schemeClr val="accent1"/>
+          </a:lnRef>
+          <a:fillRef idx="3">
+            <a:schemeClr val="accent1"/>
+          </a:fillRef>
+          <a:effectRef idx="2">
+            <a:schemeClr val="accent1"/>
+          </a:effectRef>
+          <a:fontRef idx="minor">
+            <a:schemeClr val="lt1"/>
+          </a:fontRef>
+        </p:style>
+        <p:txBody>
+          <a:bodyPr rtlCol="0" anchor="ctr"/>
+          <a:lstStyle/>
+          <a:p>
+            <a:pPr algn="ctr"/>
+          </a:p>
+        </p:txBody>
+      </p:sp>
+      <p:sp>
+        <p:nvSpPr>
+          <p:cNvPr id="10" name="TextBox 9"/>
+          <p:cNvSpPr txBox="1"/>
+          <p:nvPr/>
+        </p:nvSpPr>
+        <p:spPr>
+          <a:xfrm>
+            <a:off x="6598767" y="4480560"/>
+            <a:ext cx="4678527" cy="457200"/>
+          </a:xfrm>
+          <a:prstGeom prst="rect">
+            <a:avLst/>
+          </a:prstGeom>
+          <a:noFill/>
+        </p:spPr>
+        <p:txBody>
+          <a:bodyPr wrap="square" anchor="t" lIns="0" rIns="0" tIns="0" bIns="0">
+            <a:spAutoFit/>
+          </a:bodyPr>
+          <a:lstStyle/>
+          <a:p>
+            <a:pPr algn="l"/>
+            <a:r>
+              <a:rPr sz="1600" b="1">
+                <a:solidFill>
+                  <a:srgbClr val="C8A86B"/>
+                </a:solidFill>
+                <a:latin typeface="楷体"/>
+                <a:ea typeface="楷体"/>
+                <a:cs typeface="楷体"/>
+              </a:rPr>
+              <a:t>权威来源</a:t>
+            </a:r>
+          </a:p>
+        </p:txBody>
+      </p:sp>
+      <p:sp>
+        <p:nvSpPr>
+          <p:cNvPr id="11" name="TextBox 10"/>
+          <p:cNvSpPr txBox="1"/>
+          <p:nvPr/>
+        </p:nvSpPr>
+        <p:spPr>
+          <a:xfrm>
+            <a:off x="6598767" y="4983480"/>
+            <a:ext cx="4678527" cy="1645920"/>
+          </a:xfrm>
+          <a:prstGeom prst="rect">
+            <a:avLst/>
+          </a:prstGeom>
+          <a:noFill/>
+        </p:spPr>
+        <p:txBody>
+          <a:bodyPr wrap="square" anchor="t" lIns="0" rIns="0" tIns="0" bIns="0">
+            <a:spAutoFit/>
+          </a:bodyPr>
+          <a:lstStyle/>
+          <a:p>
+            <a:pPr algn="l">
+              <a:lnSpc>
+                <a:spcPct val="145000"/>
+              </a:lnSpc>
+              <a:spcAft>
+                <a:spcPts val="700"/>
+              </a:spcAft>
+            </a:pPr>
+            <a:r>
+              <a:rPr sz="1200" b="0">
+                <a:solidFill>
+                  <a:srgbClr val="FFFFFF"/>
+                </a:solidFill>
+                <a:latin typeface="楷体"/>
+                <a:ea typeface="楷体"/>
+                <a:cs typeface="楷体"/>
+              </a:rPr>
+              <a:t>① 中国工程院官网 cae.cn：1964年观察14万余稻穗发现首株雄性不育株；1973年籼型杂交水稻三系配套成功。</a:t>
+            </a:r>
+          </a:p>
+          <a:p>
+            <a:pPr algn="l">
+              <a:lnSpc>
+                <a:spcPct val="145000"/>
+              </a:lnSpc>
+            </a:pPr>
+            <a:r>
+              <a:rPr sz="1200" b="0">
+                <a:solidFill>
+                  <a:srgbClr val="E7DFD2"/>
+                </a:solidFill>
+                <a:latin typeface="楷体"/>
+                <a:ea typeface="楷体"/>
+                <a:cs typeface="楷体"/>
+              </a:rPr>
+              <a:t>② 21世纪教育网 人物通讯学案：通讯五大特点（真实·客观·时效·形象·议论）；消息与通讯在时效、篇幅、表达上的区别。</a:t>
+            </a:r>
+          </a:p>
+        </p:txBody>
+      </p:sp>
+      <p:sp>
+        <p:nvSpPr>
+          <p:cNvPr id="12" name="TextBox 11"/>
           <p:cNvSpPr txBox="1"/>
           <p:nvPr/>
         </p:nvSpPr>
@@ -4829,7 +5155,7 @@
                 <a:ea typeface="微软雅黑"/>
                 <a:cs typeface="微软雅黑"/>
               </a:rPr>
-              <a:t>学习重点</a:t>
+              <a:t>重点 · 三个支点</a:t>
             </a:r>
           </a:p>
         </p:txBody>
@@ -4880,14 +5206,51 @@
       </p:sp>
       <p:sp>
         <p:nvSpPr>
-          <p:cNvPr id="5" name="Rounded Rectangle 4"/>
+          <p:cNvPr id="5" name="TextBox 4"/>
+          <p:cNvSpPr txBox="1"/>
+          <p:nvPr/>
+        </p:nvSpPr>
+        <p:spPr>
+          <a:xfrm>
+            <a:off x="640080" y="1325880"/>
+            <a:ext cx="10515600" cy="548640"/>
+          </a:xfrm>
+          <a:prstGeom prst="rect">
+            <a:avLst/>
+          </a:prstGeom>
+          <a:noFill/>
+        </p:spPr>
+        <p:txBody>
+          <a:bodyPr wrap="square" anchor="t" lIns="0" rIns="0" tIns="0" bIns="0">
+            <a:spAutoFit/>
+          </a:bodyPr>
+          <a:lstStyle/>
+          <a:p>
+            <a:pPr algn="l"/>
+            <a:r>
+              <a:rPr sz="2400" b="1">
+                <a:solidFill>
+                  <a:srgbClr val="1C2A33"/>
+                </a:solidFill>
+                <a:latin typeface="楷体"/>
+                <a:ea typeface="楷体"/>
+                <a:cs typeface="楷体"/>
+              </a:rPr>
+              <a:t>通讯特征 · 科研三节点 · 科学精神</a:t>
+            </a:r>
+          </a:p>
+        </p:txBody>
+      </p:sp>
+      <p:sp>
+        <p:nvSpPr>
+          <p:cNvPr id="6" name="Rounded Rectangle 5"/>
           <p:cNvSpPr/>
           <p:nvPr/>
         </p:nvSpPr>
         <p:spPr>
           <a:xfrm>
-            <a:off x="640080" y="1371600"/>
-            <a:ext cx="10911535" cy="1597152"/>
+            <a:off x="640080" y="2194560"/>
+            <a:ext cx="3393338" cy="3931920"/>
           </a:xfrm>
           <a:prstGeom prst="roundRect">
             <a:avLst/>
@@ -4895,7 +5258,343 @@
           <a:solidFill>
             <a:srgbClr val="FFFFFF"/>
           </a:solidFill>
-          <a:ln w="22860">
+          <a:ln w="20320">
+            <a:solidFill>
+              <a:srgbClr val="B23A2A"/>
+            </a:solidFill>
+          </a:ln>
+          <a:effectLst/>
+        </p:spPr>
+        <p:style>
+          <a:lnRef idx="1">
+            <a:schemeClr val="accent1"/>
+          </a:lnRef>
+          <a:fillRef idx="3">
+            <a:schemeClr val="accent1"/>
+          </a:fillRef>
+          <a:effectRef idx="2">
+            <a:schemeClr val="accent1"/>
+          </a:effectRef>
+          <a:fontRef idx="minor">
+            <a:schemeClr val="lt1"/>
+          </a:fontRef>
+        </p:style>
+        <p:txBody>
+          <a:bodyPr rtlCol="0" anchor="ctr"/>
+          <a:lstStyle/>
+          <a:p>
+            <a:pPr algn="ctr"/>
+          </a:p>
+        </p:txBody>
+      </p:sp>
+      <p:sp>
+        <p:nvSpPr>
+          <p:cNvPr id="7" name="Rectangle 6"/>
+          <p:cNvSpPr/>
+          <p:nvPr/>
+        </p:nvSpPr>
+        <p:spPr>
+          <a:xfrm>
+            <a:off x="640080" y="2194560"/>
+            <a:ext cx="3393338" cy="566928"/>
+          </a:xfrm>
+          <a:prstGeom prst="rect">
+            <a:avLst/>
+          </a:prstGeom>
+          <a:solidFill>
+            <a:srgbClr val="B23A2A"/>
+          </a:solidFill>
+          <a:ln>
+            <a:noFill/>
+          </a:ln>
+          <a:effectLst/>
+        </p:spPr>
+        <p:style>
+          <a:lnRef idx="1">
+            <a:schemeClr val="accent1"/>
+          </a:lnRef>
+          <a:fillRef idx="3">
+            <a:schemeClr val="accent1"/>
+          </a:fillRef>
+          <a:effectRef idx="2">
+            <a:schemeClr val="accent1"/>
+          </a:effectRef>
+          <a:fontRef idx="minor">
+            <a:schemeClr val="lt1"/>
+          </a:fontRef>
+        </p:style>
+        <p:txBody>
+          <a:bodyPr rtlCol="0" anchor="ctr"/>
+          <a:lstStyle/>
+          <a:p>
+            <a:pPr algn="ctr"/>
+          </a:p>
+        </p:txBody>
+      </p:sp>
+      <p:sp>
+        <p:nvSpPr>
+          <p:cNvPr id="8" name="TextBox 7"/>
+          <p:cNvSpPr txBox="1"/>
+          <p:nvPr/>
+        </p:nvSpPr>
+        <p:spPr>
+          <a:xfrm>
+            <a:off x="640080" y="2313432"/>
+            <a:ext cx="3393338" cy="365760"/>
+          </a:xfrm>
+          <a:prstGeom prst="rect">
+            <a:avLst/>
+          </a:prstGeom>
+          <a:noFill/>
+        </p:spPr>
+        <p:txBody>
+          <a:bodyPr wrap="square" anchor="t" lIns="0" rIns="0" tIns="0" bIns="0">
+            <a:spAutoFit/>
+          </a:bodyPr>
+          <a:lstStyle/>
+          <a:p>
+            <a:pPr algn="ctr"/>
+            <a:r>
+              <a:rPr sz="1500" b="1">
+                <a:solidFill>
+                  <a:srgbClr val="FFFFFF"/>
+                </a:solidFill>
+                <a:latin typeface="微软雅黑"/>
+                <a:ea typeface="微软雅黑"/>
+                <a:cs typeface="微软雅黑"/>
+              </a:rPr>
+              <a:t>① 通讯文体特征</a:t>
+            </a:r>
+          </a:p>
+        </p:txBody>
+      </p:sp>
+      <p:sp>
+        <p:nvSpPr>
+          <p:cNvPr id="9" name="TextBox 8"/>
+          <p:cNvSpPr txBox="1"/>
+          <p:nvPr/>
+        </p:nvSpPr>
+        <p:spPr>
+          <a:xfrm>
+            <a:off x="914400" y="3063240"/>
+            <a:ext cx="2844698" cy="2926080"/>
+          </a:xfrm>
+          <a:prstGeom prst="rect">
+            <a:avLst/>
+          </a:prstGeom>
+          <a:noFill/>
+        </p:spPr>
+        <p:txBody>
+          <a:bodyPr wrap="square" anchor="t" lIns="0" rIns="0" tIns="0" bIns="0">
+            <a:spAutoFit/>
+          </a:bodyPr>
+          <a:lstStyle/>
+          <a:p>
+            <a:pPr algn="l">
+              <a:lnSpc>
+                <a:spcPct val="155000"/>
+              </a:lnSpc>
+            </a:pPr>
+            <a:r>
+              <a:rPr sz="1400" b="0">
+                <a:solidFill>
+                  <a:srgbClr val="1C2A33"/>
+                </a:solidFill>
+                <a:latin typeface="楷体"/>
+                <a:ea typeface="楷体"/>
+                <a:cs typeface="楷体"/>
+              </a:rPr>
+              <a:t>真实性（基于事实不可虚构）·及时性（新闻时效）·典型性（选取代表事件）·文学性（生动描写）。</a:t>
+            </a:r>
+          </a:p>
+        </p:txBody>
+      </p:sp>
+      <p:sp>
+        <p:nvSpPr>
+          <p:cNvPr id="10" name="Rounded Rectangle 9"/>
+          <p:cNvSpPr/>
+          <p:nvPr/>
+        </p:nvSpPr>
+        <p:spPr>
+          <a:xfrm>
+            <a:off x="4399178" y="2194560"/>
+            <a:ext cx="3393338" cy="3931920"/>
+          </a:xfrm>
+          <a:prstGeom prst="roundRect">
+            <a:avLst/>
+          </a:prstGeom>
+          <a:solidFill>
+            <a:srgbClr val="FFFFFF"/>
+          </a:solidFill>
+          <a:ln w="20320">
+            <a:solidFill>
+              <a:srgbClr val="2E7D6B"/>
+            </a:solidFill>
+          </a:ln>
+          <a:effectLst/>
+        </p:spPr>
+        <p:style>
+          <a:lnRef idx="1">
+            <a:schemeClr val="accent1"/>
+          </a:lnRef>
+          <a:fillRef idx="3">
+            <a:schemeClr val="accent1"/>
+          </a:fillRef>
+          <a:effectRef idx="2">
+            <a:schemeClr val="accent1"/>
+          </a:effectRef>
+          <a:fontRef idx="minor">
+            <a:schemeClr val="lt1"/>
+          </a:fontRef>
+        </p:style>
+        <p:txBody>
+          <a:bodyPr rtlCol="0" anchor="ctr"/>
+          <a:lstStyle/>
+          <a:p>
+            <a:pPr algn="ctr"/>
+          </a:p>
+        </p:txBody>
+      </p:sp>
+      <p:sp>
+        <p:nvSpPr>
+          <p:cNvPr id="11" name="Rectangle 10"/>
+          <p:cNvSpPr/>
+          <p:nvPr/>
+        </p:nvSpPr>
+        <p:spPr>
+          <a:xfrm>
+            <a:off x="4399178" y="2194560"/>
+            <a:ext cx="3393338" cy="566928"/>
+          </a:xfrm>
+          <a:prstGeom prst="rect">
+            <a:avLst/>
+          </a:prstGeom>
+          <a:solidFill>
+            <a:srgbClr val="2E7D6B"/>
+          </a:solidFill>
+          <a:ln>
+            <a:noFill/>
+          </a:ln>
+          <a:effectLst/>
+        </p:spPr>
+        <p:style>
+          <a:lnRef idx="1">
+            <a:schemeClr val="accent1"/>
+          </a:lnRef>
+          <a:fillRef idx="3">
+            <a:schemeClr val="accent1"/>
+          </a:fillRef>
+          <a:effectRef idx="2">
+            <a:schemeClr val="accent1"/>
+          </a:effectRef>
+          <a:fontRef idx="minor">
+            <a:schemeClr val="lt1"/>
+          </a:fontRef>
+        </p:style>
+        <p:txBody>
+          <a:bodyPr rtlCol="0" anchor="ctr"/>
+          <a:lstStyle/>
+          <a:p>
+            <a:pPr algn="ctr"/>
+          </a:p>
+        </p:txBody>
+      </p:sp>
+      <p:sp>
+        <p:nvSpPr>
+          <p:cNvPr id="12" name="TextBox 11"/>
+          <p:cNvSpPr txBox="1"/>
+          <p:nvPr/>
+        </p:nvSpPr>
+        <p:spPr>
+          <a:xfrm>
+            <a:off x="4399178" y="2313432"/>
+            <a:ext cx="3393338" cy="365760"/>
+          </a:xfrm>
+          <a:prstGeom prst="rect">
+            <a:avLst/>
+          </a:prstGeom>
+          <a:noFill/>
+        </p:spPr>
+        <p:txBody>
+          <a:bodyPr wrap="square" anchor="t" lIns="0" rIns="0" tIns="0" bIns="0">
+            <a:spAutoFit/>
+          </a:bodyPr>
+          <a:lstStyle/>
+          <a:p>
+            <a:pPr algn="ctr"/>
+            <a:r>
+              <a:rPr sz="1500" b="1">
+                <a:solidFill>
+                  <a:srgbClr val="FFFFFF"/>
+                </a:solidFill>
+                <a:latin typeface="微软雅黑"/>
+                <a:ea typeface="微软雅黑"/>
+                <a:cs typeface="微软雅黑"/>
+              </a:rPr>
+              <a:t>② 科研三节点</a:t>
+            </a:r>
+          </a:p>
+        </p:txBody>
+      </p:sp>
+      <p:sp>
+        <p:nvSpPr>
+          <p:cNvPr id="13" name="TextBox 12"/>
+          <p:cNvSpPr txBox="1"/>
+          <p:nvPr/>
+        </p:nvSpPr>
+        <p:spPr>
+          <a:xfrm>
+            <a:off x="4673498" y="3063240"/>
+            <a:ext cx="2844698" cy="2926080"/>
+          </a:xfrm>
+          <a:prstGeom prst="rect">
+            <a:avLst/>
+          </a:prstGeom>
+          <a:noFill/>
+        </p:spPr>
+        <p:txBody>
+          <a:bodyPr wrap="square" anchor="t" lIns="0" rIns="0" tIns="0" bIns="0">
+            <a:spAutoFit/>
+          </a:bodyPr>
+          <a:lstStyle/>
+          <a:p>
+            <a:pPr algn="l">
+              <a:lnSpc>
+                <a:spcPct val="155000"/>
+              </a:lnSpc>
+            </a:pPr>
+            <a:r>
+              <a:rPr sz="1400" b="0">
+                <a:solidFill>
+                  <a:srgbClr val="1C2A33"/>
+                </a:solidFill>
+                <a:latin typeface="楷体"/>
+                <a:ea typeface="楷体"/>
+                <a:cs typeface="楷体"/>
+              </a:rPr>
+              <a:t>1960 发现天然杂交稻 → 1964 找到雄性不育株 → 1973 三系杂交稻成功（14万株寻1株）。</a:t>
+            </a:r>
+          </a:p>
+        </p:txBody>
+      </p:sp>
+      <p:sp>
+        <p:nvSpPr>
+          <p:cNvPr id="14" name="Rounded Rectangle 13"/>
+          <p:cNvSpPr/>
+          <p:nvPr/>
+        </p:nvSpPr>
+        <p:spPr>
+          <a:xfrm>
+            <a:off x="8158276" y="2194560"/>
+            <a:ext cx="3393338" cy="3931920"/>
+          </a:xfrm>
+          <a:prstGeom prst="roundRect">
+            <a:avLst/>
+          </a:prstGeom>
+          <a:solidFill>
+            <a:srgbClr val="FFFFFF"/>
+          </a:solidFill>
+          <a:ln w="20320">
             <a:solidFill>
               <a:srgbClr val="C8A86B"/>
             </a:solidFill>
@@ -4926,107 +5625,23 @@
       </p:sp>
       <p:sp>
         <p:nvSpPr>
-          <p:cNvPr id="6" name="TextBox 5"/>
-          <p:cNvSpPr txBox="1"/>
-          <p:nvPr/>
-        </p:nvSpPr>
-        <p:spPr>
-          <a:xfrm>
-            <a:off x="1371600" y="1481328"/>
-            <a:ext cx="9997135" cy="457200"/>
-          </a:xfrm>
-          <a:prstGeom prst="rect">
-            <a:avLst/>
-          </a:prstGeom>
-          <a:noFill/>
-        </p:spPr>
-        <p:txBody>
-          <a:bodyPr wrap="square" anchor="t" lIns="0" rIns="0" tIns="0" bIns="0">
-            <a:spAutoFit/>
-          </a:bodyPr>
-          <a:lstStyle/>
-          <a:p>
-            <a:pPr algn="l">
-              <a:lnSpc>
-                <a:spcPct val="110000"/>
-              </a:lnSpc>
-            </a:pPr>
-            <a:r>
-              <a:rPr sz="1600" b="1">
-                <a:solidFill>
-                  <a:srgbClr val="1C2A33"/>
-                </a:solidFill>
-                <a:latin typeface="微软雅黑"/>
-                <a:ea typeface="微软雅黑"/>
-                <a:cs typeface="微软雅黑"/>
-              </a:rPr>
-              <a:t/>
-            </a:r>
-          </a:p>
-        </p:txBody>
-      </p:sp>
-      <p:sp>
-        <p:nvSpPr>
-          <p:cNvPr id="7" name="TextBox 6"/>
-          <p:cNvSpPr txBox="1"/>
-          <p:nvPr/>
-        </p:nvSpPr>
-        <p:spPr>
-          <a:xfrm>
-            <a:off x="1371600" y="1920240"/>
-            <a:ext cx="9997135" cy="957072"/>
-          </a:xfrm>
-          <a:prstGeom prst="rect">
-            <a:avLst/>
-          </a:prstGeom>
-          <a:noFill/>
-        </p:spPr>
-        <p:txBody>
-          <a:bodyPr wrap="square" anchor="t" lIns="0" rIns="0" tIns="0" bIns="0">
-            <a:spAutoFit/>
-          </a:bodyPr>
-          <a:lstStyle/>
-          <a:p>
-            <a:pPr algn="l">
-              <a:lnSpc>
-                <a:spcPct val="128000"/>
-              </a:lnSpc>
-            </a:pPr>
-            <a:r>
-              <a:rPr sz="1200" b="0">
-                <a:solidFill>
-                  <a:srgbClr val="1C2A33"/>
-                </a:solidFill>
-                <a:latin typeface="楷体"/>
-                <a:ea typeface="楷体"/>
-                <a:cs typeface="楷体"/>
-              </a:rPr>
-              <a:t>① 通讯文体特征：真实性（基于事实）·及时性（新闻时效）·典型性（选取代表事件）·文学性（生动描写）。</a:t>
-            </a:r>
-          </a:p>
-        </p:txBody>
-      </p:sp>
-      <p:sp>
-        <p:nvSpPr>
-          <p:cNvPr id="8" name="Rounded Rectangle 7"/>
+          <p:cNvPr id="15" name="Rectangle 14"/>
           <p:cNvSpPr/>
           <p:nvPr/>
         </p:nvSpPr>
         <p:spPr>
           <a:xfrm>
-            <a:off x="640080" y="3078480"/>
-            <a:ext cx="10911535" cy="1597152"/>
-          </a:xfrm>
-          <a:prstGeom prst="roundRect">
+            <a:off x="8158276" y="2194560"/>
+            <a:ext cx="3393338" cy="566928"/>
+          </a:xfrm>
+          <a:prstGeom prst="rect">
             <a:avLst/>
           </a:prstGeom>
           <a:solidFill>
-            <a:srgbClr val="FFFFFF"/>
+            <a:srgbClr val="C8A86B"/>
           </a:solidFill>
-          <a:ln w="22860">
-            <a:solidFill>
-              <a:srgbClr val="C8A86B"/>
-            </a:solidFill>
+          <a:ln>
+            <a:noFill/>
           </a:ln>
           <a:effectLst/>
         </p:spPr>
@@ -5054,14 +5669,14 @@
       </p:sp>
       <p:sp>
         <p:nvSpPr>
-          <p:cNvPr id="9" name="TextBox 8"/>
+          <p:cNvPr id="16" name="TextBox 15"/>
           <p:cNvSpPr txBox="1"/>
           <p:nvPr/>
         </p:nvSpPr>
         <p:spPr>
           <a:xfrm>
-            <a:off x="1371600" y="3188208"/>
-            <a:ext cx="9997135" cy="457200"/>
+            <a:off x="8158276" y="2313432"/>
+            <a:ext cx="3393338" cy="365760"/>
           </a:xfrm>
           <a:prstGeom prst="rect">
             <a:avLst/>
@@ -5074,35 +5689,31 @@
           </a:bodyPr>
           <a:lstStyle/>
           <a:p>
-            <a:pPr algn="l">
-              <a:lnSpc>
-                <a:spcPct val="110000"/>
-              </a:lnSpc>
-            </a:pPr>
-            <a:r>
-              <a:rPr sz="1600" b="1">
-                <a:solidFill>
-                  <a:srgbClr val="1C2A33"/>
+            <a:pPr algn="ctr"/>
+            <a:r>
+              <a:rPr sz="1500" b="1">
+                <a:solidFill>
+                  <a:srgbClr val="FFFFFF"/>
                 </a:solidFill>
                 <a:latin typeface="微软雅黑"/>
                 <a:ea typeface="微软雅黑"/>
                 <a:cs typeface="微软雅黑"/>
               </a:rPr>
-              <a:t/>
-            </a:r>
-          </a:p>
-        </p:txBody>
-      </p:sp>
-      <p:sp>
-        <p:nvSpPr>
-          <p:cNvPr id="10" name="TextBox 9"/>
+              <a:t>③ 科学精神内涵</a:t>
+            </a:r>
+          </a:p>
+        </p:txBody>
+      </p:sp>
+      <p:sp>
+        <p:nvSpPr>
+          <p:cNvPr id="17" name="TextBox 16"/>
           <p:cNvSpPr txBox="1"/>
           <p:nvPr/>
         </p:nvSpPr>
         <p:spPr>
           <a:xfrm>
-            <a:off x="1371600" y="3627120"/>
-            <a:ext cx="9997135" cy="957072"/>
+            <a:off x="8432596" y="3063240"/>
+            <a:ext cx="2844698" cy="2926080"/>
           </a:xfrm>
           <a:prstGeom prst="rect">
             <a:avLst/>
@@ -5117,11 +5728,11 @@
           <a:p>
             <a:pPr algn="l">
               <a:lnSpc>
-                <a:spcPct val="128000"/>
+                <a:spcPct val="155000"/>
               </a:lnSpc>
             </a:pPr>
             <a:r>
-              <a:rPr sz="1200" b="0">
+              <a:rPr sz="1400" b="0">
                 <a:solidFill>
                   <a:srgbClr val="1C2A33"/>
                 </a:solidFill>
@@ -5129,142 +5740,14 @@
                 <a:ea typeface="楷体"/>
                 <a:cs typeface="楷体"/>
               </a:rPr>
-              <a:t>② 袁隆平科研三节点：①质疑「自花授粉作物无杂种优势」定论→②发现天然雄性不育株「天然杂交稻」→③培育三系杂交水稻成功。</a:t>
-            </a:r>
-          </a:p>
-        </p:txBody>
-      </p:sp>
-      <p:sp>
-        <p:nvSpPr>
-          <p:cNvPr id="11" name="Rounded Rectangle 10"/>
-          <p:cNvSpPr/>
-          <p:nvPr/>
-        </p:nvSpPr>
-        <p:spPr>
-          <a:xfrm>
-            <a:off x="640080" y="4785360"/>
-            <a:ext cx="10911535" cy="1597152"/>
-          </a:xfrm>
-          <a:prstGeom prst="roundRect">
-            <a:avLst/>
-          </a:prstGeom>
-          <a:solidFill>
-            <a:srgbClr val="FFFFFF"/>
-          </a:solidFill>
-          <a:ln w="22860">
-            <a:solidFill>
-              <a:srgbClr val="C8A86B"/>
-            </a:solidFill>
-          </a:ln>
-          <a:effectLst/>
-        </p:spPr>
-        <p:style>
-          <a:lnRef idx="1">
-            <a:schemeClr val="accent1"/>
-          </a:lnRef>
-          <a:fillRef idx="3">
-            <a:schemeClr val="accent1"/>
-          </a:fillRef>
-          <a:effectRef idx="2">
-            <a:schemeClr val="accent1"/>
-          </a:effectRef>
-          <a:fontRef idx="minor">
-            <a:schemeClr val="lt1"/>
-          </a:fontRef>
-        </p:style>
-        <p:txBody>
-          <a:bodyPr rtlCol="0" anchor="ctr"/>
-          <a:lstStyle/>
-          <a:p>
-            <a:pPr algn="ctr"/>
-          </a:p>
-        </p:txBody>
-      </p:sp>
-      <p:sp>
-        <p:nvSpPr>
-          <p:cNvPr id="12" name="TextBox 11"/>
-          <p:cNvSpPr txBox="1"/>
-          <p:nvPr/>
-        </p:nvSpPr>
-        <p:spPr>
-          <a:xfrm>
-            <a:off x="1371600" y="4895088"/>
-            <a:ext cx="9997135" cy="457200"/>
-          </a:xfrm>
-          <a:prstGeom prst="rect">
-            <a:avLst/>
-          </a:prstGeom>
-          <a:noFill/>
-        </p:spPr>
-        <p:txBody>
-          <a:bodyPr wrap="square" anchor="t" lIns="0" rIns="0" tIns="0" bIns="0">
-            <a:spAutoFit/>
-          </a:bodyPr>
-          <a:lstStyle/>
-          <a:p>
-            <a:pPr algn="l">
-              <a:lnSpc>
-                <a:spcPct val="110000"/>
-              </a:lnSpc>
-            </a:pPr>
-            <a:r>
-              <a:rPr sz="1600" b="1">
-                <a:solidFill>
-                  <a:srgbClr val="1C2A33"/>
-                </a:solidFill>
-                <a:latin typeface="微软雅黑"/>
-                <a:ea typeface="微软雅黑"/>
-                <a:cs typeface="微软雅黑"/>
-              </a:rPr>
-              <a:t/>
-            </a:r>
-          </a:p>
-        </p:txBody>
-      </p:sp>
-      <p:sp>
-        <p:nvSpPr>
-          <p:cNvPr id="13" name="TextBox 12"/>
-          <p:cNvSpPr txBox="1"/>
-          <p:nvPr/>
-        </p:nvSpPr>
-        <p:spPr>
-          <a:xfrm>
-            <a:off x="1371600" y="5334000"/>
-            <a:ext cx="9997135" cy="957072"/>
-          </a:xfrm>
-          <a:prstGeom prst="rect">
-            <a:avLst/>
-          </a:prstGeom>
-          <a:noFill/>
-        </p:spPr>
-        <p:txBody>
-          <a:bodyPr wrap="square" anchor="t" lIns="0" rIns="0" tIns="0" bIns="0">
-            <a:spAutoFit/>
-          </a:bodyPr>
-          <a:lstStyle/>
-          <a:p>
-            <a:pPr algn="l">
-              <a:lnSpc>
-                <a:spcPct val="128000"/>
-              </a:lnSpc>
-            </a:pPr>
-            <a:r>
-              <a:rPr sz="1200" b="0">
-                <a:solidFill>
-                  <a:srgbClr val="1C2A33"/>
-                </a:solidFill>
-                <a:latin typeface="楷体"/>
-                <a:ea typeface="楷体"/>
-                <a:cs typeface="楷体"/>
-              </a:rPr>
-              <a:t>③ 科学精神内涵：尊重事实（用实践检验理论）、勇于创新（挑战权威定论）、坚韧不拔（数十年田间坚守）。</a:t>
-            </a:r>
-          </a:p>
-        </p:txBody>
-      </p:sp>
-      <p:sp>
-        <p:nvSpPr>
-          <p:cNvPr id="14" name="TextBox 13"/>
+              <a:t>尊重事实（用实践检验理论）·勇于创新（挑战权威定论）·坚韧不拔（数十年田间坚守）。</a:t>
+            </a:r>
+          </a:p>
+        </p:txBody>
+      </p:sp>
+      <p:sp>
+        <p:nvSpPr>
+          <p:cNvPr id="18" name="TextBox 17"/>
           <p:cNvSpPr txBox="1"/>
           <p:nvPr/>
         </p:nvSpPr>
@@ -5391,13 +5874,13 @@
             <a:r>
               <a:rPr sz="1300" b="1">
                 <a:solidFill>
-                  <a:srgbClr val="2E7D6B"/>
+                  <a:srgbClr val="B23A2A"/>
                 </a:solidFill>
                 <a:latin typeface="微软雅黑"/>
                 <a:ea typeface="微软雅黑"/>
                 <a:cs typeface="微软雅黑"/>
               </a:rPr>
-              <a:t>学习路径</a:t>
+              <a:t>方法 · 四种读法</a:t>
             </a:r>
           </a:p>
         </p:txBody>
@@ -5417,7 +5900,7 @@
             <a:avLst/>
           </a:prstGeom>
           <a:solidFill>
-            <a:srgbClr val="2E7D6B"/>
+            <a:srgbClr val="B23A2A"/>
           </a:solidFill>
           <a:ln>
             <a:noFill/>
@@ -5448,14 +5931,175 @@
       </p:sp>
       <p:sp>
         <p:nvSpPr>
-          <p:cNvPr id="5" name="Rounded Rectangle 4"/>
+          <p:cNvPr id="5" name="TextBox 4"/>
+          <p:cNvSpPr txBox="1"/>
+          <p:nvPr/>
+        </p:nvSpPr>
+        <p:spPr>
+          <a:xfrm>
+            <a:off x="640080" y="1325880"/>
+            <a:ext cx="10515600" cy="548640"/>
+          </a:xfrm>
+          <a:prstGeom prst="rect">
+            <a:avLst/>
+          </a:prstGeom>
+          <a:noFill/>
+        </p:spPr>
+        <p:txBody>
+          <a:bodyPr wrap="square" anchor="t" lIns="0" rIns="0" tIns="0" bIns="0">
+            <a:spAutoFit/>
+          </a:bodyPr>
+          <a:lstStyle/>
+          <a:p>
+            <a:pPr algn="l"/>
+            <a:r>
+              <a:rPr sz="2300" b="1">
+                <a:solidFill>
+                  <a:srgbClr val="1C2A33"/>
+                </a:solidFill>
+                <a:latin typeface="楷体"/>
+                <a:ea typeface="楷体"/>
+                <a:cs typeface="楷体"/>
+              </a:rPr>
+              <a:t>任务驱动 · 文体比较 · 圈点批注 · 背景支架</a:t>
+            </a:r>
+          </a:p>
+        </p:txBody>
+      </p:sp>
+      <p:sp>
+        <p:nvSpPr>
+          <p:cNvPr id="6" name="Rounded Rectangle 5"/>
           <p:cNvSpPr/>
           <p:nvPr/>
         </p:nvSpPr>
         <p:spPr>
           <a:xfrm>
-            <a:off x="640080" y="1371600"/>
-            <a:ext cx="10911535" cy="685800"/>
+            <a:off x="640080" y="2194560"/>
+            <a:ext cx="2453563" cy="3931920"/>
+          </a:xfrm>
+          <a:prstGeom prst="roundRect">
+            <a:avLst/>
+          </a:prstGeom>
+          <a:solidFill>
+            <a:srgbClr val="FFFFFF"/>
+          </a:solidFill>
+          <a:ln w="22860">
+            <a:solidFill>
+              <a:srgbClr val="B23A2A"/>
+            </a:solidFill>
+          </a:ln>
+          <a:effectLst/>
+        </p:spPr>
+        <p:style>
+          <a:lnRef idx="1">
+            <a:schemeClr val="accent1"/>
+          </a:lnRef>
+          <a:fillRef idx="3">
+            <a:schemeClr val="accent1"/>
+          </a:fillRef>
+          <a:effectRef idx="2">
+            <a:schemeClr val="accent1"/>
+          </a:effectRef>
+          <a:fontRef idx="minor">
+            <a:schemeClr val="lt1"/>
+          </a:fontRef>
+        </p:style>
+        <p:txBody>
+          <a:bodyPr rtlCol="0" anchor="ctr"/>
+          <a:lstStyle/>
+          <a:p>
+            <a:pPr algn="ctr"/>
+          </a:p>
+        </p:txBody>
+      </p:sp>
+      <p:sp>
+        <p:nvSpPr>
+          <p:cNvPr id="7" name="TextBox 6"/>
+          <p:cNvSpPr txBox="1"/>
+          <p:nvPr/>
+        </p:nvSpPr>
+        <p:spPr>
+          <a:xfrm>
+            <a:off x="868680" y="2514600"/>
+            <a:ext cx="1996363" cy="548640"/>
+          </a:xfrm>
+          <a:prstGeom prst="rect">
+            <a:avLst/>
+          </a:prstGeom>
+          <a:noFill/>
+        </p:spPr>
+        <p:txBody>
+          <a:bodyPr wrap="square" anchor="t" lIns="0" rIns="0" tIns="0" bIns="0">
+            <a:spAutoFit/>
+          </a:bodyPr>
+          <a:lstStyle/>
+          <a:p>
+            <a:pPr algn="l"/>
+            <a:r>
+              <a:rPr sz="1700" b="1">
+                <a:solidFill>
+                  <a:srgbClr val="B23A2A"/>
+                </a:solidFill>
+                <a:latin typeface="楷体"/>
+                <a:ea typeface="楷体"/>
+                <a:cs typeface="楷体"/>
+              </a:rPr>
+              <a:t>任务驱动法</a:t>
+            </a:r>
+          </a:p>
+        </p:txBody>
+      </p:sp>
+      <p:sp>
+        <p:nvSpPr>
+          <p:cNvPr id="8" name="TextBox 7"/>
+          <p:cNvSpPr txBox="1"/>
+          <p:nvPr/>
+        </p:nvSpPr>
+        <p:spPr>
+          <a:xfrm>
+            <a:off x="868680" y="3291840"/>
+            <a:ext cx="1996363" cy="2651760"/>
+          </a:xfrm>
+          <a:prstGeom prst="rect">
+            <a:avLst/>
+          </a:prstGeom>
+          <a:noFill/>
+        </p:spPr>
+        <p:txBody>
+          <a:bodyPr wrap="square" anchor="t" lIns="0" rIns="0" tIns="0" bIns="0">
+            <a:spAutoFit/>
+          </a:bodyPr>
+          <a:lstStyle/>
+          <a:p>
+            <a:pPr algn="l">
+              <a:lnSpc>
+                <a:spcPct val="155000"/>
+              </a:lnSpc>
+            </a:pPr>
+            <a:r>
+              <a:rPr sz="1350" b="0">
+                <a:solidFill>
+                  <a:srgbClr val="1C2A33"/>
+                </a:solidFill>
+                <a:latin typeface="楷体"/>
+                <a:ea typeface="楷体"/>
+                <a:cs typeface="楷体"/>
+              </a:rPr>
+              <a:t>用「袁隆平科研时间线」任务单驱动信息筛选，从长文中精准取点。</a:t>
+            </a:r>
+          </a:p>
+        </p:txBody>
+      </p:sp>
+      <p:sp>
+        <p:nvSpPr>
+          <p:cNvPr id="9" name="Rounded Rectangle 8"/>
+          <p:cNvSpPr/>
+          <p:nvPr/>
+        </p:nvSpPr>
+        <p:spPr>
+          <a:xfrm>
+            <a:off x="3459403" y="2194560"/>
+            <a:ext cx="2453563" cy="3931920"/>
           </a:xfrm>
           <a:prstGeom prst="roundRect">
             <a:avLst/>
@@ -5494,23 +6138,103 @@
       </p:sp>
       <p:sp>
         <p:nvSpPr>
-          <p:cNvPr id="6" name="Oval 5"/>
+          <p:cNvPr id="10" name="TextBox 9"/>
+          <p:cNvSpPr txBox="1"/>
+          <p:nvPr/>
+        </p:nvSpPr>
+        <p:spPr>
+          <a:xfrm>
+            <a:off x="3688003" y="2514600"/>
+            <a:ext cx="1996363" cy="548640"/>
+          </a:xfrm>
+          <a:prstGeom prst="rect">
+            <a:avLst/>
+          </a:prstGeom>
+          <a:noFill/>
+        </p:spPr>
+        <p:txBody>
+          <a:bodyPr wrap="square" anchor="t" lIns="0" rIns="0" tIns="0" bIns="0">
+            <a:spAutoFit/>
+          </a:bodyPr>
+          <a:lstStyle/>
+          <a:p>
+            <a:pPr algn="l"/>
+            <a:r>
+              <a:rPr sz="1700" b="1">
+                <a:solidFill>
+                  <a:srgbClr val="2E7D6B"/>
+                </a:solidFill>
+                <a:latin typeface="楷体"/>
+                <a:ea typeface="楷体"/>
+                <a:cs typeface="楷体"/>
+              </a:rPr>
+              <a:t>文体比较法</a:t>
+            </a:r>
+          </a:p>
+        </p:txBody>
+      </p:sp>
+      <p:sp>
+        <p:nvSpPr>
+          <p:cNvPr id="11" name="TextBox 10"/>
+          <p:cNvSpPr txBox="1"/>
+          <p:nvPr/>
+        </p:nvSpPr>
+        <p:spPr>
+          <a:xfrm>
+            <a:off x="3688003" y="3291840"/>
+            <a:ext cx="1996363" cy="2651760"/>
+          </a:xfrm>
+          <a:prstGeom prst="rect">
+            <a:avLst/>
+          </a:prstGeom>
+          <a:noFill/>
+        </p:spPr>
+        <p:txBody>
+          <a:bodyPr wrap="square" anchor="t" lIns="0" rIns="0" tIns="0" bIns="0">
+            <a:spAutoFit/>
+          </a:bodyPr>
+          <a:lstStyle/>
+          <a:p>
+            <a:pPr algn="l">
+              <a:lnSpc>
+                <a:spcPct val="155000"/>
+              </a:lnSpc>
+            </a:pPr>
+            <a:r>
+              <a:rPr sz="1350" b="0">
+                <a:solidFill>
+                  <a:srgbClr val="1C2A33"/>
+                </a:solidFill>
+                <a:latin typeface="楷体"/>
+                <a:ea typeface="楷体"/>
+                <a:cs typeface="楷体"/>
+              </a:rPr>
+              <a:t>对比一则消息与本文通讯，在比较中看清通讯的文体特征。</a:t>
+            </a:r>
+          </a:p>
+        </p:txBody>
+      </p:sp>
+      <p:sp>
+        <p:nvSpPr>
+          <p:cNvPr id="12" name="Rounded Rectangle 11"/>
           <p:cNvSpPr/>
           <p:nvPr/>
         </p:nvSpPr>
         <p:spPr>
           <a:xfrm>
-            <a:off x="804672" y="1536192"/>
-            <a:ext cx="457200" cy="457200"/>
-          </a:xfrm>
-          <a:prstGeom prst="ellipse">
+            <a:off x="6278727" y="2194560"/>
+            <a:ext cx="2453563" cy="3931920"/>
+          </a:xfrm>
+          <a:prstGeom prst="roundRect">
             <a:avLst/>
           </a:prstGeom>
           <a:solidFill>
-            <a:srgbClr val="2E7D6B"/>
+            <a:srgbClr val="FFFFFF"/>
           </a:solidFill>
-          <a:ln>
-            <a:noFill/>
+          <a:ln w="22860">
+            <a:solidFill>
+              <a:srgbClr val="C8A86B"/>
+            </a:solidFill>
           </a:ln>
           <a:effectLst/>
         </p:spPr>
@@ -5538,14 +6262,14 @@
       </p:sp>
       <p:sp>
         <p:nvSpPr>
-          <p:cNvPr id="7" name="TextBox 6"/>
+          <p:cNvPr id="13" name="TextBox 12"/>
           <p:cNvSpPr txBox="1"/>
           <p:nvPr/>
         </p:nvSpPr>
         <p:spPr>
           <a:xfrm>
-            <a:off x="804672" y="1591056"/>
-            <a:ext cx="457200" cy="384048"/>
+            <a:off x="6507327" y="2514600"/>
+            <a:ext cx="1996363" cy="548640"/>
           </a:xfrm>
           <a:prstGeom prst="rect">
             <a:avLst/>
@@ -5558,31 +6282,31 @@
           </a:bodyPr>
           <a:lstStyle/>
           <a:p>
-            <a:pPr algn="ctr"/>
-            <a:r>
-              <a:rPr sz="1600" b="1">
-                <a:solidFill>
-                  <a:srgbClr val="FFFFFF"/>
-                </a:solidFill>
-                <a:latin typeface="微软雅黑"/>
-                <a:ea typeface="微软雅黑"/>
-                <a:cs typeface="微软雅黑"/>
+            <a:pPr algn="l"/>
+            <a:r>
+              <a:rPr sz="1700" b="1">
+                <a:solidFill>
+                  <a:srgbClr val="C8A86B"/>
+                </a:solidFill>
+                <a:latin typeface="楷体"/>
+                <a:ea typeface="楷体"/>
+                <a:cs typeface="楷体"/>
               </a:rPr>
-              <a:t>1</a:t>
-            </a:r>
-          </a:p>
-        </p:txBody>
-      </p:sp>
-      <p:sp>
-        <p:nvSpPr>
-          <p:cNvPr id="8" name="TextBox 7"/>
+              <a:t>圈点批注法</a:t>
+            </a:r>
+          </a:p>
+        </p:txBody>
+      </p:sp>
+      <p:sp>
+        <p:nvSpPr>
+          <p:cNvPr id="14" name="TextBox 13"/>
           <p:cNvSpPr txBox="1"/>
           <p:nvPr/>
         </p:nvSpPr>
         <p:spPr>
           <a:xfrm>
-            <a:off x="1371600" y="1481328"/>
-            <a:ext cx="9997135" cy="484632"/>
+            <a:off x="6507327" y="3291840"/>
+            <a:ext cx="1996363" cy="2651760"/>
           </a:xfrm>
           <a:prstGeom prst="rect">
             <a:avLst/>
@@ -5597,33 +6321,33 @@
           <a:p>
             <a:pPr algn="l">
               <a:lnSpc>
-                <a:spcPct val="110000"/>
+                <a:spcPct val="155000"/>
               </a:lnSpc>
             </a:pPr>
             <a:r>
-              <a:rPr sz="1400" b="1">
+              <a:rPr sz="1350" b="0">
                 <a:solidFill>
                   <a:srgbClr val="1C2A33"/>
                 </a:solidFill>
-                <a:latin typeface="微软雅黑"/>
-                <a:ea typeface="微软雅黑"/>
-                <a:cs typeface="微软雅黑"/>
+                <a:latin typeface="楷体"/>
+                <a:ea typeface="楷体"/>
+                <a:cs typeface="楷体"/>
               </a:rPr>
-              <a:t>Step 1 导入 Lead-in</a:t>
-            </a:r>
-          </a:p>
-        </p:txBody>
-      </p:sp>
-      <p:sp>
-        <p:nvSpPr>
-          <p:cNvPr id="9" name="Rounded Rectangle 8"/>
+              <a:t>文中圈关键信息、旁批事件要点、末尾概括人物精神。</a:t>
+            </a:r>
+          </a:p>
+        </p:txBody>
+      </p:sp>
+      <p:sp>
+        <p:nvSpPr>
+          <p:cNvPr id="15" name="Rounded Rectangle 14"/>
           <p:cNvSpPr/>
           <p:nvPr/>
         </p:nvSpPr>
         <p:spPr>
           <a:xfrm>
-            <a:off x="640080" y="2194560"/>
-            <a:ext cx="10911535" cy="685800"/>
+            <a:off x="9098051" y="2194560"/>
+            <a:ext cx="2453563" cy="3931920"/>
           </a:xfrm>
           <a:prstGeom prst="roundRect">
             <a:avLst/>
@@ -5633,7 +6357,7 @@
           </a:solidFill>
           <a:ln w="22860">
             <a:solidFill>
-              <a:srgbClr val="2E7D6B"/>
+              <a:srgbClr val="6B6258"/>
             </a:solidFill>
           </a:ln>
           <a:effectLst/>
@@ -5662,58 +6386,14 @@
       </p:sp>
       <p:sp>
         <p:nvSpPr>
-          <p:cNvPr id="10" name="Oval 9"/>
-          <p:cNvSpPr/>
-          <p:nvPr/>
-        </p:nvSpPr>
-        <p:spPr>
-          <a:xfrm>
-            <a:off x="804672" y="2359152"/>
-            <a:ext cx="457200" cy="457200"/>
-          </a:xfrm>
-          <a:prstGeom prst="ellipse">
-            <a:avLst/>
-          </a:prstGeom>
-          <a:solidFill>
-            <a:srgbClr val="2E7D6B"/>
-          </a:solidFill>
-          <a:ln>
-            <a:noFill/>
-          </a:ln>
-          <a:effectLst/>
-        </p:spPr>
-        <p:style>
-          <a:lnRef idx="1">
-            <a:schemeClr val="accent1"/>
-          </a:lnRef>
-          <a:fillRef idx="3">
-            <a:schemeClr val="accent1"/>
-          </a:fillRef>
-          <a:effectRef idx="2">
-            <a:schemeClr val="accent1"/>
-          </a:effectRef>
-          <a:fontRef idx="minor">
-            <a:schemeClr val="lt1"/>
-          </a:fontRef>
-        </p:style>
-        <p:txBody>
-          <a:bodyPr rtlCol="0" anchor="ctr"/>
-          <a:lstStyle/>
-          <a:p>
-            <a:pPr algn="ctr"/>
-          </a:p>
-        </p:txBody>
-      </p:sp>
-      <p:sp>
-        <p:nvSpPr>
-          <p:cNvPr id="11" name="TextBox 10"/>
+          <p:cNvPr id="16" name="TextBox 15"/>
           <p:cNvSpPr txBox="1"/>
           <p:nvPr/>
         </p:nvSpPr>
         <p:spPr>
           <a:xfrm>
-            <a:off x="804672" y="2414016"/>
-            <a:ext cx="457200" cy="384048"/>
+            <a:off x="9326651" y="2514600"/>
+            <a:ext cx="1996363" cy="548640"/>
           </a:xfrm>
           <a:prstGeom prst="rect">
             <a:avLst/>
@@ -5726,31 +6406,31 @@
           </a:bodyPr>
           <a:lstStyle/>
           <a:p>
-            <a:pPr algn="ctr"/>
-            <a:r>
-              <a:rPr sz="1600" b="1">
-                <a:solidFill>
-                  <a:srgbClr val="FFFFFF"/>
-                </a:solidFill>
-                <a:latin typeface="微软雅黑"/>
-                <a:ea typeface="微软雅黑"/>
-                <a:cs typeface="微软雅黑"/>
+            <a:pPr algn="l"/>
+            <a:r>
+              <a:rPr sz="1700" b="1">
+                <a:solidFill>
+                  <a:srgbClr val="6B6258"/>
+                </a:solidFill>
+                <a:latin typeface="楷体"/>
+                <a:ea typeface="楷体"/>
+                <a:cs typeface="楷体"/>
               </a:rPr>
-              <a:t>2</a:t>
-            </a:r>
-          </a:p>
-        </p:txBody>
-      </p:sp>
-      <p:sp>
-        <p:nvSpPr>
-          <p:cNvPr id="12" name="TextBox 11"/>
+              <a:t>背景支架法</a:t>
+            </a:r>
+          </a:p>
+        </p:txBody>
+      </p:sp>
+      <p:sp>
+        <p:nvSpPr>
+          <p:cNvPr id="17" name="TextBox 16"/>
           <p:cNvSpPr txBox="1"/>
           <p:nvPr/>
         </p:nvSpPr>
         <p:spPr>
           <a:xfrm>
-            <a:off x="1371600" y="2304288"/>
-            <a:ext cx="9997135" cy="484632"/>
+            <a:off x="9326651" y="3291840"/>
+            <a:ext cx="1996363" cy="2651760"/>
           </a:xfrm>
           <a:prstGeom prst="rect">
             <a:avLst/>
@@ -5765,698 +6445,26 @@
           <a:p>
             <a:pPr algn="l">
               <a:lnSpc>
-                <a:spcPct val="110000"/>
+                <a:spcPct val="155000"/>
               </a:lnSpc>
             </a:pPr>
             <a:r>
-              <a:rPr sz="1600" b="1">
+              <a:rPr sz="1350" b="0">
                 <a:solidFill>
                   <a:srgbClr val="1C2A33"/>
                 </a:solidFill>
-                <a:latin typeface="微软雅黑"/>
-                <a:ea typeface="微软雅黑"/>
-                <a:cs typeface="微软雅黑"/>
+                <a:latin typeface="楷体"/>
+                <a:ea typeface="楷体"/>
+                <a:cs typeface="楷体"/>
               </a:rPr>
-              <a:t>Step 2 文体辨析</a:t>
-            </a:r>
-          </a:p>
-        </p:txBody>
-      </p:sp>
-      <p:sp>
-        <p:nvSpPr>
-          <p:cNvPr id="13" name="Rounded Rectangle 12"/>
-          <p:cNvSpPr/>
-          <p:nvPr/>
-        </p:nvSpPr>
-        <p:spPr>
-          <a:xfrm>
-            <a:off x="640080" y="3017520"/>
-            <a:ext cx="10911535" cy="685800"/>
-          </a:xfrm>
-          <a:prstGeom prst="roundRect">
-            <a:avLst/>
-          </a:prstGeom>
-          <a:solidFill>
-            <a:srgbClr val="FFFFFF"/>
-          </a:solidFill>
-          <a:ln w="22860">
-            <a:solidFill>
-              <a:srgbClr val="2E7D6B"/>
-            </a:solidFill>
-          </a:ln>
-          <a:effectLst/>
-        </p:spPr>
-        <p:style>
-          <a:lnRef idx="1">
-            <a:schemeClr val="accent1"/>
-          </a:lnRef>
-          <a:fillRef idx="3">
-            <a:schemeClr val="accent1"/>
-          </a:fillRef>
-          <a:effectRef idx="2">
-            <a:schemeClr val="accent1"/>
-          </a:effectRef>
-          <a:fontRef idx="minor">
-            <a:schemeClr val="lt1"/>
-          </a:fontRef>
-        </p:style>
-        <p:txBody>
-          <a:bodyPr rtlCol="0" anchor="ctr"/>
-          <a:lstStyle/>
-          <a:p>
-            <a:pPr algn="ctr"/>
-          </a:p>
-        </p:txBody>
-      </p:sp>
-      <p:sp>
-        <p:nvSpPr>
-          <p:cNvPr id="14" name="Oval 13"/>
-          <p:cNvSpPr/>
-          <p:nvPr/>
-        </p:nvSpPr>
-        <p:spPr>
-          <a:xfrm>
-            <a:off x="804672" y="3182112"/>
-            <a:ext cx="457200" cy="457200"/>
-          </a:xfrm>
-          <a:prstGeom prst="ellipse">
-            <a:avLst/>
-          </a:prstGeom>
-          <a:solidFill>
-            <a:srgbClr val="2E7D6B"/>
-          </a:solidFill>
-          <a:ln>
-            <a:noFill/>
-          </a:ln>
-          <a:effectLst/>
-        </p:spPr>
-        <p:style>
-          <a:lnRef idx="1">
-            <a:schemeClr val="accent1"/>
-          </a:lnRef>
-          <a:fillRef idx="3">
-            <a:schemeClr val="accent1"/>
-          </a:fillRef>
-          <a:effectRef idx="2">
-            <a:schemeClr val="accent1"/>
-          </a:effectRef>
-          <a:fontRef idx="minor">
-            <a:schemeClr val="lt1"/>
-          </a:fontRef>
-        </p:style>
-        <p:txBody>
-          <a:bodyPr rtlCol="0" anchor="ctr"/>
-          <a:lstStyle/>
-          <a:p>
-            <a:pPr algn="ctr"/>
-          </a:p>
-        </p:txBody>
-      </p:sp>
-      <p:sp>
-        <p:nvSpPr>
-          <p:cNvPr id="15" name="TextBox 14"/>
-          <p:cNvSpPr txBox="1"/>
-          <p:nvPr/>
-        </p:nvSpPr>
-        <p:spPr>
-          <a:xfrm>
-            <a:off x="804672" y="3236976"/>
-            <a:ext cx="457200" cy="384048"/>
-          </a:xfrm>
-          <a:prstGeom prst="rect">
-            <a:avLst/>
-          </a:prstGeom>
-          <a:noFill/>
-        </p:spPr>
-        <p:txBody>
-          <a:bodyPr wrap="square" anchor="t" lIns="0" rIns="0" tIns="0" bIns="0">
-            <a:spAutoFit/>
-          </a:bodyPr>
-          <a:lstStyle/>
-          <a:p>
-            <a:pPr algn="ctr"/>
-            <a:r>
-              <a:rPr sz="1600" b="1">
-                <a:solidFill>
-                  <a:srgbClr val="FFFFFF"/>
-                </a:solidFill>
-                <a:latin typeface="微软雅黑"/>
-                <a:ea typeface="微软雅黑"/>
-                <a:cs typeface="微软雅黑"/>
-              </a:rPr>
-              <a:t>3</a:t>
-            </a:r>
-          </a:p>
-        </p:txBody>
-      </p:sp>
-      <p:sp>
-        <p:nvSpPr>
-          <p:cNvPr id="16" name="TextBox 15"/>
-          <p:cNvSpPr txBox="1"/>
-          <p:nvPr/>
-        </p:nvSpPr>
-        <p:spPr>
-          <a:xfrm>
-            <a:off x="1371600" y="3127248"/>
-            <a:ext cx="9997135" cy="484632"/>
-          </a:xfrm>
-          <a:prstGeom prst="rect">
-            <a:avLst/>
-          </a:prstGeom>
-          <a:noFill/>
-        </p:spPr>
-        <p:txBody>
-          <a:bodyPr wrap="square" anchor="t" lIns="0" rIns="0" tIns="0" bIns="0">
-            <a:spAutoFit/>
-          </a:bodyPr>
-          <a:lstStyle/>
-          <a:p>
-            <a:pPr algn="l">
-              <a:lnSpc>
-                <a:spcPct val="110000"/>
-              </a:lnSpc>
-            </a:pPr>
-            <a:r>
-              <a:rPr sz="1600" b="1">
-                <a:solidFill>
-                  <a:srgbClr val="1C2A33"/>
-                </a:solidFill>
-                <a:latin typeface="微软雅黑"/>
-                <a:ea typeface="微软雅黑"/>
-                <a:cs typeface="微软雅黑"/>
-              </a:rPr>
-              <a:t>Step 3 信息筛选</a:t>
-            </a:r>
-          </a:p>
-        </p:txBody>
-      </p:sp>
-      <p:sp>
-        <p:nvSpPr>
-          <p:cNvPr id="17" name="Rounded Rectangle 16"/>
-          <p:cNvSpPr/>
-          <p:nvPr/>
-        </p:nvSpPr>
-        <p:spPr>
-          <a:xfrm>
-            <a:off x="640080" y="3840480"/>
-            <a:ext cx="10911535" cy="685800"/>
-          </a:xfrm>
-          <a:prstGeom prst="roundRect">
-            <a:avLst/>
-          </a:prstGeom>
-          <a:solidFill>
-            <a:srgbClr val="FFFFFF"/>
-          </a:solidFill>
-          <a:ln w="22860">
-            <a:solidFill>
-              <a:srgbClr val="2E7D6B"/>
-            </a:solidFill>
-          </a:ln>
-          <a:effectLst/>
-        </p:spPr>
-        <p:style>
-          <a:lnRef idx="1">
-            <a:schemeClr val="accent1"/>
-          </a:lnRef>
-          <a:fillRef idx="3">
-            <a:schemeClr val="accent1"/>
-          </a:fillRef>
-          <a:effectRef idx="2">
-            <a:schemeClr val="accent1"/>
-          </a:effectRef>
-          <a:fontRef idx="minor">
-            <a:schemeClr val="lt1"/>
-          </a:fontRef>
-        </p:style>
-        <p:txBody>
-          <a:bodyPr rtlCol="0" anchor="ctr"/>
-          <a:lstStyle/>
-          <a:p>
-            <a:pPr algn="ctr"/>
-          </a:p>
-        </p:txBody>
-      </p:sp>
-      <p:sp>
-        <p:nvSpPr>
-          <p:cNvPr id="18" name="Oval 17"/>
-          <p:cNvSpPr/>
-          <p:nvPr/>
-        </p:nvSpPr>
-        <p:spPr>
-          <a:xfrm>
-            <a:off x="804672" y="4005072"/>
-            <a:ext cx="457200" cy="457200"/>
-          </a:xfrm>
-          <a:prstGeom prst="ellipse">
-            <a:avLst/>
-          </a:prstGeom>
-          <a:solidFill>
-            <a:srgbClr val="2E7D6B"/>
-          </a:solidFill>
-          <a:ln>
-            <a:noFill/>
-          </a:ln>
-          <a:effectLst/>
-        </p:spPr>
-        <p:style>
-          <a:lnRef idx="1">
-            <a:schemeClr val="accent1"/>
-          </a:lnRef>
-          <a:fillRef idx="3">
-            <a:schemeClr val="accent1"/>
-          </a:fillRef>
-          <a:effectRef idx="2">
-            <a:schemeClr val="accent1"/>
-          </a:effectRef>
-          <a:fontRef idx="minor">
-            <a:schemeClr val="lt1"/>
-          </a:fontRef>
-        </p:style>
-        <p:txBody>
-          <a:bodyPr rtlCol="0" anchor="ctr"/>
-          <a:lstStyle/>
-          <a:p>
-            <a:pPr algn="ctr"/>
-          </a:p>
-        </p:txBody>
-      </p:sp>
-      <p:sp>
-        <p:nvSpPr>
-          <p:cNvPr id="19" name="TextBox 18"/>
-          <p:cNvSpPr txBox="1"/>
-          <p:nvPr/>
-        </p:nvSpPr>
-        <p:spPr>
-          <a:xfrm>
-            <a:off x="804672" y="4059936"/>
-            <a:ext cx="457200" cy="384048"/>
-          </a:xfrm>
-          <a:prstGeom prst="rect">
-            <a:avLst/>
-          </a:prstGeom>
-          <a:noFill/>
-        </p:spPr>
-        <p:txBody>
-          <a:bodyPr wrap="square" anchor="t" lIns="0" rIns="0" tIns="0" bIns="0">
-            <a:spAutoFit/>
-          </a:bodyPr>
-          <a:lstStyle/>
-          <a:p>
-            <a:pPr algn="ctr"/>
-            <a:r>
-              <a:rPr sz="1600" b="1">
-                <a:solidFill>
-                  <a:srgbClr val="FFFFFF"/>
-                </a:solidFill>
-                <a:latin typeface="微软雅黑"/>
-                <a:ea typeface="微软雅黑"/>
-                <a:cs typeface="微软雅黑"/>
-              </a:rPr>
-              <a:t>4</a:t>
-            </a:r>
-          </a:p>
-        </p:txBody>
-      </p:sp>
-      <p:sp>
-        <p:nvSpPr>
-          <p:cNvPr id="20" name="TextBox 19"/>
-          <p:cNvSpPr txBox="1"/>
-          <p:nvPr/>
-        </p:nvSpPr>
-        <p:spPr>
-          <a:xfrm>
-            <a:off x="1371600" y="3950208"/>
-            <a:ext cx="9997135" cy="484632"/>
-          </a:xfrm>
-          <a:prstGeom prst="rect">
-            <a:avLst/>
-          </a:prstGeom>
-          <a:noFill/>
-        </p:spPr>
-        <p:txBody>
-          <a:bodyPr wrap="square" anchor="t" lIns="0" rIns="0" tIns="0" bIns="0">
-            <a:spAutoFit/>
-          </a:bodyPr>
-          <a:lstStyle/>
-          <a:p>
-            <a:pPr algn="l">
-              <a:lnSpc>
-                <a:spcPct val="110000"/>
-              </a:lnSpc>
-            </a:pPr>
-            <a:r>
-              <a:rPr sz="1600" b="1">
-                <a:solidFill>
-                  <a:srgbClr val="1C2A33"/>
-                </a:solidFill>
-                <a:latin typeface="微软雅黑"/>
-                <a:ea typeface="微软雅黑"/>
-                <a:cs typeface="微软雅黑"/>
-              </a:rPr>
-              <a:t>Step 4 精读关键段</a:t>
-            </a:r>
-          </a:p>
-        </p:txBody>
-      </p:sp>
-      <p:sp>
-        <p:nvSpPr>
-          <p:cNvPr id="21" name="Rounded Rectangle 20"/>
-          <p:cNvSpPr/>
-          <p:nvPr/>
-        </p:nvSpPr>
-        <p:spPr>
-          <a:xfrm>
-            <a:off x="640080" y="4663440"/>
-            <a:ext cx="10911535" cy="685800"/>
-          </a:xfrm>
-          <a:prstGeom prst="roundRect">
-            <a:avLst/>
-          </a:prstGeom>
-          <a:solidFill>
-            <a:srgbClr val="FFFFFF"/>
-          </a:solidFill>
-          <a:ln w="22860">
-            <a:solidFill>
-              <a:srgbClr val="2E7D6B"/>
-            </a:solidFill>
-          </a:ln>
-          <a:effectLst/>
-        </p:spPr>
-        <p:style>
-          <a:lnRef idx="1">
-            <a:schemeClr val="accent1"/>
-          </a:lnRef>
-          <a:fillRef idx="3">
-            <a:schemeClr val="accent1"/>
-          </a:fillRef>
-          <a:effectRef idx="2">
-            <a:schemeClr val="accent1"/>
-          </a:effectRef>
-          <a:fontRef idx="minor">
-            <a:schemeClr val="lt1"/>
-          </a:fontRef>
-        </p:style>
-        <p:txBody>
-          <a:bodyPr rtlCol="0" anchor="ctr"/>
-          <a:lstStyle/>
-          <a:p>
-            <a:pPr algn="ctr"/>
-          </a:p>
-        </p:txBody>
-      </p:sp>
-      <p:sp>
-        <p:nvSpPr>
-          <p:cNvPr id="22" name="Oval 21"/>
-          <p:cNvSpPr/>
-          <p:nvPr/>
-        </p:nvSpPr>
-        <p:spPr>
-          <a:xfrm>
-            <a:off x="804672" y="4828032"/>
-            <a:ext cx="457200" cy="457200"/>
-          </a:xfrm>
-          <a:prstGeom prst="ellipse">
-            <a:avLst/>
-          </a:prstGeom>
-          <a:solidFill>
-            <a:srgbClr val="2E7D6B"/>
-          </a:solidFill>
-          <a:ln>
-            <a:noFill/>
-          </a:ln>
-          <a:effectLst/>
-        </p:spPr>
-        <p:style>
-          <a:lnRef idx="1">
-            <a:schemeClr val="accent1"/>
-          </a:lnRef>
-          <a:fillRef idx="3">
-            <a:schemeClr val="accent1"/>
-          </a:fillRef>
-          <a:effectRef idx="2">
-            <a:schemeClr val="accent1"/>
-          </a:effectRef>
-          <a:fontRef idx="minor">
-            <a:schemeClr val="lt1"/>
-          </a:fontRef>
-        </p:style>
-        <p:txBody>
-          <a:bodyPr rtlCol="0" anchor="ctr"/>
-          <a:lstStyle/>
-          <a:p>
-            <a:pPr algn="ctr"/>
-          </a:p>
-        </p:txBody>
-      </p:sp>
-      <p:sp>
-        <p:nvSpPr>
-          <p:cNvPr id="23" name="TextBox 22"/>
-          <p:cNvSpPr txBox="1"/>
-          <p:nvPr/>
-        </p:nvSpPr>
-        <p:spPr>
-          <a:xfrm>
-            <a:off x="804672" y="4882896"/>
-            <a:ext cx="457200" cy="384048"/>
-          </a:xfrm>
-          <a:prstGeom prst="rect">
-            <a:avLst/>
-          </a:prstGeom>
-          <a:noFill/>
-        </p:spPr>
-        <p:txBody>
-          <a:bodyPr wrap="square" anchor="t" lIns="0" rIns="0" tIns="0" bIns="0">
-            <a:spAutoFit/>
-          </a:bodyPr>
-          <a:lstStyle/>
-          <a:p>
-            <a:pPr algn="ctr"/>
-            <a:r>
-              <a:rPr sz="1600" b="1">
-                <a:solidFill>
-                  <a:srgbClr val="FFFFFF"/>
-                </a:solidFill>
-                <a:latin typeface="微软雅黑"/>
-                <a:ea typeface="微软雅黑"/>
-                <a:cs typeface="微软雅黑"/>
-              </a:rPr>
-              <a:t>5</a:t>
-            </a:r>
-          </a:p>
-        </p:txBody>
-      </p:sp>
-      <p:sp>
-        <p:nvSpPr>
-          <p:cNvPr id="24" name="TextBox 23"/>
-          <p:cNvSpPr txBox="1"/>
-          <p:nvPr/>
-        </p:nvSpPr>
-        <p:spPr>
-          <a:xfrm>
-            <a:off x="1371600" y="4773168"/>
-            <a:ext cx="9997135" cy="484632"/>
-          </a:xfrm>
-          <a:prstGeom prst="rect">
-            <a:avLst/>
-          </a:prstGeom>
-          <a:noFill/>
-        </p:spPr>
-        <p:txBody>
-          <a:bodyPr wrap="square" anchor="t" lIns="0" rIns="0" tIns="0" bIns="0">
-            <a:spAutoFit/>
-          </a:bodyPr>
-          <a:lstStyle/>
-          <a:p>
-            <a:pPr algn="l">
-              <a:lnSpc>
-                <a:spcPct val="110000"/>
-              </a:lnSpc>
-            </a:pPr>
-            <a:r>
-              <a:rPr sz="1400" b="1">
-                <a:solidFill>
-                  <a:srgbClr val="1C2A33"/>
-                </a:solidFill>
-                <a:latin typeface="微软雅黑"/>
-                <a:ea typeface="微软雅黑"/>
-                <a:cs typeface="微软雅黑"/>
-              </a:rPr>
-              <a:t>Step 5 人物精神概括</a:t>
-            </a:r>
-          </a:p>
-        </p:txBody>
-      </p:sp>
-      <p:sp>
-        <p:nvSpPr>
-          <p:cNvPr id="25" name="Rounded Rectangle 24"/>
-          <p:cNvSpPr/>
-          <p:nvPr/>
-        </p:nvSpPr>
-        <p:spPr>
-          <a:xfrm>
-            <a:off x="640080" y="5486400"/>
-            <a:ext cx="10911535" cy="685800"/>
-          </a:xfrm>
-          <a:prstGeom prst="roundRect">
-            <a:avLst/>
-          </a:prstGeom>
-          <a:solidFill>
-            <a:srgbClr val="FFFFFF"/>
-          </a:solidFill>
-          <a:ln w="22860">
-            <a:solidFill>
-              <a:srgbClr val="2E7D6B"/>
-            </a:solidFill>
-          </a:ln>
-          <a:effectLst/>
-        </p:spPr>
-        <p:style>
-          <a:lnRef idx="1">
-            <a:schemeClr val="accent1"/>
-          </a:lnRef>
-          <a:fillRef idx="3">
-            <a:schemeClr val="accent1"/>
-          </a:fillRef>
-          <a:effectRef idx="2">
-            <a:schemeClr val="accent1"/>
-          </a:effectRef>
-          <a:fontRef idx="minor">
-            <a:schemeClr val="lt1"/>
-          </a:fontRef>
-        </p:style>
-        <p:txBody>
-          <a:bodyPr rtlCol="0" anchor="ctr"/>
-          <a:lstStyle/>
-          <a:p>
-            <a:pPr algn="ctr"/>
-          </a:p>
-        </p:txBody>
-      </p:sp>
-      <p:sp>
-        <p:nvSpPr>
-          <p:cNvPr id="26" name="Oval 25"/>
-          <p:cNvSpPr/>
-          <p:nvPr/>
-        </p:nvSpPr>
-        <p:spPr>
-          <a:xfrm>
-            <a:off x="804672" y="5650992"/>
-            <a:ext cx="457200" cy="457200"/>
-          </a:xfrm>
-          <a:prstGeom prst="ellipse">
-            <a:avLst/>
-          </a:prstGeom>
-          <a:solidFill>
-            <a:srgbClr val="2E7D6B"/>
-          </a:solidFill>
-          <a:ln>
-            <a:noFill/>
-          </a:ln>
-          <a:effectLst/>
-        </p:spPr>
-        <p:style>
-          <a:lnRef idx="1">
-            <a:schemeClr val="accent1"/>
-          </a:lnRef>
-          <a:fillRef idx="3">
-            <a:schemeClr val="accent1"/>
-          </a:fillRef>
-          <a:effectRef idx="2">
-            <a:schemeClr val="accent1"/>
-          </a:effectRef>
-          <a:fontRef idx="minor">
-            <a:schemeClr val="lt1"/>
-          </a:fontRef>
-        </p:style>
-        <p:txBody>
-          <a:bodyPr rtlCol="0" anchor="ctr"/>
-          <a:lstStyle/>
-          <a:p>
-            <a:pPr algn="ctr"/>
-          </a:p>
-        </p:txBody>
-      </p:sp>
-      <p:sp>
-        <p:nvSpPr>
-          <p:cNvPr id="27" name="TextBox 26"/>
-          <p:cNvSpPr txBox="1"/>
-          <p:nvPr/>
-        </p:nvSpPr>
-        <p:spPr>
-          <a:xfrm>
-            <a:off x="804672" y="5705856"/>
-            <a:ext cx="457200" cy="384048"/>
-          </a:xfrm>
-          <a:prstGeom prst="rect">
-            <a:avLst/>
-          </a:prstGeom>
-          <a:noFill/>
-        </p:spPr>
-        <p:txBody>
-          <a:bodyPr wrap="square" anchor="t" lIns="0" rIns="0" tIns="0" bIns="0">
-            <a:spAutoFit/>
-          </a:bodyPr>
-          <a:lstStyle/>
-          <a:p>
-            <a:pPr algn="ctr"/>
-            <a:r>
-              <a:rPr sz="1600" b="1">
-                <a:solidFill>
-                  <a:srgbClr val="FFFFFF"/>
-                </a:solidFill>
-                <a:latin typeface="微软雅黑"/>
-                <a:ea typeface="微软雅黑"/>
-                <a:cs typeface="微软雅黑"/>
-              </a:rPr>
-              <a:t>6</a:t>
-            </a:r>
-          </a:p>
-        </p:txBody>
-      </p:sp>
-      <p:sp>
-        <p:nvSpPr>
-          <p:cNvPr id="28" name="TextBox 27"/>
-          <p:cNvSpPr txBox="1"/>
-          <p:nvPr/>
-        </p:nvSpPr>
-        <p:spPr>
-          <a:xfrm>
-            <a:off x="1371600" y="5596128"/>
-            <a:ext cx="9997135" cy="484632"/>
-          </a:xfrm>
-          <a:prstGeom prst="rect">
-            <a:avLst/>
-          </a:prstGeom>
-          <a:noFill/>
-        </p:spPr>
-        <p:txBody>
-          <a:bodyPr wrap="square" anchor="t" lIns="0" rIns="0" tIns="0" bIns="0">
-            <a:spAutoFit/>
-          </a:bodyPr>
-          <a:lstStyle/>
-          <a:p>
-            <a:pPr algn="l">
-              <a:lnSpc>
-                <a:spcPct val="110000"/>
-              </a:lnSpc>
-            </a:pPr>
-            <a:r>
-              <a:rPr sz="1600" b="1">
-                <a:solidFill>
-                  <a:srgbClr val="1C2A33"/>
-                </a:solidFill>
-                <a:latin typeface="微软雅黑"/>
-                <a:ea typeface="微软雅黑"/>
-                <a:cs typeface="微软雅黑"/>
-              </a:rPr>
-              <a:t>Step 6 小结+作业</a:t>
-            </a:r>
-          </a:p>
-        </p:txBody>
-      </p:sp>
-      <p:sp>
-        <p:nvSpPr>
-          <p:cNvPr id="29" name="TextBox 28"/>
+              <a:t>补充1960年代背景，理解「让所有人吃饱」的研究初心。</a:t>
+            </a:r>
+          </a:p>
+        </p:txBody>
+      </p:sp>
+      <p:sp>
+        <p:nvSpPr>
+          <p:cNvPr id="18" name="TextBox 17"/>
           <p:cNvSpPr txBox="1"/>
           <p:nvPr/>
         </p:nvSpPr>
@@ -6589,7 +6597,7 @@
                 <a:ea typeface="微软雅黑"/>
                 <a:cs typeface="微软雅黑"/>
               </a:rPr>
-              <a:t>易混易错</a:t>
+              <a:t>难点 · 怎么破</a:t>
             </a:r>
           </a:p>
         </p:txBody>
@@ -6640,14 +6648,51 @@
       </p:sp>
       <p:sp>
         <p:nvSpPr>
-          <p:cNvPr id="5" name="Rounded Rectangle 4"/>
+          <p:cNvPr id="5" name="TextBox 4"/>
+          <p:cNvSpPr txBox="1"/>
+          <p:nvPr/>
+        </p:nvSpPr>
+        <p:spPr>
+          <a:xfrm>
+            <a:off x="640080" y="1325880"/>
+            <a:ext cx="10058400" cy="548640"/>
+          </a:xfrm>
+          <a:prstGeom prst="rect">
+            <a:avLst/>
+          </a:prstGeom>
+          <a:noFill/>
+        </p:spPr>
+        <p:txBody>
+          <a:bodyPr wrap="square" anchor="t" lIns="0" rIns="0" tIns="0" bIns="0">
+            <a:spAutoFit/>
+          </a:bodyPr>
+          <a:lstStyle/>
+          <a:p>
+            <a:pPr algn="l"/>
+            <a:r>
+              <a:rPr sz="2600" b="1">
+                <a:solidFill>
+                  <a:srgbClr val="1C2A33"/>
+                </a:solidFill>
+                <a:latin typeface="楷体"/>
+                <a:ea typeface="楷体"/>
+                <a:cs typeface="楷体"/>
+              </a:rPr>
+              <a:t>三处容易卡住的地方</a:t>
+            </a:r>
+          </a:p>
+        </p:txBody>
+      </p:sp>
+      <p:sp>
+        <p:nvSpPr>
+          <p:cNvPr id="6" name="Rounded Rectangle 5"/>
           <p:cNvSpPr/>
           <p:nvPr/>
         </p:nvSpPr>
         <p:spPr>
           <a:xfrm>
-            <a:off x="640080" y="1417320"/>
-            <a:ext cx="5349240" cy="2057400"/>
+            <a:off x="640080" y="2194560"/>
+            <a:ext cx="3393338" cy="3931920"/>
           </a:xfrm>
           <a:prstGeom prst="roundRect">
             <a:avLst/>
@@ -6655,7 +6700,7 @@
           <a:solidFill>
             <a:srgbClr val="FFFFFF"/>
           </a:solidFill>
-          <a:ln w="22860">
+          <a:ln w="20320">
             <a:solidFill>
               <a:srgbClr val="B23A2A"/>
             </a:solidFill>
@@ -6686,14 +6731,14 @@
       </p:sp>
       <p:sp>
         <p:nvSpPr>
-          <p:cNvPr id="6" name="Oval 5"/>
+          <p:cNvPr id="7" name="Oval 6"/>
           <p:cNvSpPr/>
           <p:nvPr/>
         </p:nvSpPr>
         <p:spPr>
           <a:xfrm>
-            <a:off x="804672" y="1581912"/>
-            <a:ext cx="457200" cy="457200"/>
+            <a:off x="868680" y="2423160"/>
+            <a:ext cx="548640" cy="548640"/>
           </a:xfrm>
           <a:prstGeom prst="ellipse">
             <a:avLst/>
@@ -6730,14 +6775,14 @@
       </p:sp>
       <p:sp>
         <p:nvSpPr>
-          <p:cNvPr id="7" name="TextBox 6"/>
+          <p:cNvPr id="8" name="TextBox 7"/>
           <p:cNvSpPr txBox="1"/>
           <p:nvPr/>
         </p:nvSpPr>
         <p:spPr>
           <a:xfrm>
-            <a:off x="804672" y="1636776"/>
-            <a:ext cx="457200" cy="384048"/>
+            <a:off x="868680" y="2487168"/>
+            <a:ext cx="548640" cy="411480"/>
           </a:xfrm>
           <a:prstGeom prst="rect">
             <a:avLst/>
@@ -6752,7 +6797,7 @@
           <a:p>
             <a:pPr algn="ctr"/>
             <a:r>
-              <a:rPr sz="1600" b="1">
+              <a:rPr sz="2000" b="1">
                 <a:solidFill>
                   <a:srgbClr val="FFFFFF"/>
                 </a:solidFill>
@@ -6760,21 +6805,21 @@
                 <a:ea typeface="微软雅黑"/>
                 <a:cs typeface="微软雅黑"/>
               </a:rPr>
-              <a:t>!</a:t>
-            </a:r>
-          </a:p>
-        </p:txBody>
-      </p:sp>
-      <p:sp>
-        <p:nvSpPr>
-          <p:cNvPr id="8" name="TextBox 7"/>
+              <a:t>1</a:t>
+            </a:r>
+          </a:p>
+        </p:txBody>
+      </p:sp>
+      <p:sp>
+        <p:nvSpPr>
+          <p:cNvPr id="9" name="TextBox 8"/>
           <p:cNvSpPr txBox="1"/>
           <p:nvPr/>
         </p:nvSpPr>
         <p:spPr>
           <a:xfrm>
-            <a:off x="1371600" y="1527048"/>
-            <a:ext cx="4434840" cy="457200"/>
+            <a:off x="1554480" y="2450592"/>
+            <a:ext cx="2296058" cy="731520"/>
           </a:xfrm>
           <a:prstGeom prst="rect">
             <a:avLst/>
@@ -6789,52 +6834,11 @@
           <a:p>
             <a:pPr algn="l">
               <a:lnSpc>
-                <a:spcPct val="110000"/>
+                <a:spcPct val="130000"/>
               </a:lnSpc>
             </a:pPr>
             <a:r>
-              <a:rPr sz="1600" b="1">
-                <a:solidFill>
-                  <a:srgbClr val="1C2A33"/>
-                </a:solidFill>
-                <a:latin typeface="微软雅黑"/>
-                <a:ea typeface="微软雅黑"/>
-                <a:cs typeface="微软雅黑"/>
-              </a:rPr>
-              <a:t/>
-            </a:r>
-          </a:p>
-        </p:txBody>
-      </p:sp>
-      <p:sp>
-        <p:nvSpPr>
-          <p:cNvPr id="9" name="TextBox 8"/>
-          <p:cNvSpPr txBox="1"/>
-          <p:nvPr/>
-        </p:nvSpPr>
-        <p:spPr>
-          <a:xfrm>
-            <a:off x="1371600" y="1965960"/>
-            <a:ext cx="4434840" cy="1417320"/>
-          </a:xfrm>
-          <a:prstGeom prst="rect">
-            <a:avLst/>
-          </a:prstGeom>
-          <a:noFill/>
-        </p:spPr>
-        <p:txBody>
-          <a:bodyPr wrap="square" anchor="t" lIns="0" rIns="0" tIns="0" bIns="0">
-            <a:spAutoFit/>
-          </a:bodyPr>
-          <a:lstStyle/>
-          <a:p>
-            <a:pPr algn="l">
-              <a:lnSpc>
-                <a:spcPct val="128000"/>
-              </a:lnSpc>
-            </a:pPr>
-            <a:r>
-              <a:rPr sz="1200" b="0">
+              <a:rPr sz="1650" b="1">
                 <a:solidFill>
                   <a:srgbClr val="1C2A33"/>
                 </a:solidFill>
@@ -6842,21 +6846,62 @@
                 <a:ea typeface="楷体"/>
                 <a:cs typeface="楷体"/>
               </a:rPr>
-              <a:t>① 通讯与消息的区别。原因：学生混淆「通讯」和「消息」，不知通讯篇幅长、描写细、有人物刻画，需对比说明。</a:t>
-            </a:r>
-          </a:p>
-        </p:txBody>
-      </p:sp>
-      <p:sp>
-        <p:nvSpPr>
-          <p:cNvPr id="10" name="Rounded Rectangle 9"/>
+              <a:t>通讯与消息的区分</a:t>
+            </a:r>
+          </a:p>
+        </p:txBody>
+      </p:sp>
+      <p:sp>
+        <p:nvSpPr>
+          <p:cNvPr id="10" name="TextBox 9"/>
+          <p:cNvSpPr txBox="1"/>
+          <p:nvPr/>
+        </p:nvSpPr>
+        <p:spPr>
+          <a:xfrm>
+            <a:off x="914400" y="3246120"/>
+            <a:ext cx="2844698" cy="2743200"/>
+          </a:xfrm>
+          <a:prstGeom prst="rect">
+            <a:avLst/>
+          </a:prstGeom>
+          <a:noFill/>
+        </p:spPr>
+        <p:txBody>
+          <a:bodyPr wrap="square" anchor="t" lIns="0" rIns="0" tIns="0" bIns="0">
+            <a:spAutoFit/>
+          </a:bodyPr>
+          <a:lstStyle/>
+          <a:p>
+            <a:pPr algn="l">
+              <a:lnSpc>
+                <a:spcPct val="150000"/>
+              </a:lnSpc>
+            </a:pPr>
+            <a:r>
+              <a:rPr sz="1400" b="0">
+                <a:solidFill>
+                  <a:srgbClr val="1C2A33"/>
+                </a:solidFill>
+                <a:latin typeface="楷体"/>
+                <a:ea typeface="楷体"/>
+                <a:cs typeface="楷体"/>
+              </a:rPr>
+              <a:t>容易把两者混淆。→ 对比篇幅、描写、人物刻画，明确通讯「长·细·有人物」。</a:t>
+            </a:r>
+          </a:p>
+        </p:txBody>
+      </p:sp>
+      <p:sp>
+        <p:nvSpPr>
+          <p:cNvPr id="11" name="Rounded Rectangle 10"/>
           <p:cNvSpPr/>
           <p:nvPr/>
         </p:nvSpPr>
         <p:spPr>
           <a:xfrm>
-            <a:off x="6263640" y="1417320"/>
-            <a:ext cx="5349240" cy="2057400"/>
+            <a:off x="4399178" y="2194560"/>
+            <a:ext cx="3393338" cy="3931920"/>
           </a:xfrm>
           <a:prstGeom prst="roundRect">
             <a:avLst/>
@@ -6864,9 +6909,9 @@
           <a:solidFill>
             <a:srgbClr val="FFFFFF"/>
           </a:solidFill>
-          <a:ln w="22860">
+          <a:ln w="20320">
             <a:solidFill>
-              <a:srgbClr val="B23A2A"/>
+              <a:srgbClr val="2E7D6B"/>
             </a:solidFill>
           </a:ln>
           <a:effectLst/>
@@ -6895,20 +6940,20 @@
       </p:sp>
       <p:sp>
         <p:nvSpPr>
-          <p:cNvPr id="11" name="Oval 10"/>
+          <p:cNvPr id="12" name="Oval 11"/>
           <p:cNvSpPr/>
           <p:nvPr/>
         </p:nvSpPr>
         <p:spPr>
           <a:xfrm>
-            <a:off x="6428232" y="1581912"/>
-            <a:ext cx="457200" cy="457200"/>
+            <a:off x="4627778" y="2423160"/>
+            <a:ext cx="548640" cy="548640"/>
           </a:xfrm>
           <a:prstGeom prst="ellipse">
             <a:avLst/>
           </a:prstGeom>
           <a:solidFill>
-            <a:srgbClr val="B23A2A"/>
+            <a:srgbClr val="2E7D6B"/>
           </a:solidFill>
           <a:ln>
             <a:noFill/>
@@ -6939,14 +6984,14 @@
       </p:sp>
       <p:sp>
         <p:nvSpPr>
-          <p:cNvPr id="12" name="TextBox 11"/>
+          <p:cNvPr id="13" name="TextBox 12"/>
           <p:cNvSpPr txBox="1"/>
           <p:nvPr/>
         </p:nvSpPr>
         <p:spPr>
           <a:xfrm>
-            <a:off x="6428232" y="1636776"/>
-            <a:ext cx="457200" cy="384048"/>
+            <a:off x="4627778" y="2487168"/>
+            <a:ext cx="548640" cy="411480"/>
           </a:xfrm>
           <a:prstGeom prst="rect">
             <a:avLst/>
@@ -6961,7 +7006,7 @@
           <a:p>
             <a:pPr algn="ctr"/>
             <a:r>
-              <a:rPr sz="1600" b="1">
+              <a:rPr sz="2000" b="1">
                 <a:solidFill>
                   <a:srgbClr val="FFFFFF"/>
                 </a:solidFill>
@@ -6969,21 +7014,21 @@
                 <a:ea typeface="微软雅黑"/>
                 <a:cs typeface="微软雅黑"/>
               </a:rPr>
-              <a:t>!</a:t>
-            </a:r>
-          </a:p>
-        </p:txBody>
-      </p:sp>
-      <p:sp>
-        <p:nvSpPr>
-          <p:cNvPr id="13" name="TextBox 12"/>
+              <a:t>2</a:t>
+            </a:r>
+          </a:p>
+        </p:txBody>
+      </p:sp>
+      <p:sp>
+        <p:nvSpPr>
+          <p:cNvPr id="14" name="TextBox 13"/>
           <p:cNvSpPr txBox="1"/>
           <p:nvPr/>
         </p:nvSpPr>
         <p:spPr>
           <a:xfrm>
-            <a:off x="6995160" y="1527048"/>
-            <a:ext cx="4434840" cy="457200"/>
+            <a:off x="5313578" y="2450592"/>
+            <a:ext cx="2296058" cy="731520"/>
           </a:xfrm>
           <a:prstGeom prst="rect">
             <a:avLst/>
@@ -6998,52 +7043,11 @@
           <a:p>
             <a:pPr algn="l">
               <a:lnSpc>
-                <a:spcPct val="110000"/>
+                <a:spcPct val="130000"/>
               </a:lnSpc>
             </a:pPr>
             <a:r>
-              <a:rPr sz="1600" b="1">
-                <a:solidFill>
-                  <a:srgbClr val="1C2A33"/>
-                </a:solidFill>
-                <a:latin typeface="微软雅黑"/>
-                <a:ea typeface="微软雅黑"/>
-                <a:cs typeface="微软雅黑"/>
-              </a:rPr>
-              <a:t/>
-            </a:r>
-          </a:p>
-        </p:txBody>
-      </p:sp>
-      <p:sp>
-        <p:nvSpPr>
-          <p:cNvPr id="14" name="TextBox 13"/>
-          <p:cNvSpPr txBox="1"/>
-          <p:nvPr/>
-        </p:nvSpPr>
-        <p:spPr>
-          <a:xfrm>
-            <a:off x="6995160" y="1965960"/>
-            <a:ext cx="4434840" cy="1417320"/>
-          </a:xfrm>
-          <a:prstGeom prst="rect">
-            <a:avLst/>
-          </a:prstGeom>
-          <a:noFill/>
-        </p:spPr>
-        <p:txBody>
-          <a:bodyPr wrap="square" anchor="t" lIns="0" rIns="0" tIns="0" bIns="0">
-            <a:spAutoFit/>
-          </a:bodyPr>
-          <a:lstStyle/>
-          <a:p>
-            <a:pPr algn="l">
-              <a:lnSpc>
-                <a:spcPct val="128000"/>
-              </a:lnSpc>
-            </a:pPr>
-            <a:r>
-              <a:rPr sz="1200" b="0">
+              <a:rPr sz="1650" b="1">
                 <a:solidFill>
                   <a:srgbClr val="1C2A33"/>
                 </a:solidFill>
@@ -7051,21 +7055,62 @@
                 <a:ea typeface="楷体"/>
                 <a:cs typeface="楷体"/>
               </a:rPr>
-              <a:t>② 「挑战权威」的科学精神理解。原因：学生习惯接受教材结论，缺乏「质疑—验证」的科学思维训练，需结合袁隆平具体事例引导。</a:t>
-            </a:r>
-          </a:p>
-        </p:txBody>
-      </p:sp>
-      <p:sp>
-        <p:nvSpPr>
-          <p:cNvPr id="15" name="Rounded Rectangle 14"/>
+              <a:t>「挑战权威」的理解</a:t>
+            </a:r>
+          </a:p>
+        </p:txBody>
+      </p:sp>
+      <p:sp>
+        <p:nvSpPr>
+          <p:cNvPr id="15" name="TextBox 14"/>
+          <p:cNvSpPr txBox="1"/>
+          <p:nvPr/>
+        </p:nvSpPr>
+        <p:spPr>
+          <a:xfrm>
+            <a:off x="4673498" y="3246120"/>
+            <a:ext cx="2844698" cy="2743200"/>
+          </a:xfrm>
+          <a:prstGeom prst="rect">
+            <a:avLst/>
+          </a:prstGeom>
+          <a:noFill/>
+        </p:spPr>
+        <p:txBody>
+          <a:bodyPr wrap="square" anchor="t" lIns="0" rIns="0" tIns="0" bIns="0">
+            <a:spAutoFit/>
+          </a:bodyPr>
+          <a:lstStyle/>
+          <a:p>
+            <a:pPr algn="l">
+              <a:lnSpc>
+                <a:spcPct val="150000"/>
+              </a:lnSpc>
+            </a:pPr>
+            <a:r>
+              <a:rPr sz="1400" b="0">
+                <a:solidFill>
+                  <a:srgbClr val="1C2A33"/>
+                </a:solidFill>
+                <a:latin typeface="楷体"/>
+                <a:ea typeface="楷体"/>
+                <a:cs typeface="楷体"/>
+              </a:rPr>
+              <a:t>习惯接受结论，缺「质疑—验证」思维。→ 结合袁隆平事例，体会质疑的价值。</a:t>
+            </a:r>
+          </a:p>
+        </p:txBody>
+      </p:sp>
+      <p:sp>
+        <p:nvSpPr>
+          <p:cNvPr id="16" name="Rounded Rectangle 15"/>
           <p:cNvSpPr/>
           <p:nvPr/>
         </p:nvSpPr>
         <p:spPr>
           <a:xfrm>
-            <a:off x="640080" y="3703320"/>
-            <a:ext cx="5349240" cy="2057400"/>
+            <a:off x="8158276" y="2194560"/>
+            <a:ext cx="3393338" cy="3931920"/>
           </a:xfrm>
           <a:prstGeom prst="roundRect">
             <a:avLst/>
@@ -7073,9 +7118,9 @@
           <a:solidFill>
             <a:srgbClr val="FFFFFF"/>
           </a:solidFill>
-          <a:ln w="22860">
+          <a:ln w="20320">
             <a:solidFill>
-              <a:srgbClr val="B23A2A"/>
+              <a:srgbClr val="C8A86B"/>
             </a:solidFill>
           </a:ln>
           <a:effectLst/>
@@ -7104,20 +7149,20 @@
       </p:sp>
       <p:sp>
         <p:nvSpPr>
-          <p:cNvPr id="16" name="Oval 15"/>
+          <p:cNvPr id="17" name="Oval 16"/>
           <p:cNvSpPr/>
           <p:nvPr/>
         </p:nvSpPr>
         <p:spPr>
           <a:xfrm>
-            <a:off x="804672" y="3867912"/>
-            <a:ext cx="457200" cy="457200"/>
+            <a:off x="8386876" y="2423160"/>
+            <a:ext cx="548640" cy="548640"/>
           </a:xfrm>
           <a:prstGeom prst="ellipse">
             <a:avLst/>
           </a:prstGeom>
           <a:solidFill>
-            <a:srgbClr val="B23A2A"/>
+            <a:srgbClr val="C8A86B"/>
           </a:solidFill>
           <a:ln>
             <a:noFill/>
@@ -7148,14 +7193,14 @@
       </p:sp>
       <p:sp>
         <p:nvSpPr>
-          <p:cNvPr id="17" name="TextBox 16"/>
+          <p:cNvPr id="18" name="TextBox 17"/>
           <p:cNvSpPr txBox="1"/>
           <p:nvPr/>
         </p:nvSpPr>
         <p:spPr>
           <a:xfrm>
-            <a:off x="804672" y="3922776"/>
-            <a:ext cx="457200" cy="384048"/>
+            <a:off x="8386876" y="2487168"/>
+            <a:ext cx="548640" cy="411480"/>
           </a:xfrm>
           <a:prstGeom prst="rect">
             <a:avLst/>
@@ -7170,7 +7215,7 @@
           <a:p>
             <a:pPr algn="ctr"/>
             <a:r>
-              <a:rPr sz="1600" b="1">
+              <a:rPr sz="2000" b="1">
                 <a:solidFill>
                   <a:srgbClr val="FFFFFF"/>
                 </a:solidFill>
@@ -7178,21 +7223,21 @@
                 <a:ea typeface="微软雅黑"/>
                 <a:cs typeface="微软雅黑"/>
               </a:rPr>
-              <a:t>!</a:t>
-            </a:r>
-          </a:p>
-        </p:txBody>
-      </p:sp>
-      <p:sp>
-        <p:nvSpPr>
-          <p:cNvPr id="18" name="TextBox 17"/>
+              <a:t>3</a:t>
+            </a:r>
+          </a:p>
+        </p:txBody>
+      </p:sp>
+      <p:sp>
+        <p:nvSpPr>
+          <p:cNvPr id="19" name="TextBox 18"/>
           <p:cNvSpPr txBox="1"/>
           <p:nvPr/>
         </p:nvSpPr>
         <p:spPr>
           <a:xfrm>
-            <a:off x="1371600" y="3813048"/>
-            <a:ext cx="4434840" cy="457200"/>
+            <a:off x="9072676" y="2450592"/>
+            <a:ext cx="2296058" cy="731520"/>
           </a:xfrm>
           <a:prstGeom prst="rect">
             <a:avLst/>
@@ -7207,52 +7252,11 @@
           <a:p>
             <a:pPr algn="l">
               <a:lnSpc>
-                <a:spcPct val="110000"/>
+                <a:spcPct val="130000"/>
               </a:lnSpc>
             </a:pPr>
             <a:r>
-              <a:rPr sz="1600" b="1">
-                <a:solidFill>
-                  <a:srgbClr val="1C2A33"/>
-                </a:solidFill>
-                <a:latin typeface="微软雅黑"/>
-                <a:ea typeface="微软雅黑"/>
-                <a:cs typeface="微软雅黑"/>
-              </a:rPr>
-              <a:t/>
-            </a:r>
-          </a:p>
-        </p:txBody>
-      </p:sp>
-      <p:sp>
-        <p:nvSpPr>
-          <p:cNvPr id="19" name="TextBox 18"/>
-          <p:cNvSpPr txBox="1"/>
-          <p:nvPr/>
-        </p:nvSpPr>
-        <p:spPr>
-          <a:xfrm>
-            <a:off x="1371600" y="4251960"/>
-            <a:ext cx="4434840" cy="1417320"/>
-          </a:xfrm>
-          <a:prstGeom prst="rect">
-            <a:avLst/>
-          </a:prstGeom>
-          <a:noFill/>
-        </p:spPr>
-        <p:txBody>
-          <a:bodyPr wrap="square" anchor="t" lIns="0" rIns="0" tIns="0" bIns="0">
-            <a:spAutoFit/>
-          </a:bodyPr>
-          <a:lstStyle/>
-          <a:p>
-            <a:pPr algn="l">
-              <a:lnSpc>
-                <a:spcPct val="128000"/>
-              </a:lnSpc>
-            </a:pPr>
-            <a:r>
-              <a:rPr sz="1200" b="0">
+              <a:rPr sz="1650" b="1">
                 <a:solidFill>
                   <a:srgbClr val="1C2A33"/>
                 </a:solidFill>
@@ -7260,7 +7264,7 @@
                 <a:ea typeface="楷体"/>
                 <a:cs typeface="楷体"/>
               </a:rPr>
-              <a:t>③ 信息的筛选与整合。原因：学生读长文容易「全部划线」或「什么也不划」，缺乏筛选标准，需给出明确任务驱动。</a:t>
+              <a:t>信息的筛选与整合</a:t>
             </a:r>
           </a:p>
         </p:txBody>
@@ -7268,6 +7272,47 @@
       <p:sp>
         <p:nvSpPr>
           <p:cNvPr id="20" name="TextBox 19"/>
+          <p:cNvSpPr txBox="1"/>
+          <p:nvPr/>
+        </p:nvSpPr>
+        <p:spPr>
+          <a:xfrm>
+            <a:off x="8432596" y="3246120"/>
+            <a:ext cx="2844698" cy="2743200"/>
+          </a:xfrm>
+          <a:prstGeom prst="rect">
+            <a:avLst/>
+          </a:prstGeom>
+          <a:noFill/>
+        </p:spPr>
+        <p:txBody>
+          <a:bodyPr wrap="square" anchor="t" lIns="0" rIns="0" tIns="0" bIns="0">
+            <a:spAutoFit/>
+          </a:bodyPr>
+          <a:lstStyle/>
+          <a:p>
+            <a:pPr algn="l">
+              <a:lnSpc>
+                <a:spcPct val="150000"/>
+              </a:lnSpc>
+            </a:pPr>
+            <a:r>
+              <a:rPr sz="1400" b="0">
+                <a:solidFill>
+                  <a:srgbClr val="1C2A33"/>
+                </a:solidFill>
+                <a:latin typeface="楷体"/>
+                <a:ea typeface="楷体"/>
+                <a:cs typeface="楷体"/>
+              </a:rPr>
+              <a:t>易「全部划线」或「什么也不划」。→ 用任务驱动，给出明确的筛选标准。</a:t>
+            </a:r>
+          </a:p>
+        </p:txBody>
+      </p:sp>
+      <p:sp>
+        <p:nvSpPr>
+          <p:cNvPr id="21" name="TextBox 20"/>
           <p:cNvSpPr txBox="1"/>
           <p:nvPr/>
         </p:nvSpPr>
@@ -7394,13 +7439,13 @@
             <a:r>
               <a:rPr sz="1300" b="1">
                 <a:solidFill>
-                  <a:srgbClr val="C8A86B"/>
+                  <a:srgbClr val="B23A2A"/>
                 </a:solidFill>
                 <a:latin typeface="微软雅黑"/>
                 <a:ea typeface="微软雅黑"/>
                 <a:cs typeface="微软雅黑"/>
               </a:rPr>
-              <a:t>要点板书</a:t>
+              <a:t>板书精华</a:t>
             </a:r>
           </a:p>
         </p:txBody>
@@ -7415,6 +7460,510 @@
           <a:xfrm>
             <a:off x="640080" y="1097280"/>
             <a:ext cx="822960" cy="30480"/>
+          </a:xfrm>
+          <a:prstGeom prst="rect">
+            <a:avLst/>
+          </a:prstGeom>
+          <a:solidFill>
+            <a:srgbClr val="B23A2A"/>
+          </a:solidFill>
+          <a:ln>
+            <a:noFill/>
+          </a:ln>
+          <a:effectLst/>
+        </p:spPr>
+        <p:style>
+          <a:lnRef idx="1">
+            <a:schemeClr val="accent1"/>
+          </a:lnRef>
+          <a:fillRef idx="3">
+            <a:schemeClr val="accent1"/>
+          </a:fillRef>
+          <a:effectRef idx="2">
+            <a:schemeClr val="accent1"/>
+          </a:effectRef>
+          <a:fontRef idx="minor">
+            <a:schemeClr val="lt1"/>
+          </a:fontRef>
+        </p:style>
+        <p:txBody>
+          <a:bodyPr rtlCol="0" anchor="ctr"/>
+          <a:lstStyle/>
+          <a:p>
+            <a:pPr algn="ctr"/>
+          </a:p>
+        </p:txBody>
+      </p:sp>
+      <p:sp>
+        <p:nvSpPr>
+          <p:cNvPr id="5" name="Rounded Rectangle 4"/>
+          <p:cNvSpPr/>
+          <p:nvPr/>
+        </p:nvSpPr>
+        <p:spPr>
+          <a:xfrm>
+            <a:off x="640080" y="1691640"/>
+            <a:ext cx="10911535" cy="502920"/>
+          </a:xfrm>
+          <a:prstGeom prst="roundRect">
+            <a:avLst/>
+          </a:prstGeom>
+          <a:solidFill>
+            <a:srgbClr val="1C2A33"/>
+          </a:solidFill>
+          <a:effectLst/>
+        </p:spPr>
+        <p:style>
+          <a:lnRef idx="1">
+            <a:schemeClr val="accent1"/>
+          </a:lnRef>
+          <a:fillRef idx="3">
+            <a:schemeClr val="accent1"/>
+          </a:fillRef>
+          <a:effectRef idx="2">
+            <a:schemeClr val="accent1"/>
+          </a:effectRef>
+          <a:fontRef idx="minor">
+            <a:schemeClr val="lt1"/>
+          </a:fontRef>
+        </p:style>
+        <p:txBody>
+          <a:bodyPr rtlCol="0" anchor="ctr"/>
+          <a:lstStyle/>
+          <a:p>
+            <a:pPr algn="ctr"/>
+          </a:p>
+        </p:txBody>
+      </p:sp>
+      <p:sp>
+        <p:nvSpPr>
+          <p:cNvPr id="6" name="TextBox 5"/>
+          <p:cNvSpPr txBox="1"/>
+          <p:nvPr/>
+        </p:nvSpPr>
+        <p:spPr>
+          <a:xfrm>
+            <a:off x="914400" y="1764792"/>
+            <a:ext cx="10362895" cy="365760"/>
+          </a:xfrm>
+          <a:prstGeom prst="rect">
+            <a:avLst/>
+          </a:prstGeom>
+          <a:noFill/>
+        </p:spPr>
+        <p:txBody>
+          <a:bodyPr wrap="square" anchor="t" lIns="0" rIns="0" tIns="0" bIns="0">
+            <a:spAutoFit/>
+          </a:bodyPr>
+          <a:lstStyle/>
+          <a:p>
+            <a:pPr algn="l"/>
+            <a:r>
+              <a:rPr sz="1600" b="1">
+                <a:solidFill>
+                  <a:srgbClr val="C8A86B"/>
+                </a:solidFill>
+                <a:latin typeface="楷体"/>
+                <a:ea typeface="楷体"/>
+                <a:cs typeface="楷体"/>
+              </a:rPr>
+              <a:t>《喜看稻菽千重浪》· 阅读主干</a:t>
+            </a:r>
+          </a:p>
+        </p:txBody>
+      </p:sp>
+      <p:sp>
+        <p:nvSpPr>
+          <p:cNvPr id="7" name="Rounded Rectangle 6"/>
+          <p:cNvSpPr/>
+          <p:nvPr/>
+        </p:nvSpPr>
+        <p:spPr>
+          <a:xfrm>
+            <a:off x="640080" y="2331720"/>
+            <a:ext cx="10911535" cy="914400"/>
+          </a:xfrm>
+          <a:prstGeom prst="roundRect">
+            <a:avLst/>
+          </a:prstGeom>
+          <a:solidFill>
+            <a:srgbClr val="FFFFFF"/>
+          </a:solidFill>
+          <a:ln w="10160">
+            <a:solidFill>
+              <a:srgbClr val="6B6258"/>
+            </a:solidFill>
+          </a:ln>
+          <a:effectLst/>
+        </p:spPr>
+        <p:style>
+          <a:lnRef idx="1">
+            <a:schemeClr val="accent1"/>
+          </a:lnRef>
+          <a:fillRef idx="3">
+            <a:schemeClr val="accent1"/>
+          </a:fillRef>
+          <a:effectRef idx="2">
+            <a:schemeClr val="accent1"/>
+          </a:effectRef>
+          <a:fontRef idx="minor">
+            <a:schemeClr val="lt1"/>
+          </a:fontRef>
+        </p:style>
+        <p:txBody>
+          <a:bodyPr rtlCol="0" anchor="ctr"/>
+          <a:lstStyle/>
+          <a:p>
+            <a:pPr algn="ctr"/>
+          </a:p>
+        </p:txBody>
+      </p:sp>
+      <p:sp>
+        <p:nvSpPr>
+          <p:cNvPr id="8" name="Rectangle 7"/>
+          <p:cNvSpPr/>
+          <p:nvPr/>
+        </p:nvSpPr>
+        <p:spPr>
+          <a:xfrm>
+            <a:off x="868680" y="2496312"/>
+            <a:ext cx="54864" cy="8128"/>
+          </a:xfrm>
+          <a:prstGeom prst="rect">
+            <a:avLst/>
+          </a:prstGeom>
+          <a:solidFill>
+            <a:srgbClr val="B23A2A"/>
+          </a:solidFill>
+          <a:ln>
+            <a:noFill/>
+          </a:ln>
+          <a:effectLst/>
+        </p:spPr>
+        <p:style>
+          <a:lnRef idx="1">
+            <a:schemeClr val="accent1"/>
+          </a:lnRef>
+          <a:fillRef idx="3">
+            <a:schemeClr val="accent1"/>
+          </a:fillRef>
+          <a:effectRef idx="2">
+            <a:schemeClr val="accent1"/>
+          </a:effectRef>
+          <a:fontRef idx="minor">
+            <a:schemeClr val="lt1"/>
+          </a:fontRef>
+        </p:style>
+        <p:txBody>
+          <a:bodyPr rtlCol="0" anchor="ctr"/>
+          <a:lstStyle/>
+          <a:p>
+            <a:pPr algn="ctr"/>
+          </a:p>
+        </p:txBody>
+      </p:sp>
+      <p:sp>
+        <p:nvSpPr>
+          <p:cNvPr id="9" name="TextBox 8"/>
+          <p:cNvSpPr txBox="1"/>
+          <p:nvPr/>
+        </p:nvSpPr>
+        <p:spPr>
+          <a:xfrm>
+            <a:off x="1097280" y="2478024"/>
+            <a:ext cx="2743200" cy="640080"/>
+          </a:xfrm>
+          <a:prstGeom prst="rect">
+            <a:avLst/>
+          </a:prstGeom>
+          <a:noFill/>
+        </p:spPr>
+        <p:txBody>
+          <a:bodyPr wrap="square" anchor="t" lIns="0" rIns="0" tIns="0" bIns="0">
+            <a:spAutoFit/>
+          </a:bodyPr>
+          <a:lstStyle/>
+          <a:p>
+            <a:pPr algn="l"/>
+            <a:r>
+              <a:rPr sz="1500" b="1">
+                <a:solidFill>
+                  <a:srgbClr val="B23A2A"/>
+                </a:solidFill>
+                <a:latin typeface="微软雅黑"/>
+                <a:ea typeface="微软雅黑"/>
+                <a:cs typeface="微软雅黑"/>
+              </a:rPr>
+              <a:t>通讯 vs 消息</a:t>
+            </a:r>
+          </a:p>
+        </p:txBody>
+      </p:sp>
+      <p:sp>
+        <p:nvSpPr>
+          <p:cNvPr id="10" name="TextBox 9"/>
+          <p:cNvSpPr txBox="1"/>
+          <p:nvPr/>
+        </p:nvSpPr>
+        <p:spPr>
+          <a:xfrm>
+            <a:off x="4023360" y="2478024"/>
+            <a:ext cx="7253935" cy="640080"/>
+          </a:xfrm>
+          <a:prstGeom prst="rect">
+            <a:avLst/>
+          </a:prstGeom>
+          <a:noFill/>
+        </p:spPr>
+        <p:txBody>
+          <a:bodyPr wrap="square" anchor="t" lIns="0" rIns="0" tIns="0" bIns="0">
+            <a:spAutoFit/>
+          </a:bodyPr>
+          <a:lstStyle/>
+          <a:p>
+            <a:pPr algn="l">
+              <a:lnSpc>
+                <a:spcPct val="135000"/>
+              </a:lnSpc>
+            </a:pPr>
+            <a:r>
+              <a:rPr sz="1350" b="0">
+                <a:solidFill>
+                  <a:srgbClr val="1C2A33"/>
+                </a:solidFill>
+                <a:latin typeface="楷体"/>
+                <a:ea typeface="楷体"/>
+                <a:cs typeface="楷体"/>
+              </a:rPr>
+              <a:t>消息——短·简·快；通讯——长·细·有人物（仍须真实）</a:t>
+            </a:r>
+          </a:p>
+        </p:txBody>
+      </p:sp>
+      <p:sp>
+        <p:nvSpPr>
+          <p:cNvPr id="11" name="Rounded Rectangle 10"/>
+          <p:cNvSpPr/>
+          <p:nvPr/>
+        </p:nvSpPr>
+        <p:spPr>
+          <a:xfrm>
+            <a:off x="640080" y="3319272"/>
+            <a:ext cx="10911535" cy="914400"/>
+          </a:xfrm>
+          <a:prstGeom prst="roundRect">
+            <a:avLst/>
+          </a:prstGeom>
+          <a:solidFill>
+            <a:srgbClr val="E7DFD2"/>
+          </a:solidFill>
+          <a:ln w="10160">
+            <a:solidFill>
+              <a:srgbClr val="6B6258"/>
+            </a:solidFill>
+          </a:ln>
+          <a:effectLst/>
+        </p:spPr>
+        <p:style>
+          <a:lnRef idx="1">
+            <a:schemeClr val="accent1"/>
+          </a:lnRef>
+          <a:fillRef idx="3">
+            <a:schemeClr val="accent1"/>
+          </a:fillRef>
+          <a:effectRef idx="2">
+            <a:schemeClr val="accent1"/>
+          </a:effectRef>
+          <a:fontRef idx="minor">
+            <a:schemeClr val="lt1"/>
+          </a:fontRef>
+        </p:style>
+        <p:txBody>
+          <a:bodyPr rtlCol="0" anchor="ctr"/>
+          <a:lstStyle/>
+          <a:p>
+            <a:pPr algn="ctr"/>
+          </a:p>
+        </p:txBody>
+      </p:sp>
+      <p:sp>
+        <p:nvSpPr>
+          <p:cNvPr id="12" name="Rectangle 11"/>
+          <p:cNvSpPr/>
+          <p:nvPr/>
+        </p:nvSpPr>
+        <p:spPr>
+          <a:xfrm>
+            <a:off x="868680" y="3483864"/>
+            <a:ext cx="54864" cy="8128"/>
+          </a:xfrm>
+          <a:prstGeom prst="rect">
+            <a:avLst/>
+          </a:prstGeom>
+          <a:solidFill>
+            <a:srgbClr val="2E7D6B"/>
+          </a:solidFill>
+          <a:ln>
+            <a:noFill/>
+          </a:ln>
+          <a:effectLst/>
+        </p:spPr>
+        <p:style>
+          <a:lnRef idx="1">
+            <a:schemeClr val="accent1"/>
+          </a:lnRef>
+          <a:fillRef idx="3">
+            <a:schemeClr val="accent1"/>
+          </a:fillRef>
+          <a:effectRef idx="2">
+            <a:schemeClr val="accent1"/>
+          </a:effectRef>
+          <a:fontRef idx="minor">
+            <a:schemeClr val="lt1"/>
+          </a:fontRef>
+        </p:style>
+        <p:txBody>
+          <a:bodyPr rtlCol="0" anchor="ctr"/>
+          <a:lstStyle/>
+          <a:p>
+            <a:pPr algn="ctr"/>
+          </a:p>
+        </p:txBody>
+      </p:sp>
+      <p:sp>
+        <p:nvSpPr>
+          <p:cNvPr id="13" name="TextBox 12"/>
+          <p:cNvSpPr txBox="1"/>
+          <p:nvPr/>
+        </p:nvSpPr>
+        <p:spPr>
+          <a:xfrm>
+            <a:off x="1097280" y="3465576"/>
+            <a:ext cx="2743200" cy="640080"/>
+          </a:xfrm>
+          <a:prstGeom prst="rect">
+            <a:avLst/>
+          </a:prstGeom>
+          <a:noFill/>
+        </p:spPr>
+        <p:txBody>
+          <a:bodyPr wrap="square" anchor="t" lIns="0" rIns="0" tIns="0" bIns="0">
+            <a:spAutoFit/>
+          </a:bodyPr>
+          <a:lstStyle/>
+          <a:p>
+            <a:pPr algn="l"/>
+            <a:r>
+              <a:rPr sz="1500" b="1">
+                <a:solidFill>
+                  <a:srgbClr val="2E7D6B"/>
+                </a:solidFill>
+                <a:latin typeface="微软雅黑"/>
+                <a:ea typeface="微软雅黑"/>
+                <a:cs typeface="微软雅黑"/>
+              </a:rPr>
+              <a:t>科研时间线</a:t>
+            </a:r>
+          </a:p>
+        </p:txBody>
+      </p:sp>
+      <p:sp>
+        <p:nvSpPr>
+          <p:cNvPr id="14" name="TextBox 13"/>
+          <p:cNvSpPr txBox="1"/>
+          <p:nvPr/>
+        </p:nvSpPr>
+        <p:spPr>
+          <a:xfrm>
+            <a:off x="4023360" y="3465576"/>
+            <a:ext cx="7253935" cy="640080"/>
+          </a:xfrm>
+          <a:prstGeom prst="rect">
+            <a:avLst/>
+          </a:prstGeom>
+          <a:noFill/>
+        </p:spPr>
+        <p:txBody>
+          <a:bodyPr wrap="square" anchor="t" lIns="0" rIns="0" tIns="0" bIns="0">
+            <a:spAutoFit/>
+          </a:bodyPr>
+          <a:lstStyle/>
+          <a:p>
+            <a:pPr algn="l">
+              <a:lnSpc>
+                <a:spcPct val="135000"/>
+              </a:lnSpc>
+            </a:pPr>
+            <a:r>
+              <a:rPr sz="1350" b="0">
+                <a:solidFill>
+                  <a:srgbClr val="1C2A33"/>
+                </a:solidFill>
+                <a:latin typeface="楷体"/>
+                <a:ea typeface="楷体"/>
+                <a:cs typeface="楷体"/>
+              </a:rPr>
+              <a:t>1960 发现天然杂交稻 → 1964 找到雄性不育株 → 1973 三系成功（14万株→1株）</a:t>
+            </a:r>
+          </a:p>
+        </p:txBody>
+      </p:sp>
+      <p:sp>
+        <p:nvSpPr>
+          <p:cNvPr id="15" name="Rounded Rectangle 14"/>
+          <p:cNvSpPr/>
+          <p:nvPr/>
+        </p:nvSpPr>
+        <p:spPr>
+          <a:xfrm>
+            <a:off x="640080" y="4306824"/>
+            <a:ext cx="10911535" cy="914400"/>
+          </a:xfrm>
+          <a:prstGeom prst="roundRect">
+            <a:avLst/>
+          </a:prstGeom>
+          <a:solidFill>
+            <a:srgbClr val="FFFFFF"/>
+          </a:solidFill>
+          <a:ln w="10160">
+            <a:solidFill>
+              <a:srgbClr val="6B6258"/>
+            </a:solidFill>
+          </a:ln>
+          <a:effectLst/>
+        </p:spPr>
+        <p:style>
+          <a:lnRef idx="1">
+            <a:schemeClr val="accent1"/>
+          </a:lnRef>
+          <a:fillRef idx="3">
+            <a:schemeClr val="accent1"/>
+          </a:fillRef>
+          <a:effectRef idx="2">
+            <a:schemeClr val="accent1"/>
+          </a:effectRef>
+          <a:fontRef idx="minor">
+            <a:schemeClr val="lt1"/>
+          </a:fontRef>
+        </p:style>
+        <p:txBody>
+          <a:bodyPr rtlCol="0" anchor="ctr"/>
+          <a:lstStyle/>
+          <a:p>
+            <a:pPr algn="ctr"/>
+          </a:p>
+        </p:txBody>
+      </p:sp>
+      <p:sp>
+        <p:nvSpPr>
+          <p:cNvPr id="16" name="Rectangle 15"/>
+          <p:cNvSpPr/>
+          <p:nvPr/>
+        </p:nvSpPr>
+        <p:spPr>
+          <a:xfrm>
+            <a:off x="868680" y="4471416"/>
+            <a:ext cx="54864" cy="8128"/>
           </a:xfrm>
           <a:prstGeom prst="rect">
             <a:avLst/>
@@ -7451,24 +8000,102 @@
       </p:sp>
       <p:sp>
         <p:nvSpPr>
-          <p:cNvPr id="5" name="Rounded Rectangle 4"/>
+          <p:cNvPr id="17" name="TextBox 16"/>
+          <p:cNvSpPr txBox="1"/>
+          <p:nvPr/>
+        </p:nvSpPr>
+        <p:spPr>
+          <a:xfrm>
+            <a:off x="1097280" y="4453128"/>
+            <a:ext cx="2743200" cy="640080"/>
+          </a:xfrm>
+          <a:prstGeom prst="rect">
+            <a:avLst/>
+          </a:prstGeom>
+          <a:noFill/>
+        </p:spPr>
+        <p:txBody>
+          <a:bodyPr wrap="square" anchor="t" lIns="0" rIns="0" tIns="0" bIns="0">
+            <a:spAutoFit/>
+          </a:bodyPr>
+          <a:lstStyle/>
+          <a:p>
+            <a:pPr algn="l"/>
+            <a:r>
+              <a:rPr sz="1500" b="1">
+                <a:solidFill>
+                  <a:srgbClr val="C8A86B"/>
+                </a:solidFill>
+                <a:latin typeface="微软雅黑"/>
+                <a:ea typeface="微软雅黑"/>
+                <a:cs typeface="微软雅黑"/>
+              </a:rPr>
+              <a:t>科学精神</a:t>
+            </a:r>
+          </a:p>
+        </p:txBody>
+      </p:sp>
+      <p:sp>
+        <p:nvSpPr>
+          <p:cNvPr id="18" name="TextBox 17"/>
+          <p:cNvSpPr txBox="1"/>
+          <p:nvPr/>
+        </p:nvSpPr>
+        <p:spPr>
+          <a:xfrm>
+            <a:off x="4023360" y="4453128"/>
+            <a:ext cx="7253935" cy="640080"/>
+          </a:xfrm>
+          <a:prstGeom prst="rect">
+            <a:avLst/>
+          </a:prstGeom>
+          <a:noFill/>
+        </p:spPr>
+        <p:txBody>
+          <a:bodyPr wrap="square" anchor="t" lIns="0" rIns="0" tIns="0" bIns="0">
+            <a:spAutoFit/>
+          </a:bodyPr>
+          <a:lstStyle/>
+          <a:p>
+            <a:pPr algn="l">
+              <a:lnSpc>
+                <a:spcPct val="135000"/>
+              </a:lnSpc>
+            </a:pPr>
+            <a:r>
+              <a:rPr sz="1350" b="0">
+                <a:solidFill>
+                  <a:srgbClr val="1C2A33"/>
+                </a:solidFill>
+                <a:latin typeface="楷体"/>
+                <a:ea typeface="楷体"/>
+                <a:cs typeface="楷体"/>
+              </a:rPr>
+              <a:t>尊重事实 → 质疑权威 → 实践检验（← 初心：让所有人吃饱饭）</a:t>
+            </a:r>
+          </a:p>
+        </p:txBody>
+      </p:sp>
+      <p:sp>
+        <p:nvSpPr>
+          <p:cNvPr id="19" name="Rounded Rectangle 18"/>
           <p:cNvSpPr/>
           <p:nvPr/>
         </p:nvSpPr>
         <p:spPr>
           <a:xfrm>
-            <a:off x="640080" y="1417320"/>
-            <a:ext cx="10911535" cy="5394960"/>
+            <a:off x="640080" y="5294376"/>
+            <a:ext cx="10911535" cy="914400"/>
           </a:xfrm>
           <a:prstGeom prst="roundRect">
             <a:avLst/>
           </a:prstGeom>
           <a:solidFill>
-            <a:srgbClr val="FFFFFF"/>
+            <a:srgbClr val="E7DFD2"/>
           </a:solidFill>
-          <a:ln w="25400">
+          <a:ln w="10160">
             <a:solidFill>
-              <a:srgbClr val="C8A86B"/>
+              <a:srgbClr val="6B6258"/>
             </a:solidFill>
           </a:ln>
           <a:effectLst/>
@@ -7497,14 +8124,58 @@
       </p:sp>
       <p:sp>
         <p:nvSpPr>
-          <p:cNvPr id="6" name="TextBox 5"/>
+          <p:cNvPr id="20" name="Rectangle 19"/>
+          <p:cNvSpPr/>
+          <p:nvPr/>
+        </p:nvSpPr>
+        <p:spPr>
+          <a:xfrm>
+            <a:off x="868680" y="5458968"/>
+            <a:ext cx="54864" cy="8128"/>
+          </a:xfrm>
+          <a:prstGeom prst="rect">
+            <a:avLst/>
+          </a:prstGeom>
+          <a:solidFill>
+            <a:srgbClr val="6B6258"/>
+          </a:solidFill>
+          <a:ln>
+            <a:noFill/>
+          </a:ln>
+          <a:effectLst/>
+        </p:spPr>
+        <p:style>
+          <a:lnRef idx="1">
+            <a:schemeClr val="accent1"/>
+          </a:lnRef>
+          <a:fillRef idx="3">
+            <a:schemeClr val="accent1"/>
+          </a:fillRef>
+          <a:effectRef idx="2">
+            <a:schemeClr val="accent1"/>
+          </a:effectRef>
+          <a:fontRef idx="minor">
+            <a:schemeClr val="lt1"/>
+          </a:fontRef>
+        </p:style>
+        <p:txBody>
+          <a:bodyPr rtlCol="0" anchor="ctr"/>
+          <a:lstStyle/>
+          <a:p>
+            <a:pPr algn="ctr"/>
+          </a:p>
+        </p:txBody>
+      </p:sp>
+      <p:sp>
+        <p:nvSpPr>
+          <p:cNvPr id="21" name="TextBox 20"/>
           <p:cNvSpPr txBox="1"/>
           <p:nvPr/>
         </p:nvSpPr>
         <p:spPr>
           <a:xfrm>
-            <a:off x="914400" y="1554480"/>
-            <a:ext cx="10362895" cy="5120640"/>
+            <a:off x="1097280" y="5440680"/>
+            <a:ext cx="2743200" cy="640080"/>
           </a:xfrm>
           <a:prstGeom prst="rect">
             <a:avLst/>
@@ -7517,52 +8188,65 @@
           </a:bodyPr>
           <a:lstStyle/>
           <a:p>
-            <a:pPr algn="l">
-              <a:lnSpc>
-                <a:spcPct val="110000"/>
-              </a:lnSpc>
-              <a:spcAft>
-                <a:spcPts val="100"/>
-              </a:spcAft>
-            </a:pPr>
-            <a:r>
-              <a:rPr sz="1300" b="0">
-                <a:solidFill>
-                  <a:srgbClr val="1C2A33"/>
+            <a:pPr algn="l"/>
+            <a:r>
+              <a:rPr sz="1500" b="1">
+                <a:solidFill>
+                  <a:srgbClr val="6B6258"/>
                 </a:solidFill>
                 <a:latin typeface="微软雅黑"/>
                 <a:ea typeface="微软雅黑"/>
                 <a:cs typeface="微软雅黑"/>
               </a:rPr>
-              <a:t>┌── 喜看稻菽千重浪 ──┐
-│ 袁隆平:杂交水稻之父 │
-│ │
-│ 【通讯vs消息】 │
-│ 消息:短·简·快 │
-│ 通讯:长·细·有人物 │
-│ │
-│ 【科研时间线】 │
-│ 1960 发现天然杂交稻 │
-│ 1964 找到雄性不育株 │
-│ 1973 三系杂交稻成功 │
-│ (14万株→1株) │
-│ │
-│ 【科学精神】 │
-│ 尊重事实→质疑权威 │
-│ →实践检验 │
-│ ←初心:让所有人吃饱 │
-│ │
-│ 【实用文三步法】 │
-│ 圈信息→理脉络→ │
-│ 析精神 │
-└──────────────────────┘</a:t>
-            </a:r>
-          </a:p>
-        </p:txBody>
-      </p:sp>
-      <p:sp>
-        <p:nvSpPr>
-          <p:cNvPr id="7" name="TextBox 6"/>
+              <a:t>实用文三步法</a:t>
+            </a:r>
+          </a:p>
+        </p:txBody>
+      </p:sp>
+      <p:sp>
+        <p:nvSpPr>
+          <p:cNvPr id="22" name="TextBox 21"/>
+          <p:cNvSpPr txBox="1"/>
+          <p:nvPr/>
+        </p:nvSpPr>
+        <p:spPr>
+          <a:xfrm>
+            <a:off x="4023360" y="5440680"/>
+            <a:ext cx="7253935" cy="640080"/>
+          </a:xfrm>
+          <a:prstGeom prst="rect">
+            <a:avLst/>
+          </a:prstGeom>
+          <a:noFill/>
+        </p:spPr>
+        <p:txBody>
+          <a:bodyPr wrap="square" anchor="t" lIns="0" rIns="0" tIns="0" bIns="0">
+            <a:spAutoFit/>
+          </a:bodyPr>
+          <a:lstStyle/>
+          <a:p>
+            <a:pPr algn="l">
+              <a:lnSpc>
+                <a:spcPct val="135000"/>
+              </a:lnSpc>
+            </a:pPr>
+            <a:r>
+              <a:rPr sz="1350" b="0">
+                <a:solidFill>
+                  <a:srgbClr val="1C2A33"/>
+                </a:solidFill>
+                <a:latin typeface="楷体"/>
+                <a:ea typeface="楷体"/>
+                <a:cs typeface="楷体"/>
+              </a:rPr>
+              <a:t>圈关键信息 → 理事件脉络 → 析人物精神（可迁移）</a:t>
+            </a:r>
+          </a:p>
+        </p:txBody>
+      </p:sp>
+      <p:sp>
+        <p:nvSpPr>
+          <p:cNvPr id="23" name="TextBox 22"/>
           <p:cNvSpPr txBox="1"/>
           <p:nvPr/>
         </p:nvSpPr>
@@ -7689,13 +8373,13 @@
             <a:r>
               <a:rPr sz="1300" b="1">
                 <a:solidFill>
-                  <a:srgbClr val="2E7D6B"/>
+                  <a:srgbClr val="B23A2A"/>
                 </a:solidFill>
                 <a:latin typeface="微软雅黑"/>
                 <a:ea typeface="微软雅黑"/>
                 <a:cs typeface="微软雅黑"/>
               </a:rPr>
-              <a:t>分层作业</a:t>
+              <a:t>作业 · 分层</a:t>
             </a:r>
           </a:p>
         </p:txBody>
@@ -7710,6 +8394,301 @@
           <a:xfrm>
             <a:off x="640080" y="1097280"/>
             <a:ext cx="822960" cy="30480"/>
+          </a:xfrm>
+          <a:prstGeom prst="rect">
+            <a:avLst/>
+          </a:prstGeom>
+          <a:solidFill>
+            <a:srgbClr val="B23A2A"/>
+          </a:solidFill>
+          <a:ln>
+            <a:noFill/>
+          </a:ln>
+          <a:effectLst/>
+        </p:spPr>
+        <p:style>
+          <a:lnRef idx="1">
+            <a:schemeClr val="accent1"/>
+          </a:lnRef>
+          <a:fillRef idx="3">
+            <a:schemeClr val="accent1"/>
+          </a:fillRef>
+          <a:effectRef idx="2">
+            <a:schemeClr val="accent1"/>
+          </a:effectRef>
+          <a:fontRef idx="minor">
+            <a:schemeClr val="lt1"/>
+          </a:fontRef>
+        </p:style>
+        <p:txBody>
+          <a:bodyPr rtlCol="0" anchor="ctr"/>
+          <a:lstStyle/>
+          <a:p>
+            <a:pPr algn="ctr"/>
+          </a:p>
+        </p:txBody>
+      </p:sp>
+      <p:sp>
+        <p:nvSpPr>
+          <p:cNvPr id="5" name="TextBox 4"/>
+          <p:cNvSpPr txBox="1"/>
+          <p:nvPr/>
+        </p:nvSpPr>
+        <p:spPr>
+          <a:xfrm>
+            <a:off x="640080" y="1325880"/>
+            <a:ext cx="10058400" cy="548640"/>
+          </a:xfrm>
+          <a:prstGeom prst="rect">
+            <a:avLst/>
+          </a:prstGeom>
+          <a:noFill/>
+        </p:spPr>
+        <p:txBody>
+          <a:bodyPr wrap="square" anchor="t" lIns="0" rIns="0" tIns="0" bIns="0">
+            <a:spAutoFit/>
+          </a:bodyPr>
+          <a:lstStyle/>
+          <a:p>
+            <a:pPr algn="l"/>
+            <a:r>
+              <a:rPr sz="2600" b="1">
+                <a:solidFill>
+                  <a:srgbClr val="1C2A33"/>
+                </a:solidFill>
+                <a:latin typeface="楷体"/>
+                <a:ea typeface="楷体"/>
+                <a:cs typeface="楷体"/>
+              </a:rPr>
+              <a:t>基础 · 提升 · 拓展</a:t>
+            </a:r>
+          </a:p>
+        </p:txBody>
+      </p:sp>
+      <p:sp>
+        <p:nvSpPr>
+          <p:cNvPr id="6" name="Rounded Rectangle 5"/>
+          <p:cNvSpPr/>
+          <p:nvPr/>
+        </p:nvSpPr>
+        <p:spPr>
+          <a:xfrm>
+            <a:off x="640080" y="2194560"/>
+            <a:ext cx="3393338" cy="3566160"/>
+          </a:xfrm>
+          <a:prstGeom prst="roundRect">
+            <a:avLst/>
+          </a:prstGeom>
+          <a:solidFill>
+            <a:srgbClr val="FFFFFF"/>
+          </a:solidFill>
+          <a:ln w="20320">
+            <a:solidFill>
+              <a:srgbClr val="B23A2A"/>
+            </a:solidFill>
+          </a:ln>
+          <a:effectLst/>
+        </p:spPr>
+        <p:style>
+          <a:lnRef idx="1">
+            <a:schemeClr val="accent1"/>
+          </a:lnRef>
+          <a:fillRef idx="3">
+            <a:schemeClr val="accent1"/>
+          </a:fillRef>
+          <a:effectRef idx="2">
+            <a:schemeClr val="accent1"/>
+          </a:effectRef>
+          <a:fontRef idx="minor">
+            <a:schemeClr val="lt1"/>
+          </a:fontRef>
+        </p:style>
+        <p:txBody>
+          <a:bodyPr rtlCol="0" anchor="ctr"/>
+          <a:lstStyle/>
+          <a:p>
+            <a:pPr algn="ctr"/>
+          </a:p>
+        </p:txBody>
+      </p:sp>
+      <p:sp>
+        <p:nvSpPr>
+          <p:cNvPr id="7" name="Rectangle 6"/>
+          <p:cNvSpPr/>
+          <p:nvPr/>
+        </p:nvSpPr>
+        <p:spPr>
+          <a:xfrm>
+            <a:off x="640080" y="2194560"/>
+            <a:ext cx="3393338" cy="548640"/>
+          </a:xfrm>
+          <a:prstGeom prst="rect">
+            <a:avLst/>
+          </a:prstGeom>
+          <a:solidFill>
+            <a:srgbClr val="B23A2A"/>
+          </a:solidFill>
+          <a:ln>
+            <a:noFill/>
+          </a:ln>
+          <a:effectLst/>
+        </p:spPr>
+        <p:style>
+          <a:lnRef idx="1">
+            <a:schemeClr val="accent1"/>
+          </a:lnRef>
+          <a:fillRef idx="3">
+            <a:schemeClr val="accent1"/>
+          </a:fillRef>
+          <a:effectRef idx="2">
+            <a:schemeClr val="accent1"/>
+          </a:effectRef>
+          <a:fontRef idx="minor">
+            <a:schemeClr val="lt1"/>
+          </a:fontRef>
+        </p:style>
+        <p:txBody>
+          <a:bodyPr rtlCol="0" anchor="ctr"/>
+          <a:lstStyle/>
+          <a:p>
+            <a:pPr algn="ctr"/>
+          </a:p>
+        </p:txBody>
+      </p:sp>
+      <p:sp>
+        <p:nvSpPr>
+          <p:cNvPr id="8" name="TextBox 7"/>
+          <p:cNvSpPr txBox="1"/>
+          <p:nvPr/>
+        </p:nvSpPr>
+        <p:spPr>
+          <a:xfrm>
+            <a:off x="640080" y="2304288"/>
+            <a:ext cx="3393338" cy="365760"/>
+          </a:xfrm>
+          <a:prstGeom prst="rect">
+            <a:avLst/>
+          </a:prstGeom>
+          <a:noFill/>
+        </p:spPr>
+        <p:txBody>
+          <a:bodyPr wrap="square" anchor="t" lIns="0" rIns="0" tIns="0" bIns="0">
+            <a:spAutoFit/>
+          </a:bodyPr>
+          <a:lstStyle/>
+          <a:p>
+            <a:pPr algn="ctr"/>
+            <a:r>
+              <a:rPr sz="1600" b="1">
+                <a:solidFill>
+                  <a:srgbClr val="FFFFFF"/>
+                </a:solidFill>
+                <a:latin typeface="微软雅黑"/>
+                <a:ea typeface="微软雅黑"/>
+                <a:cs typeface="微软雅黑"/>
+              </a:rPr>
+              <a:t>基础 · 必做</a:t>
+            </a:r>
+          </a:p>
+        </p:txBody>
+      </p:sp>
+      <p:sp>
+        <p:nvSpPr>
+          <p:cNvPr id="9" name="TextBox 8"/>
+          <p:cNvSpPr txBox="1"/>
+          <p:nvPr/>
+        </p:nvSpPr>
+        <p:spPr>
+          <a:xfrm>
+            <a:off x="914400" y="3017520"/>
+            <a:ext cx="2844698" cy="2651760"/>
+          </a:xfrm>
+          <a:prstGeom prst="rect">
+            <a:avLst/>
+          </a:prstGeom>
+          <a:noFill/>
+        </p:spPr>
+        <p:txBody>
+          <a:bodyPr wrap="square" anchor="t" lIns="0" rIns="0" tIns="0" bIns="0">
+            <a:spAutoFit/>
+          </a:bodyPr>
+          <a:lstStyle/>
+          <a:p>
+            <a:pPr algn="l">
+              <a:lnSpc>
+                <a:spcPct val="155000"/>
+              </a:lnSpc>
+            </a:pPr>
+            <a:r>
+              <a:rPr sz="1350" b="0">
+                <a:solidFill>
+                  <a:srgbClr val="1C2A33"/>
+                </a:solidFill>
+                <a:latin typeface="楷体"/>
+                <a:ea typeface="楷体"/>
+                <a:cs typeface="楷体"/>
+              </a:rPr>
+              <a:t>完成袁隆平科研时间线（时间|事件|困难|突破），至少3个节点；解释「通讯」文体特征，至少3点。</a:t>
+            </a:r>
+          </a:p>
+        </p:txBody>
+      </p:sp>
+      <p:sp>
+        <p:nvSpPr>
+          <p:cNvPr id="10" name="Rounded Rectangle 9"/>
+          <p:cNvSpPr/>
+          <p:nvPr/>
+        </p:nvSpPr>
+        <p:spPr>
+          <a:xfrm>
+            <a:off x="4399178" y="2194560"/>
+            <a:ext cx="3393338" cy="3566160"/>
+          </a:xfrm>
+          <a:prstGeom prst="roundRect">
+            <a:avLst/>
+          </a:prstGeom>
+          <a:solidFill>
+            <a:srgbClr val="FFFFFF"/>
+          </a:solidFill>
+          <a:ln w="20320">
+            <a:solidFill>
+              <a:srgbClr val="2E7D6B"/>
+            </a:solidFill>
+          </a:ln>
+          <a:effectLst/>
+        </p:spPr>
+        <p:style>
+          <a:lnRef idx="1">
+            <a:schemeClr val="accent1"/>
+          </a:lnRef>
+          <a:fillRef idx="3">
+            <a:schemeClr val="accent1"/>
+          </a:fillRef>
+          <a:effectRef idx="2">
+            <a:schemeClr val="accent1"/>
+          </a:effectRef>
+          <a:fontRef idx="minor">
+            <a:schemeClr val="lt1"/>
+          </a:fontRef>
+        </p:style>
+        <p:txBody>
+          <a:bodyPr rtlCol="0" anchor="ctr"/>
+          <a:lstStyle/>
+          <a:p>
+            <a:pPr algn="ctr"/>
+          </a:p>
+        </p:txBody>
+      </p:sp>
+      <p:sp>
+        <p:nvSpPr>
+          <p:cNvPr id="11" name="Rectangle 10"/>
+          <p:cNvSpPr/>
+          <p:nvPr/>
+        </p:nvSpPr>
+        <p:spPr>
+          <a:xfrm>
+            <a:off x="4399178" y="2194560"/>
+            <a:ext cx="3393338" cy="548640"/>
           </a:xfrm>
           <a:prstGeom prst="rect">
             <a:avLst/>
@@ -7746,14 +8725,92 @@
       </p:sp>
       <p:sp>
         <p:nvSpPr>
-          <p:cNvPr id="5" name="Rounded Rectangle 4"/>
+          <p:cNvPr id="12" name="TextBox 11"/>
+          <p:cNvSpPr txBox="1"/>
+          <p:nvPr/>
+        </p:nvSpPr>
+        <p:spPr>
+          <a:xfrm>
+            <a:off x="4399178" y="2304288"/>
+            <a:ext cx="3393338" cy="365760"/>
+          </a:xfrm>
+          <a:prstGeom prst="rect">
+            <a:avLst/>
+          </a:prstGeom>
+          <a:noFill/>
+        </p:spPr>
+        <p:txBody>
+          <a:bodyPr wrap="square" anchor="t" lIns="0" rIns="0" tIns="0" bIns="0">
+            <a:spAutoFit/>
+          </a:bodyPr>
+          <a:lstStyle/>
+          <a:p>
+            <a:pPr algn="ctr"/>
+            <a:r>
+              <a:rPr sz="1600" b="1">
+                <a:solidFill>
+                  <a:srgbClr val="FFFFFF"/>
+                </a:solidFill>
+                <a:latin typeface="微软雅黑"/>
+                <a:ea typeface="微软雅黑"/>
+                <a:cs typeface="微软雅黑"/>
+              </a:rPr>
+              <a:t>提升 · 选做</a:t>
+            </a:r>
+          </a:p>
+        </p:txBody>
+      </p:sp>
+      <p:sp>
+        <p:nvSpPr>
+          <p:cNvPr id="13" name="TextBox 12"/>
+          <p:cNvSpPr txBox="1"/>
+          <p:nvPr/>
+        </p:nvSpPr>
+        <p:spPr>
+          <a:xfrm>
+            <a:off x="4673498" y="3017520"/>
+            <a:ext cx="2844698" cy="2651760"/>
+          </a:xfrm>
+          <a:prstGeom prst="rect">
+            <a:avLst/>
+          </a:prstGeom>
+          <a:noFill/>
+        </p:spPr>
+        <p:txBody>
+          <a:bodyPr wrap="square" anchor="t" lIns="0" rIns="0" tIns="0" bIns="0">
+            <a:spAutoFit/>
+          </a:bodyPr>
+          <a:lstStyle/>
+          <a:p>
+            <a:pPr algn="l">
+              <a:lnSpc>
+                <a:spcPct val="155000"/>
+              </a:lnSpc>
+            </a:pPr>
+            <a:r>
+              <a:rPr sz="1350" b="0">
+                <a:solidFill>
+                  <a:srgbClr val="1C2A33"/>
+                </a:solidFill>
+                <a:latin typeface="楷体"/>
+                <a:ea typeface="楷体"/>
+                <a:cs typeface="楷体"/>
+              </a:rPr>
+              <a:t>写150字分析「从14万株到1株看袁隆平的科学精神」：①引原文数据 ②析劳动量 ③点科学精神。</a:t>
+            </a:r>
+          </a:p>
+        </p:txBody>
+      </p:sp>
+      <p:sp>
+        <p:nvSpPr>
+          <p:cNvPr id="14" name="Rounded Rectangle 13"/>
           <p:cNvSpPr/>
           <p:nvPr/>
         </p:nvSpPr>
         <p:spPr>
           <a:xfrm>
-            <a:off x="640080" y="1417320"/>
-            <a:ext cx="10911535" cy="1417320"/>
+            <a:off x="8158276" y="2194560"/>
+            <a:ext cx="3393338" cy="3566160"/>
           </a:xfrm>
           <a:prstGeom prst="roundRect">
             <a:avLst/>
@@ -7761,9 +8818,9 @@
           <a:solidFill>
             <a:srgbClr val="FFFFFF"/>
           </a:solidFill>
-          <a:ln w="22860">
+          <a:ln w="20320">
             <a:solidFill>
-              <a:srgbClr val="2E7D6B"/>
+              <a:srgbClr val="C8A86B"/>
             </a:solidFill>
           </a:ln>
           <a:effectLst/>
@@ -7792,107 +8849,23 @@
       </p:sp>
       <p:sp>
         <p:nvSpPr>
-          <p:cNvPr id="6" name="TextBox 5"/>
-          <p:cNvSpPr txBox="1"/>
-          <p:nvPr/>
-        </p:nvSpPr>
-        <p:spPr>
-          <a:xfrm>
-            <a:off x="1371600" y="1527048"/>
-            <a:ext cx="9997135" cy="457200"/>
-          </a:xfrm>
-          <a:prstGeom prst="rect">
-            <a:avLst/>
-          </a:prstGeom>
-          <a:noFill/>
-        </p:spPr>
-        <p:txBody>
-          <a:bodyPr wrap="square" anchor="t" lIns="0" rIns="0" tIns="0" bIns="0">
-            <a:spAutoFit/>
-          </a:bodyPr>
-          <a:lstStyle/>
-          <a:p>
-            <a:pPr algn="l">
-              <a:lnSpc>
-                <a:spcPct val="110000"/>
-              </a:lnSpc>
-            </a:pPr>
-            <a:r>
-              <a:rPr sz="1600" b="1">
-                <a:solidFill>
-                  <a:srgbClr val="1C2A33"/>
-                </a:solidFill>
-                <a:latin typeface="微软雅黑"/>
-                <a:ea typeface="微软雅黑"/>
-                <a:cs typeface="微软雅黑"/>
-              </a:rPr>
-              <a:t/>
-            </a:r>
-          </a:p>
-        </p:txBody>
-      </p:sp>
-      <p:sp>
-        <p:nvSpPr>
-          <p:cNvPr id="7" name="TextBox 6"/>
-          <p:cNvSpPr txBox="1"/>
-          <p:nvPr/>
-        </p:nvSpPr>
-        <p:spPr>
-          <a:xfrm>
-            <a:off x="1371600" y="1965960"/>
-            <a:ext cx="9997135" cy="777240"/>
-          </a:xfrm>
-          <a:prstGeom prst="rect">
-            <a:avLst/>
-          </a:prstGeom>
-          <a:noFill/>
-        </p:spPr>
-        <p:txBody>
-          <a:bodyPr wrap="square" anchor="t" lIns="0" rIns="0" tIns="0" bIns="0">
-            <a:spAutoFit/>
-          </a:bodyPr>
-          <a:lstStyle/>
-          <a:p>
-            <a:pPr algn="l">
-              <a:lnSpc>
-                <a:spcPct val="128000"/>
-              </a:lnSpc>
-            </a:pPr>
-            <a:r>
-              <a:rPr sz="1100" b="0">
-                <a:solidFill>
-                  <a:srgbClr val="1C2A33"/>
-                </a:solidFill>
-                <a:latin typeface="楷体"/>
-                <a:ea typeface="楷体"/>
-                <a:cs typeface="楷体"/>
-              </a:rPr>
-              <a:t>【基础作业】1. 完成袁隆平科研时间线（时间|事件|困难|突破），至少填写3个节点。2. 解释「通讯」的文体特征，至少说出3点。</a:t>
-            </a:r>
-          </a:p>
-        </p:txBody>
-      </p:sp>
-      <p:sp>
-        <p:nvSpPr>
-          <p:cNvPr id="8" name="Rounded Rectangle 7"/>
+          <p:cNvPr id="15" name="Rectangle 14"/>
           <p:cNvSpPr/>
           <p:nvPr/>
         </p:nvSpPr>
         <p:spPr>
           <a:xfrm>
-            <a:off x="640080" y="2971800"/>
-            <a:ext cx="10911535" cy="1417320"/>
-          </a:xfrm>
-          <a:prstGeom prst="roundRect">
+            <a:off x="8158276" y="2194560"/>
+            <a:ext cx="3393338" cy="548640"/>
+          </a:xfrm>
+          <a:prstGeom prst="rect">
             <a:avLst/>
           </a:prstGeom>
           <a:solidFill>
-            <a:srgbClr val="FFFFFF"/>
+            <a:srgbClr val="C8A86B"/>
           </a:solidFill>
-          <a:ln w="22860">
-            <a:solidFill>
-              <a:srgbClr val="2E7D6B"/>
-            </a:solidFill>
+          <a:ln>
+            <a:noFill/>
           </a:ln>
           <a:effectLst/>
         </p:spPr>
@@ -7920,14 +8893,14 @@
       </p:sp>
       <p:sp>
         <p:nvSpPr>
-          <p:cNvPr id="9" name="TextBox 8"/>
+          <p:cNvPr id="16" name="TextBox 15"/>
           <p:cNvSpPr txBox="1"/>
           <p:nvPr/>
         </p:nvSpPr>
         <p:spPr>
           <a:xfrm>
-            <a:off x="1371600" y="3081528"/>
-            <a:ext cx="9997135" cy="457200"/>
+            <a:off x="8158276" y="2304288"/>
+            <a:ext cx="3393338" cy="365760"/>
           </a:xfrm>
           <a:prstGeom prst="rect">
             <a:avLst/>
@@ -7940,35 +8913,31 @@
           </a:bodyPr>
           <a:lstStyle/>
           <a:p>
-            <a:pPr algn="l">
-              <a:lnSpc>
-                <a:spcPct val="110000"/>
-              </a:lnSpc>
-            </a:pPr>
+            <a:pPr algn="ctr"/>
             <a:r>
               <a:rPr sz="1600" b="1">
                 <a:solidFill>
-                  <a:srgbClr val="1C2A33"/>
+                  <a:srgbClr val="FFFFFF"/>
                 </a:solidFill>
                 <a:latin typeface="微软雅黑"/>
                 <a:ea typeface="微软雅黑"/>
                 <a:cs typeface="微软雅黑"/>
               </a:rPr>
-              <a:t/>
-            </a:r>
-          </a:p>
-        </p:txBody>
-      </p:sp>
-      <p:sp>
-        <p:nvSpPr>
-          <p:cNvPr id="10" name="TextBox 9"/>
+              <a:t>拓展 · 衔接</a:t>
+            </a:r>
+          </a:p>
+        </p:txBody>
+      </p:sp>
+      <p:sp>
+        <p:nvSpPr>
+          <p:cNvPr id="17" name="TextBox 16"/>
           <p:cNvSpPr txBox="1"/>
           <p:nvPr/>
         </p:nvSpPr>
         <p:spPr>
           <a:xfrm>
-            <a:off x="1371600" y="3520440"/>
-            <a:ext cx="9997135" cy="777240"/>
+            <a:off x="8432596" y="3017520"/>
+            <a:ext cx="2844698" cy="2651760"/>
           </a:xfrm>
           <a:prstGeom prst="rect">
             <a:avLst/>
@@ -7983,11 +8952,11 @@
           <a:p>
             <a:pPr algn="l">
               <a:lnSpc>
-                <a:spcPct val="128000"/>
+                <a:spcPct val="155000"/>
               </a:lnSpc>
             </a:pPr>
             <a:r>
-              <a:rPr sz="1100" b="0">
+              <a:rPr sz="1350" b="0">
                 <a:solidFill>
                   <a:srgbClr val="1C2A33"/>
                 </a:solidFill>
@@ -7995,14 +8964,14 @@
                 <a:ea typeface="楷体"/>
                 <a:cs typeface="楷体"/>
               </a:rPr>
-              <a:t>【提高作业】写一段150字分析，主题为「从14万株到1株看袁隆平的科学精神」。要求：①引用原文数据；②分析数字背后的劳动量；③点明科学精神。</a:t>
-            </a:r>
-          </a:p>
-        </p:txBody>
-      </p:sp>
-      <p:sp>
-        <p:nvSpPr>
-          <p:cNvPr id="11" name="TextBox 10"/>
+              <a:t>用三步法试读下篇通讯《心有一团火》，关注「科学家」与「普通劳动者」的异同（预习）。</a:t>
+            </a:r>
+          </a:p>
+        </p:txBody>
+      </p:sp>
+      <p:sp>
+        <p:nvSpPr>
+          <p:cNvPr id="18" name="TextBox 17"/>
           <p:cNvSpPr txBox="1"/>
           <p:nvPr/>
         </p:nvSpPr>
@@ -8129,13 +9098,13 @@
             <a:r>
               <a:rPr sz="1300" b="1">
                 <a:solidFill>
-                  <a:srgbClr val="C8A86B"/>
+                  <a:srgbClr val="B23A2A"/>
                 </a:solidFill>
                 <a:latin typeface="微软雅黑"/>
                 <a:ea typeface="微软雅黑"/>
                 <a:cs typeface="微软雅黑"/>
               </a:rPr>
-              <a:t>本课小结</a:t>
+              <a:t>单元小结</a:t>
             </a:r>
           </a:p>
         </p:txBody>
@@ -8155,7 +9124,7 @@
             <a:avLst/>
           </a:prstGeom>
           <a:solidFill>
-            <a:srgbClr val="C8A86B"/>
+            <a:srgbClr val="B23A2A"/>
           </a:solidFill>
           <a:ln>
             <a:noFill/>
@@ -8186,23 +9155,62 @@
       </p:sp>
       <p:sp>
         <p:nvSpPr>
-          <p:cNvPr id="5" name="Rectangle 4"/>
+          <p:cNvPr id="5" name="TextBox 4"/>
+          <p:cNvSpPr txBox="1"/>
+          <p:nvPr/>
+        </p:nvSpPr>
+        <p:spPr>
+          <a:xfrm>
+            <a:off x="640080" y="1325880"/>
+            <a:ext cx="10515600" cy="548640"/>
+          </a:xfrm>
+          <a:prstGeom prst="rect">
+            <a:avLst/>
+          </a:prstGeom>
+          <a:noFill/>
+        </p:spPr>
+        <p:txBody>
+          <a:bodyPr wrap="square" anchor="t" lIns="0" rIns="0" tIns="0" bIns="0">
+            <a:spAutoFit/>
+          </a:bodyPr>
+          <a:lstStyle/>
+          <a:p>
+            <a:pPr algn="l"/>
+            <a:r>
+              <a:rPr sz="2600" b="1">
+                <a:solidFill>
+                  <a:srgbClr val="1C2A33"/>
+                </a:solidFill>
+                <a:latin typeface="楷体"/>
+                <a:ea typeface="楷体"/>
+                <a:cs typeface="楷体"/>
+              </a:rPr>
+              <a:t>第一课时 · 收得住</a:t>
+            </a:r>
+          </a:p>
+        </p:txBody>
+      </p:sp>
+      <p:sp>
+        <p:nvSpPr>
+          <p:cNvPr id="6" name="Rounded Rectangle 5"/>
           <p:cNvSpPr/>
           <p:nvPr/>
         </p:nvSpPr>
         <p:spPr>
           <a:xfrm>
-            <a:off x="640080" y="1737360"/>
-            <a:ext cx="54864" cy="431800"/>
-          </a:xfrm>
-          <a:prstGeom prst="rect">
+            <a:off x="640080" y="2103120"/>
+            <a:ext cx="5227167" cy="2103120"/>
+          </a:xfrm>
+          <a:prstGeom prst="roundRect">
             <a:avLst/>
           </a:prstGeom>
           <a:solidFill>
-            <a:srgbClr val="C8A86B"/>
+            <a:srgbClr val="FFFFFF"/>
           </a:solidFill>
-          <a:ln>
-            <a:noFill/>
+          <a:ln w="22860">
+            <a:solidFill>
+              <a:srgbClr val="B23A2A"/>
+            </a:solidFill>
           </a:ln>
           <a:effectLst/>
         </p:spPr>
@@ -8230,14 +9238,51 @@
       </p:sp>
       <p:sp>
         <p:nvSpPr>
-          <p:cNvPr id="6" name="TextBox 5"/>
+          <p:cNvPr id="7" name="TextBox 6"/>
           <p:cNvSpPr txBox="1"/>
           <p:nvPr/>
         </p:nvSpPr>
         <p:spPr>
           <a:xfrm>
-            <a:off x="868680" y="1645920"/>
-            <a:ext cx="10682935" cy="2194560"/>
+            <a:off x="914400" y="2258568"/>
+            <a:ext cx="4678527" cy="457200"/>
+          </a:xfrm>
+          <a:prstGeom prst="rect">
+            <a:avLst/>
+          </a:prstGeom>
+          <a:noFill/>
+        </p:spPr>
+        <p:txBody>
+          <a:bodyPr wrap="square" anchor="t" lIns="0" rIns="0" tIns="0" bIns="0">
+            <a:spAutoFit/>
+          </a:bodyPr>
+          <a:lstStyle/>
+          <a:p>
+            <a:pPr algn="l"/>
+            <a:r>
+              <a:rPr sz="1600" b="1">
+                <a:solidFill>
+                  <a:srgbClr val="B23A2A"/>
+                </a:solidFill>
+                <a:latin typeface="楷体"/>
+                <a:ea typeface="楷体"/>
+                <a:cs typeface="楷体"/>
+              </a:rPr>
+              <a:t>读通讯的三步法</a:t>
+            </a:r>
+          </a:p>
+        </p:txBody>
+      </p:sp>
+      <p:sp>
+        <p:nvSpPr>
+          <p:cNvPr id="8" name="TextBox 7"/>
+          <p:cNvSpPr txBox="1"/>
+          <p:nvPr/>
+        </p:nvSpPr>
+        <p:spPr>
+          <a:xfrm>
+            <a:off x="914400" y="2743200"/>
+            <a:ext cx="4678527" cy="1371600"/>
           </a:xfrm>
           <a:prstGeom prst="rect">
             <a:avLst/>
@@ -8255,11 +9300,11 @@
                 <a:spcPct val="150000"/>
               </a:lnSpc>
               <a:spcAft>
-                <a:spcPts val="1000"/>
+                <a:spcPts val="600"/>
               </a:spcAft>
             </a:pPr>
             <a:r>
-              <a:rPr sz="2200" b="0">
+              <a:rPr sz="1450" b="0">
                 <a:solidFill>
                   <a:srgbClr val="1C2A33"/>
                 </a:solidFill>
@@ -8267,28 +9312,359 @@
                 <a:ea typeface="楷体"/>
                 <a:cs typeface="楷体"/>
               </a:rPr>
-              <a:t>本单元主题：劳动光荣。把今天学到的方法带进下一篇——自己读、自己想、自己写。</a:t>
-            </a:r>
-          </a:p>
+              <a:t>圈关键信息 → 理事件脉络 → 析人物精神。</a:t>
+            </a:r>
+          </a:p>
+          <a:p>
+            <a:pPr algn="l">
+              <a:lnSpc>
+                <a:spcPct val="145000"/>
+              </a:lnSpc>
+            </a:pPr>
+            <a:r>
+              <a:rPr sz="1350" b="0">
+                <a:solidFill>
+                  <a:srgbClr val="6B6258"/>
+                </a:solidFill>
+                <a:latin typeface="楷体"/>
+                <a:ea typeface="楷体"/>
+                <a:cs typeface="楷体"/>
+              </a:rPr>
+              <a:t>这套读法可迁移到本单元后续的每一篇通讯。</a:t>
+            </a:r>
+          </a:p>
+        </p:txBody>
+      </p:sp>
+      <p:sp>
+        <p:nvSpPr>
+          <p:cNvPr id="9" name="Rounded Rectangle 8"/>
+          <p:cNvSpPr/>
+          <p:nvPr/>
+        </p:nvSpPr>
+        <p:spPr>
+          <a:xfrm>
+            <a:off x="640080" y="4389119"/>
+            <a:ext cx="5227167" cy="2103120"/>
+          </a:xfrm>
+          <a:prstGeom prst="roundRect">
+            <a:avLst/>
+          </a:prstGeom>
+          <a:solidFill>
+            <a:srgbClr val="FFFFFF"/>
+          </a:solidFill>
+          <a:ln w="22860">
+            <a:solidFill>
+              <a:srgbClr val="2E7D6B"/>
+            </a:solidFill>
+          </a:ln>
+          <a:effectLst/>
+        </p:spPr>
+        <p:style>
+          <a:lnRef idx="1">
+            <a:schemeClr val="accent1"/>
+          </a:lnRef>
+          <a:fillRef idx="3">
+            <a:schemeClr val="accent1"/>
+          </a:fillRef>
+          <a:effectRef idx="2">
+            <a:schemeClr val="accent1"/>
+          </a:effectRef>
+          <a:fontRef idx="minor">
+            <a:schemeClr val="lt1"/>
+          </a:fontRef>
+        </p:style>
+        <p:txBody>
+          <a:bodyPr rtlCol="0" anchor="ctr"/>
+          <a:lstStyle/>
+          <a:p>
+            <a:pPr algn="ctr"/>
+          </a:p>
+        </p:txBody>
+      </p:sp>
+      <p:sp>
+        <p:nvSpPr>
+          <p:cNvPr id="10" name="TextBox 9"/>
+          <p:cNvSpPr txBox="1"/>
+          <p:nvPr/>
+        </p:nvSpPr>
+        <p:spPr>
+          <a:xfrm>
+            <a:off x="914400" y="4544567"/>
+            <a:ext cx="4678527" cy="457200"/>
+          </a:xfrm>
+          <a:prstGeom prst="rect">
+            <a:avLst/>
+          </a:prstGeom>
+          <a:noFill/>
+        </p:spPr>
+        <p:txBody>
+          <a:bodyPr wrap="square" anchor="t" lIns="0" rIns="0" tIns="0" bIns="0">
+            <a:spAutoFit/>
+          </a:bodyPr>
+          <a:lstStyle/>
           <a:p>
             <a:pPr algn="l"/>
             <a:r>
               <a:rPr sz="1600" b="1">
                 <a:solidFill>
-                  <a:srgbClr val="B23A2A"/>
-                </a:solidFill>
-                <a:latin typeface="微软雅黑"/>
-                <a:ea typeface="微软雅黑"/>
-                <a:cs typeface="微软雅黑"/>
+                  <a:srgbClr val="2E7D6B"/>
+                </a:solidFill>
+                <a:latin typeface="楷体"/>
+                <a:ea typeface="楷体"/>
+                <a:cs typeface="楷体"/>
               </a:rPr>
-              <a:t>方法迁移：圈关键信息 → 理事件脉络 → 析人物精神</a:t>
-            </a:r>
-          </a:p>
-        </p:txBody>
-      </p:sp>
-      <p:sp>
-        <p:nvSpPr>
-          <p:cNvPr id="7" name="TextBox 6"/>
+              <a:t>单元主线</a:t>
+            </a:r>
+          </a:p>
+        </p:txBody>
+      </p:sp>
+      <p:sp>
+        <p:nvSpPr>
+          <p:cNvPr id="11" name="TextBox 10"/>
+          <p:cNvSpPr txBox="1"/>
+          <p:nvPr/>
+        </p:nvSpPr>
+        <p:spPr>
+          <a:xfrm>
+            <a:off x="914400" y="5029200"/>
+            <a:ext cx="4678527" cy="1371600"/>
+          </a:xfrm>
+          <a:prstGeom prst="rect">
+            <a:avLst/>
+          </a:prstGeom>
+          <a:noFill/>
+        </p:spPr>
+        <p:txBody>
+          <a:bodyPr wrap="square" anchor="t" lIns="0" rIns="0" tIns="0" bIns="0">
+            <a:spAutoFit/>
+          </a:bodyPr>
+          <a:lstStyle/>
+          <a:p>
+            <a:pPr algn="l">
+              <a:lnSpc>
+                <a:spcPct val="150000"/>
+              </a:lnSpc>
+              <a:spcAft>
+                <a:spcPts val="600"/>
+              </a:spcAft>
+            </a:pPr>
+            <a:r>
+              <a:rPr sz="1400" b="0">
+                <a:solidFill>
+                  <a:srgbClr val="1C2A33"/>
+                </a:solidFill>
+                <a:latin typeface="楷体"/>
+                <a:ea typeface="楷体"/>
+                <a:cs typeface="楷体"/>
+              </a:rPr>
+              <a:t>劳动光荣，写在稻田、柜台与高原。袁隆平以科学劳动让中国人把饭碗端在自己手里。</a:t>
+            </a:r>
+          </a:p>
+          <a:p>
+            <a:pPr algn="l">
+              <a:lnSpc>
+                <a:spcPct val="145000"/>
+              </a:lnSpc>
+            </a:pPr>
+            <a:r>
+              <a:rPr sz="1350" b="1">
+                <a:solidFill>
+                  <a:srgbClr val="2E7D6B"/>
+                </a:solidFill>
+                <a:latin typeface="楷体"/>
+                <a:ea typeface="楷体"/>
+                <a:cs typeface="楷体"/>
+              </a:rPr>
+              <a:t>下节课：群文比较《心有一团火》《探界者钟扬》。</a:t>
+            </a:r>
+          </a:p>
+        </p:txBody>
+      </p:sp>
+      <p:sp>
+        <p:nvSpPr>
+          <p:cNvPr id="12" name="Rounded Rectangle 11"/>
+          <p:cNvSpPr/>
+          <p:nvPr/>
+        </p:nvSpPr>
+        <p:spPr>
+          <a:xfrm>
+            <a:off x="6324447" y="2103120"/>
+            <a:ext cx="5227167" cy="4389120"/>
+          </a:xfrm>
+          <a:prstGeom prst="roundRect">
+            <a:avLst/>
+          </a:prstGeom>
+          <a:solidFill>
+            <a:srgbClr val="1C2A33"/>
+          </a:solidFill>
+          <a:effectLst/>
+        </p:spPr>
+        <p:style>
+          <a:lnRef idx="1">
+            <a:schemeClr val="accent1"/>
+          </a:lnRef>
+          <a:fillRef idx="3">
+            <a:schemeClr val="accent1"/>
+          </a:fillRef>
+          <a:effectRef idx="2">
+            <a:schemeClr val="accent1"/>
+          </a:effectRef>
+          <a:fontRef idx="minor">
+            <a:schemeClr val="lt1"/>
+          </a:fontRef>
+        </p:style>
+        <p:txBody>
+          <a:bodyPr rtlCol="0" anchor="ctr"/>
+          <a:lstStyle/>
+          <a:p>
+            <a:pPr algn="ctr"/>
+          </a:p>
+        </p:txBody>
+      </p:sp>
+      <p:sp>
+        <p:nvSpPr>
+          <p:cNvPr id="13" name="TextBox 12"/>
+          <p:cNvSpPr txBox="1"/>
+          <p:nvPr/>
+        </p:nvSpPr>
+        <p:spPr>
+          <a:xfrm>
+            <a:off x="6598767" y="2286000"/>
+            <a:ext cx="4678527" cy="457200"/>
+          </a:xfrm>
+          <a:prstGeom prst="rect">
+            <a:avLst/>
+          </a:prstGeom>
+          <a:noFill/>
+        </p:spPr>
+        <p:txBody>
+          <a:bodyPr wrap="square" anchor="t" lIns="0" rIns="0" tIns="0" bIns="0">
+            <a:spAutoFit/>
+          </a:bodyPr>
+          <a:lstStyle/>
+          <a:p>
+            <a:pPr algn="l"/>
+            <a:r>
+              <a:rPr sz="1700" b="1">
+                <a:solidFill>
+                  <a:srgbClr val="C8A86B"/>
+                </a:solidFill>
+                <a:latin typeface="楷体"/>
+                <a:ea typeface="楷体"/>
+                <a:cs typeface="楷体"/>
+              </a:rPr>
+              <a:t>一句话记住</a:t>
+            </a:r>
+          </a:p>
+        </p:txBody>
+      </p:sp>
+      <p:sp>
+        <p:nvSpPr>
+          <p:cNvPr id="14" name="TextBox 13"/>
+          <p:cNvSpPr txBox="1"/>
+          <p:nvPr/>
+        </p:nvSpPr>
+        <p:spPr>
+          <a:xfrm>
+            <a:off x="6598767" y="2880360"/>
+            <a:ext cx="4678527" cy="3474720"/>
+          </a:xfrm>
+          <a:prstGeom prst="rect">
+            <a:avLst/>
+          </a:prstGeom>
+          <a:noFill/>
+        </p:spPr>
+        <p:txBody>
+          <a:bodyPr wrap="square" anchor="t" lIns="0" rIns="0" tIns="0" bIns="0">
+            <a:spAutoFit/>
+          </a:bodyPr>
+          <a:lstStyle/>
+          <a:p>
+            <a:pPr algn="l">
+              <a:lnSpc>
+                <a:spcPct val="150000"/>
+              </a:lnSpc>
+              <a:spcAft>
+                <a:spcPts val="800"/>
+              </a:spcAft>
+            </a:pPr>
+            <a:r>
+              <a:rPr sz="1500" b="0">
+                <a:solidFill>
+                  <a:srgbClr val="FFFFFF"/>
+                </a:solidFill>
+                <a:latin typeface="楷体"/>
+                <a:ea typeface="楷体"/>
+                <a:cs typeface="楷体"/>
+              </a:rPr>
+              <a:t>14万株稻穗里，长出1株不育株——</a:t>
+            </a:r>
+          </a:p>
+          <a:p>
+            <a:pPr algn="l">
+              <a:lnSpc>
+                <a:spcPct val="150000"/>
+              </a:lnSpc>
+              <a:spcAft>
+                <a:spcPts val="800"/>
+              </a:spcAft>
+            </a:pPr>
+            <a:r>
+              <a:rPr sz="1400" b="0">
+                <a:solidFill>
+                  <a:srgbClr val="E7DFD2"/>
+                </a:solidFill>
+                <a:latin typeface="楷体"/>
+                <a:ea typeface="楷体"/>
+                <a:cs typeface="楷体"/>
+              </a:rPr>
+              <a:t>科学精神不在灵感，在田间一棵一棵的查验；</a:t>
+            </a:r>
+          </a:p>
+          <a:p>
+            <a:pPr algn="l">
+              <a:lnSpc>
+                <a:spcPct val="150000"/>
+              </a:lnSpc>
+              <a:spcAft>
+                <a:spcPts val="800"/>
+              </a:spcAft>
+            </a:pPr>
+            <a:r>
+              <a:rPr sz="1400" b="0">
+                <a:solidFill>
+                  <a:srgbClr val="E7DFD2"/>
+                </a:solidFill>
+                <a:latin typeface="楷体"/>
+                <a:ea typeface="楷体"/>
+                <a:cs typeface="楷体"/>
+              </a:rPr>
+              <a:t>通讯之美不在虚构，在真实事件的生动书写；</a:t>
+            </a:r>
+          </a:p>
+          <a:p>
+            <a:pPr algn="l">
+              <a:lnSpc>
+                <a:spcPct val="150000"/>
+              </a:lnSpc>
+            </a:pPr>
+            <a:r>
+              <a:rPr sz="1400" b="0">
+                <a:solidFill>
+                  <a:srgbClr val="FFFFFF"/>
+                </a:solidFill>
+                <a:latin typeface="楷体"/>
+                <a:ea typeface="楷体"/>
+                <a:cs typeface="楷体"/>
+              </a:rPr>
+              <a:t>劳动光荣不在口号，在把一件事做到底。</a:t>
+            </a:r>
+          </a:p>
+        </p:txBody>
+      </p:sp>
+      <p:sp>
+        <p:nvSpPr>
+          <p:cNvPr id="15" name="TextBox 14"/>
           <p:cNvSpPr txBox="1"/>
           <p:nvPr/>
         </p:nvSpPr>
